--- a/docs/Canvas_Product_Deck.pptx
+++ b/docs/Canvas_Product_Deck.pptx
@@ -19,7 +19,6 @@
     <p:sldId id="267" r:id="rId18"/>
     <p:sldId id="268" r:id="rId19"/>
     <p:sldId id="269" r:id="rId20"/>
-    <p:sldId id="270" r:id="rId21"/>
   </p:sldIdLst>
   <p:sldSz cx="12191695" cy="6858000" type="screen4x3"/>
   <p:notesSz cx="6858000" cy="9144000"/>
@@ -3213,7 +3212,7 @@
               </a:defRPr>
             </a:pPr>
             <a:r>
-              <a:t>Build visual AI workflows connecting text, image, audio, and video generation</a:t>
+              <a:t>Visual workflows chaining Gemini, Veo, Lyria, and Cloud TTS</a:t>
             </a:r>
           </a:p>
         </p:txBody>
@@ -3249,7 +3248,43 @@
               </a:defRPr>
             </a:pPr>
             <a:r>
-              <a:t>Powered by Google Gemini  |  Veo  |  Lyria  |  Cloud TTS</a:t>
+              <a:t>Powered by Google Cloud  |  Vertex AI  |  Firebase</a:t>
+            </a:r>
+          </a:p>
+        </p:txBody>
+      </p:sp>
+      <p:sp>
+        <p:nvSpPr>
+          <p:cNvPr id="6" name="TextBox 5"/>
+          <p:cNvSpPr txBox="1"/>
+          <p:nvPr/>
+        </p:nvSpPr>
+        <p:spPr>
+          <a:xfrm>
+            <a:off x="914400" y="5943600"/>
+            <a:ext cx="10058400" cy="365760"/>
+          </a:xfrm>
+          <a:prstGeom prst="rect">
+            <a:avLst/>
+          </a:prstGeom>
+          <a:noFill/>
+        </p:spPr>
+        <p:txBody>
+          <a:bodyPr wrap="square">
+            <a:spAutoFit/>
+          </a:bodyPr>
+          <a:lstStyle/>
+          <a:p>
+            <a:pPr algn="ctr">
+              <a:defRPr sz="1200" b="0">
+                <a:solidFill>
+                  <a:srgbClr val="9CA3AF"/>
+                </a:solidFill>
+                <a:latin typeface="Calibri"/>
+              </a:defRPr>
+            </a:pPr>
+            <a:r>
+              <a:t>vibe-studio-refactor-440790012685.us-central1.run.app</a:t>
             </a:r>
           </a:p>
         </p:txBody>
@@ -3311,7 +3346,7 @@
               </a:defRPr>
             </a:pPr>
             <a:r>
-              <a:t>Text-to-Speech Features</a:t>
+              <a:t>Team Collaboration</a:t>
             </a:r>
           </a:p>
         </p:txBody>
@@ -3347,7 +3382,7 @@
               </a:defRPr>
             </a:pPr>
             <a:r>
-              <a:t>23 Languages</a:t>
+              <a:t>Create &amp; Join Teams</a:t>
             </a:r>
           </a:p>
         </p:txBody>
@@ -3361,7 +3396,7 @@
         <p:spPr>
           <a:xfrm>
             <a:off x="731520" y="1737360"/>
-            <a:ext cx="5029200" cy="1371600"/>
+            <a:ext cx="5029200" cy="1828800"/>
           </a:xfrm>
           <a:prstGeom prst="rect">
             <a:avLst/>
@@ -3374,16 +3409,67 @@
           </a:bodyPr>
           <a:lstStyle/>
           <a:p>
-            <a:pPr algn="l">
-              <a:defRPr sz="1400" b="0">
-                <a:solidFill>
-                  <a:srgbClr val="9CA3AF"/>
+            <a:pPr>
+              <a:spcAft>
+                <a:spcPts val="800"/>
+              </a:spcAft>
+              <a:defRPr sz="1500">
+                <a:solidFill>
+                  <a:srgbClr val="FFFFFF"/>
                 </a:solidFill>
                 <a:latin typeface="Calibri"/>
               </a:defRPr>
             </a:pPr>
             <a:r>
-              <a:t>English, Spanish, French, German, Italian, Portuguese, Japanese, Korean, Chinese, Hindi, Arabic, Russian, Turkish, Thai, Indonesian, Vietnamese, and more</a:t>
+              <a:t>Click "+" next to Teams in sidebar</a:t>
+            </a:r>
+          </a:p>
+          <a:p>
+            <a:pPr>
+              <a:spcAft>
+                <a:spcPts val="800"/>
+              </a:spcAft>
+              <a:defRPr sz="1500">
+                <a:solidFill>
+                  <a:srgbClr val="FFFFFF"/>
+                </a:solidFill>
+                <a:latin typeface="Calibri"/>
+              </a:defRPr>
+            </a:pPr>
+            <a:r>
+              <a:t>Auto-generated 8-char join code</a:t>
+            </a:r>
+          </a:p>
+          <a:p>
+            <a:pPr>
+              <a:spcAft>
+                <a:spcPts val="800"/>
+              </a:spcAft>
+              <a:defRPr sz="1500">
+                <a:solidFill>
+                  <a:srgbClr val="FFFFFF"/>
+                </a:solidFill>
+                <a:latin typeface="Calibri"/>
+              </a:defRPr>
+            </a:pPr>
+            <a:r>
+              <a:t>Share code with teammates</a:t>
+            </a:r>
+          </a:p>
+          <a:p>
+            <a:pPr>
+              <a:spcAft>
+                <a:spcPts val="800"/>
+              </a:spcAft>
+              <a:defRPr sz="1500">
+                <a:solidFill>
+                  <a:srgbClr val="FFFFFF"/>
+                </a:solidFill>
+                <a:latin typeface="Calibri"/>
+              </a:defRPr>
+            </a:pPr>
+            <a:r>
+              <a:t>Click team code to copy</a:t>
             </a:r>
           </a:p>
         </p:txBody>
@@ -3396,7 +3482,7 @@
         </p:nvSpPr>
         <p:spPr>
           <a:xfrm>
-            <a:off x="731520" y="3017520"/>
+            <a:off x="731520" y="3657600"/>
             <a:ext cx="5029200" cy="457200"/>
           </a:xfrm>
           <a:prstGeom prst="rect">
@@ -3419,154 +3505,261 @@
               </a:defRPr>
             </a:pPr>
             <a:r>
-              <a:t>7 Voices</a:t>
-            </a:r>
-          </a:p>
-        </p:txBody>
-      </p:sp>
-      <p:sp>
-        <p:nvSpPr>
-          <p:cNvPr id="6" name="TextBox 5"/>
-          <p:cNvSpPr txBox="1"/>
+              <a:t>Workflow Visibility</a:t>
+            </a:r>
+          </a:p>
+        </p:txBody>
+      </p:sp>
+      <p:graphicFrame>
+        <p:nvGraphicFramePr>
+          <p:cNvPr id="6" name="Table 5"/>
+          <p:cNvGraphicFramePr>
+            <a:graphicFrameLocks noGrp="1"/>
+          </p:cNvGraphicFramePr>
           <p:nvPr/>
-        </p:nvSpPr>
+        </p:nvGraphicFramePr>
+        <p:xfrm>
+          <a:off x="731520" y="4206240"/>
+          <a:ext cx="5029200" cy="1536192"/>
+        </p:xfrm>
+        <a:graphic>
+          <a:graphicData uri="http://schemas.openxmlformats.org/drawingml/2006/table">
+            <a:tbl>
+              <a:tblPr firstRow="1" bandRow="1">
+                <a:tableStyleId>{5C22544A-7EE6-4342-B048-85BDC9FD1C3A}</a:tableStyleId>
+              </a:tblPr>
+              <a:tblGrid>
+                <a:gridCol w="2514600"/>
+                <a:gridCol w="2514600"/>
+              </a:tblGrid>
+              <a:tr h="384048">
+                <a:tc>
+                  <a:txBody>
+                    <a:bodyPr/>
+                    <a:lstStyle/>
+                    <a:p>
+                      <a:pPr>
+                        <a:defRPr sz="1100" b="1">
+                          <a:solidFill>
+                            <a:srgbClr val="FFFFFF"/>
+                          </a:solidFill>
+                          <a:latin typeface="Calibri"/>
+                        </a:defRPr>
+                      </a:pPr>
+                      <a:r>
+                        <a:t>Level</a:t>
+                      </a:r>
+                    </a:p>
+                  </a:txBody>
+                  <a:tcPr>
+                    <a:solidFill>
+                      <a:srgbClr val="1F1F3A"/>
+                    </a:solidFill>
+                  </a:tcPr>
+                </a:tc>
+                <a:tc>
+                  <a:txBody>
+                    <a:bodyPr/>
+                    <a:lstStyle/>
+                    <a:p>
+                      <a:pPr>
+                        <a:defRPr sz="1100" b="1">
+                          <a:solidFill>
+                            <a:srgbClr val="FFFFFF"/>
+                          </a:solidFill>
+                          <a:latin typeface="Calibri"/>
+                        </a:defRPr>
+                      </a:pPr>
+                      <a:r>
+                        <a:t>Who sees it</a:t>
+                      </a:r>
+                    </a:p>
+                  </a:txBody>
+                  <a:tcPr>
+                    <a:solidFill>
+                      <a:srgbClr val="1F1F3A"/>
+                    </a:solidFill>
+                  </a:tcPr>
+                </a:tc>
+              </a:tr>
+              <a:tr h="384048">
+                <a:tc>
+                  <a:txBody>
+                    <a:bodyPr/>
+                    <a:lstStyle/>
+                    <a:p>
+                      <a:pPr>
+                        <a:defRPr sz="1100">
+                          <a:solidFill>
+                            <a:srgbClr val="D1D5DB"/>
+                          </a:solidFill>
+                          <a:latin typeface="Calibri"/>
+                        </a:defRPr>
+                      </a:pPr>
+                      <a:r>
+                        <a:t>Private</a:t>
+                      </a:r>
+                    </a:p>
+                  </a:txBody>
+                  <a:tcPr>
+                    <a:solidFill>
+                      <a:srgbClr val="121224"/>
+                    </a:solidFill>
+                  </a:tcPr>
+                </a:tc>
+                <a:tc>
+                  <a:txBody>
+                    <a:bodyPr/>
+                    <a:lstStyle/>
+                    <a:p>
+                      <a:pPr>
+                        <a:defRPr sz="1100">
+                          <a:solidFill>
+                            <a:srgbClr val="D1D5DB"/>
+                          </a:solidFill>
+                          <a:latin typeface="Calibri"/>
+                        </a:defRPr>
+                      </a:pPr>
+                      <a:r>
+                        <a:t>Only you</a:t>
+                      </a:r>
+                    </a:p>
+                  </a:txBody>
+                  <a:tcPr>
+                    <a:solidFill>
+                      <a:srgbClr val="121224"/>
+                    </a:solidFill>
+                  </a:tcPr>
+                </a:tc>
+              </a:tr>
+              <a:tr h="384048">
+                <a:tc>
+                  <a:txBody>
+                    <a:bodyPr/>
+                    <a:lstStyle/>
+                    <a:p>
+                      <a:pPr>
+                        <a:defRPr sz="1100">
+                          <a:solidFill>
+                            <a:srgbClr val="D1D5DB"/>
+                          </a:solidFill>
+                          <a:latin typeface="Calibri"/>
+                        </a:defRPr>
+                      </a:pPr>
+                      <a:r>
+                        <a:t>Team</a:t>
+                      </a:r>
+                    </a:p>
+                  </a:txBody>
+                  <a:tcPr>
+                    <a:solidFill>
+                      <a:srgbClr val="121224"/>
+                    </a:solidFill>
+                  </a:tcPr>
+                </a:tc>
+                <a:tc>
+                  <a:txBody>
+                    <a:bodyPr/>
+                    <a:lstStyle/>
+                    <a:p>
+                      <a:pPr>
+                        <a:defRPr sz="1100">
+                          <a:solidFill>
+                            <a:srgbClr val="D1D5DB"/>
+                          </a:solidFill>
+                          <a:latin typeface="Calibri"/>
+                        </a:defRPr>
+                      </a:pPr>
+                      <a:r>
+                        <a:t>All team members</a:t>
+                      </a:r>
+                    </a:p>
+                  </a:txBody>
+                  <a:tcPr>
+                    <a:solidFill>
+                      <a:srgbClr val="121224"/>
+                    </a:solidFill>
+                  </a:tcPr>
+                </a:tc>
+              </a:tr>
+              <a:tr h="384048">
+                <a:tc>
+                  <a:txBody>
+                    <a:bodyPr/>
+                    <a:lstStyle/>
+                    <a:p>
+                      <a:pPr>
+                        <a:defRPr sz="1100">
+                          <a:solidFill>
+                            <a:srgbClr val="D1D5DB"/>
+                          </a:solidFill>
+                          <a:latin typeface="Calibri"/>
+                        </a:defRPr>
+                      </a:pPr>
+                      <a:r>
+                        <a:t>Public</a:t>
+                      </a:r>
+                    </a:p>
+                  </a:txBody>
+                  <a:tcPr>
+                    <a:solidFill>
+                      <a:srgbClr val="121224"/>
+                    </a:solidFill>
+                  </a:tcPr>
+                </a:tc>
+                <a:tc>
+                  <a:txBody>
+                    <a:bodyPr/>
+                    <a:lstStyle/>
+                    <a:p>
+                      <a:pPr>
+                        <a:defRPr sz="1100">
+                          <a:solidFill>
+                            <a:srgbClr val="D1D5DB"/>
+                          </a:solidFill>
+                          <a:latin typeface="Calibri"/>
+                        </a:defRPr>
+                      </a:pPr>
+                      <a:r>
+                        <a:t>Everyone on platform</a:t>
+                      </a:r>
+                    </a:p>
+                  </a:txBody>
+                  <a:tcPr>
+                    <a:solidFill>
+                      <a:srgbClr val="121224"/>
+                    </a:solidFill>
+                  </a:tcPr>
+                </a:tc>
+              </a:tr>
+            </a:tbl>
+          </a:graphicData>
+        </a:graphic>
+      </p:graphicFrame>
+      <p:pic>
+        <p:nvPicPr>
+          <p:cNvPr id="7" name="Picture 6" descr="06-sidebar-signin.png"/>
+          <p:cNvPicPr>
+            <a:picLocks noChangeAspect="1"/>
+          </p:cNvPicPr>
+          <p:nvPr/>
+        </p:nvPicPr>
+        <p:blipFill>
+          <a:blip r:embed="rId2"/>
+          <a:stretch>
+            <a:fillRect/>
+          </a:stretch>
+        </p:blipFill>
         <p:spPr>
           <a:xfrm>
-            <a:off x="731520" y="3566160"/>
-            <a:ext cx="5029200" cy="457200"/>
+            <a:off x="6400800" y="1188720"/>
+            <a:ext cx="2194560" cy="7596554"/>
           </a:xfrm>
           <a:prstGeom prst="rect">
             <a:avLst/>
           </a:prstGeom>
-          <a:noFill/>
         </p:spPr>
-        <p:txBody>
-          <a:bodyPr wrap="square">
-            <a:spAutoFit/>
-          </a:bodyPr>
-          <a:lstStyle/>
-          <a:p>
-            <a:pPr algn="l">
-              <a:defRPr sz="1500" b="0">
-                <a:solidFill>
-                  <a:srgbClr val="FFFFFF"/>
-                </a:solidFill>
-                <a:latin typeface="Calibri"/>
-              </a:defRPr>
-            </a:pPr>
-            <a:r>
-              <a:t>Kore, Leda, Puck, Charon, Fenrir, Aoede, Enceladus</a:t>
-            </a:r>
-          </a:p>
-        </p:txBody>
-      </p:sp>
-      <p:sp>
-        <p:nvSpPr>
-          <p:cNvPr id="7" name="TextBox 6"/>
-          <p:cNvSpPr txBox="1"/>
-          <p:nvPr/>
-        </p:nvSpPr>
-        <p:spPr>
-          <a:xfrm>
-            <a:off x="731520" y="4114800"/>
-            <a:ext cx="5029200" cy="457200"/>
-          </a:xfrm>
-          <a:prstGeom prst="rect">
-            <a:avLst/>
-          </a:prstGeom>
-          <a:noFill/>
-        </p:spPr>
-        <p:txBody>
-          <a:bodyPr wrap="square">
-            <a:spAutoFit/>
-          </a:bodyPr>
-          <a:lstStyle/>
-          <a:p>
-            <a:pPr algn="l">
-              <a:defRPr sz="2200" b="1">
-                <a:solidFill>
-                  <a:srgbClr val="4ADE80"/>
-                </a:solidFill>
-                <a:latin typeface="Calibri"/>
-              </a:defRPr>
-            </a:pPr>
-            <a:r>
-              <a:t>System Instructions</a:t>
-            </a:r>
-          </a:p>
-        </p:txBody>
-      </p:sp>
-      <p:sp>
-        <p:nvSpPr>
-          <p:cNvPr id="8" name="TextBox 7"/>
-          <p:cNvSpPr txBox="1"/>
-          <p:nvPr/>
-        </p:nvSpPr>
-        <p:spPr>
-          <a:xfrm>
-            <a:off x="731520" y="4663440"/>
-            <a:ext cx="5029200" cy="1828800"/>
-          </a:xfrm>
-          <a:prstGeom prst="rect">
-            <a:avLst/>
-          </a:prstGeom>
-          <a:noFill/>
-        </p:spPr>
-        <p:txBody>
-          <a:bodyPr wrap="square">
-            <a:spAutoFit/>
-          </a:bodyPr>
-          <a:lstStyle/>
-          <a:p>
-            <a:pPr>
-              <a:spcAft>
-                <a:spcPts val="800"/>
-              </a:spcAft>
-              <a:defRPr sz="1400">
-                <a:solidFill>
-                  <a:srgbClr val="9CA3AF"/>
-                </a:solidFill>
-                <a:latin typeface="Calibri"/>
-              </a:defRPr>
-            </a:pPr>
-            <a:r>
-              <a:t>"Speak cheerfully and with enthusiasm"</a:t>
-            </a:r>
-          </a:p>
-          <a:p>
-            <a:pPr>
-              <a:spcAft>
-                <a:spcPts val="800"/>
-              </a:spcAft>
-              <a:defRPr sz="1400">
-                <a:solidFill>
-                  <a:srgbClr val="9CA3AF"/>
-                </a:solidFill>
-                <a:latin typeface="Calibri"/>
-              </a:defRPr>
-            </a:pPr>
-            <a:r>
-              <a:t>"Use a calm, professional news anchor tone"</a:t>
-            </a:r>
-          </a:p>
-          <a:p>
-            <a:pPr>
-              <a:spcAft>
-                <a:spcPts val="800"/>
-              </a:spcAft>
-              <a:defRPr sz="1400">
-                <a:solidFill>
-                  <a:srgbClr val="9CA3AF"/>
-                </a:solidFill>
-                <a:latin typeface="Calibri"/>
-              </a:defRPr>
-            </a:pPr>
-            <a:r>
-              <a:t>"Whisper softly as if telling a secret"</a:t>
-            </a:r>
-          </a:p>
-        </p:txBody>
-      </p:sp>
+      </p:pic>
     </p:spTree>
   </p:cSld>
   <p:clrMapOvr>
@@ -3624,487 +3817,371 @@
               </a:defRPr>
             </a:pPr>
             <a:r>
-              <a:t>Security</a:t>
-            </a:r>
-          </a:p>
-        </p:txBody>
-      </p:sp>
-      <p:graphicFrame>
-        <p:nvGraphicFramePr>
-          <p:cNvPr id="3" name="Table 2"/>
-          <p:cNvGraphicFramePr>
-            <a:graphicFrameLocks noGrp="1"/>
-          </p:cNvGraphicFramePr>
+              <a:t>Architecture</a:t>
+            </a:r>
+          </a:p>
+        </p:txBody>
+      </p:sp>
+      <p:sp>
+        <p:nvSpPr>
+          <p:cNvPr id="3" name="TextBox 2"/>
+          <p:cNvSpPr txBox="1"/>
           <p:nvPr/>
-        </p:nvGraphicFramePr>
-        <p:xfrm>
-          <a:off x="731520" y="1188720"/>
-          <a:ext cx="10515600" cy="3703320"/>
-        </p:xfrm>
-        <a:graphic>
-          <a:graphicData uri="http://schemas.openxmlformats.org/drawingml/2006/table">
-            <a:tbl>
-              <a:tblPr firstRow="1" bandRow="1">
-                <a:tableStyleId>{5C22544A-7EE6-4342-B048-85BDC9FD1C3A}</a:tableStyleId>
-              </a:tblPr>
-              <a:tblGrid>
-                <a:gridCol w="5257800"/>
-                <a:gridCol w="5257800"/>
-              </a:tblGrid>
-              <a:tr h="411480">
-                <a:tc>
-                  <a:txBody>
-                    <a:bodyPr/>
-                    <a:lstStyle/>
-                    <a:p>
-                      <a:pPr>
-                        <a:defRPr sz="1200" b="1">
-                          <a:solidFill>
-                            <a:srgbClr val="FFFFFF"/>
-                          </a:solidFill>
-                          <a:latin typeface="Calibri"/>
-                        </a:defRPr>
-                      </a:pPr>
-                      <a:r>
-                        <a:t>Feature</a:t>
-                      </a:r>
-                    </a:p>
-                  </a:txBody>
-                  <a:tcPr>
-                    <a:solidFill>
-                      <a:srgbClr val="1F1F3A"/>
-                    </a:solidFill>
-                  </a:tcPr>
-                </a:tc>
-                <a:tc>
-                  <a:txBody>
-                    <a:bodyPr/>
-                    <a:lstStyle/>
-                    <a:p>
-                      <a:pPr>
-                        <a:defRPr sz="1200" b="1">
-                          <a:solidFill>
-                            <a:srgbClr val="FFFFFF"/>
-                          </a:solidFill>
-                          <a:latin typeface="Calibri"/>
-                        </a:defRPr>
-                      </a:pPr>
-                      <a:r>
-                        <a:t>Implementation</a:t>
-                      </a:r>
-                    </a:p>
-                  </a:txBody>
-                  <a:tcPr>
-                    <a:solidFill>
-                      <a:srgbClr val="1F1F3A"/>
-                    </a:solidFill>
-                  </a:tcPr>
-                </a:tc>
-              </a:tr>
-              <a:tr h="411480">
-                <a:tc>
-                  <a:txBody>
-                    <a:bodyPr/>
-                    <a:lstStyle/>
-                    <a:p>
-                      <a:pPr>
-                        <a:defRPr sz="1200">
-                          <a:solidFill>
-                            <a:srgbClr val="D1D5DB"/>
-                          </a:solidFill>
-                          <a:latin typeface="Calibri"/>
-                        </a:defRPr>
-                      </a:pPr>
-                      <a:r>
-                        <a:t>Authentication</a:t>
-                      </a:r>
-                    </a:p>
-                  </a:txBody>
-                  <a:tcPr>
-                    <a:solidFill>
-                      <a:srgbClr val="121224"/>
-                    </a:solidFill>
-                  </a:tcPr>
-                </a:tc>
-                <a:tc>
-                  <a:txBody>
-                    <a:bodyPr/>
-                    <a:lstStyle/>
-                    <a:p>
-                      <a:pPr>
-                        <a:defRPr sz="1200">
-                          <a:solidFill>
-                            <a:srgbClr val="D1D5DB"/>
-                          </a:solidFill>
-                          <a:latin typeface="Calibri"/>
-                        </a:defRPr>
-                      </a:pPr>
-                      <a:r>
-                        <a:t>Firebase Google Sign-In with JWT tokens</a:t>
-                      </a:r>
-                    </a:p>
-                  </a:txBody>
-                  <a:tcPr>
-                    <a:solidFill>
-                      <a:srgbClr val="121224"/>
-                    </a:solidFill>
-                  </a:tcPr>
-                </a:tc>
-              </a:tr>
-              <a:tr h="411480">
-                <a:tc>
-                  <a:txBody>
-                    <a:bodyPr/>
-                    <a:lstStyle/>
-                    <a:p>
-                      <a:pPr>
-                        <a:defRPr sz="1200">
-                          <a:solidFill>
-                            <a:srgbClr val="D1D5DB"/>
-                          </a:solidFill>
-                          <a:latin typeface="Calibri"/>
-                        </a:defRPr>
-                      </a:pPr>
-                      <a:r>
-                        <a:t>Authorization</a:t>
-                      </a:r>
-                    </a:p>
-                  </a:txBody>
-                  <a:tcPr>
-                    <a:solidFill>
-                      <a:srgbClr val="121224"/>
-                    </a:solidFill>
-                  </a:tcPr>
-                </a:tc>
-                <a:tc>
-                  <a:txBody>
-                    <a:bodyPr/>
-                    <a:lstStyle/>
-                    <a:p>
-                      <a:pPr>
-                        <a:defRPr sz="1200">
-                          <a:solidFill>
-                            <a:srgbClr val="D1D5DB"/>
-                          </a:solidFill>
-                          <a:latin typeface="Calibri"/>
-                        </a:defRPr>
-                      </a:pPr>
-                      <a:r>
-                        <a:t>Per-route auth deps, team-based access control</a:t>
-                      </a:r>
-                    </a:p>
-                  </a:txBody>
-                  <a:tcPr>
-                    <a:solidFill>
-                      <a:srgbClr val="121224"/>
-                    </a:solidFill>
-                  </a:tcPr>
-                </a:tc>
-              </a:tr>
-              <a:tr h="411480">
-                <a:tc>
-                  <a:txBody>
-                    <a:bodyPr/>
-                    <a:lstStyle/>
-                    <a:p>
-                      <a:pPr>
-                        <a:defRPr sz="1200">
-                          <a:solidFill>
-                            <a:srgbClr val="D1D5DB"/>
-                          </a:solidFill>
-                          <a:latin typeface="Calibri"/>
-                        </a:defRPr>
-                      </a:pPr>
-                      <a:r>
-                        <a:t>Path Traversal</a:t>
-                      </a:r>
-                    </a:p>
-                  </a:txBody>
-                  <a:tcPr>
-                    <a:solidFill>
-                      <a:srgbClr val="121224"/>
-                    </a:solidFill>
-                  </a:tcPr>
-                </a:tc>
-                <a:tc>
-                  <a:txBody>
-                    <a:bodyPr/>
-                    <a:lstStyle/>
-                    <a:p>
-                      <a:pPr>
-                        <a:defRPr sz="1200">
-                          <a:solidFill>
-                            <a:srgbClr val="D1D5DB"/>
-                          </a:solidFill>
-                          <a:latin typeface="Calibri"/>
-                        </a:defRPr>
-                      </a:pPr>
-                      <a:r>
-                        <a:t>realpath validation on all file-serving endpoints</a:t>
-                      </a:r>
-                    </a:p>
-                  </a:txBody>
-                  <a:tcPr>
-                    <a:solidFill>
-                      <a:srgbClr val="121224"/>
-                    </a:solidFill>
-                  </a:tcPr>
-                </a:tc>
-              </a:tr>
-              <a:tr h="411480">
-                <a:tc>
-                  <a:txBody>
-                    <a:bodyPr/>
-                    <a:lstStyle/>
-                    <a:p>
-                      <a:pPr>
-                        <a:defRPr sz="1200">
-                          <a:solidFill>
-                            <a:srgbClr val="D1D5DB"/>
-                          </a:solidFill>
-                          <a:latin typeface="Calibri"/>
-                        </a:defRPr>
-                      </a:pPr>
-                      <a:r>
-                        <a:t>XSS Prevention</a:t>
-                      </a:r>
-                    </a:p>
-                  </a:txBody>
-                  <a:tcPr>
-                    <a:solidFill>
-                      <a:srgbClr val="121224"/>
-                    </a:solidFill>
-                  </a:tcPr>
-                </a:tc>
-                <a:tc>
-                  <a:txBody>
-                    <a:bodyPr/>
-                    <a:lstStyle/>
-                    <a:p>
-                      <a:pPr>
-                        <a:defRPr sz="1200">
-                          <a:solidFill>
-                            <a:srgbClr val="D1D5DB"/>
-                          </a:solidFill>
-                          <a:latin typeface="Calibri"/>
-                        </a:defRPr>
-                      </a:pPr>
-                      <a:r>
-                        <a:t>React state rendering (no innerHTML)</a:t>
-                      </a:r>
-                    </a:p>
-                  </a:txBody>
-                  <a:tcPr>
-                    <a:solidFill>
-                      <a:srgbClr val="121224"/>
-                    </a:solidFill>
-                  </a:tcPr>
-                </a:tc>
-              </a:tr>
-              <a:tr h="411480">
-                <a:tc>
-                  <a:txBody>
-                    <a:bodyPr/>
-                    <a:lstStyle/>
-                    <a:p>
-                      <a:pPr>
-                        <a:defRPr sz="1200">
-                          <a:solidFill>
-                            <a:srgbClr val="D1D5DB"/>
-                          </a:solidFill>
-                          <a:latin typeface="Calibri"/>
-                        </a:defRPr>
-                      </a:pPr>
-                      <a:r>
-                        <a:t>CORS</a:t>
-                      </a:r>
-                    </a:p>
-                  </a:txBody>
-                  <a:tcPr>
-                    <a:solidFill>
-                      <a:srgbClr val="121224"/>
-                    </a:solidFill>
-                  </a:tcPr>
-                </a:tc>
-                <a:tc>
-                  <a:txBody>
-                    <a:bodyPr/>
-                    <a:lstStyle/>
-                    <a:p>
-                      <a:pPr>
-                        <a:defRPr sz="1200">
-                          <a:solidFill>
-                            <a:srgbClr val="D1D5DB"/>
-                          </a:solidFill>
-                          <a:latin typeface="Calibri"/>
-                        </a:defRPr>
-                      </a:pPr>
-                      <a:r>
-                        <a:t>Configurable origins, no wildcard with credentials</a:t>
-                      </a:r>
-                    </a:p>
-                  </a:txBody>
-                  <a:tcPr>
-                    <a:solidFill>
-                      <a:srgbClr val="121224"/>
-                    </a:solidFill>
-                  </a:tcPr>
-                </a:tc>
-              </a:tr>
-              <a:tr h="411480">
-                <a:tc>
-                  <a:txBody>
-                    <a:bodyPr/>
-                    <a:lstStyle/>
-                    <a:p>
-                      <a:pPr>
-                        <a:defRPr sz="1200">
-                          <a:solidFill>
-                            <a:srgbClr val="D1D5DB"/>
-                          </a:solidFill>
-                          <a:latin typeface="Calibri"/>
-                        </a:defRPr>
-                      </a:pPr>
-                      <a:r>
-                        <a:t>Media Serving</a:t>
-                      </a:r>
-                    </a:p>
-                  </a:txBody>
-                  <a:tcPr>
-                    <a:solidFill>
-                      <a:srgbClr val="121224"/>
-                    </a:solidFill>
-                  </a:tcPr>
-                </a:tc>
-                <a:tc>
-                  <a:txBody>
-                    <a:bodyPr/>
-                    <a:lstStyle/>
-                    <a:p>
-                      <a:pPr>
-                        <a:defRPr sz="1200">
-                          <a:solidFill>
-                            <a:srgbClr val="D1D5DB"/>
-                          </a:solidFill>
-                          <a:latin typeface="Calibri"/>
-                        </a:defRPr>
-                      </a:pPr>
-                      <a:r>
-                        <a:t>Dedicated /api/media endpoint with sanitized paths</a:t>
-                      </a:r>
-                    </a:p>
-                  </a:txBody>
-                  <a:tcPr>
-                    <a:solidFill>
-                      <a:srgbClr val="121224"/>
-                    </a:solidFill>
-                  </a:tcPr>
-                </a:tc>
-              </a:tr>
-              <a:tr h="411480">
-                <a:tc>
-                  <a:txBody>
-                    <a:bodyPr/>
-                    <a:lstStyle/>
-                    <a:p>
-                      <a:pPr>
-                        <a:defRPr sz="1200">
-                          <a:solidFill>
-                            <a:srgbClr val="D1D5DB"/>
-                          </a:solidFill>
-                          <a:latin typeface="Calibri"/>
-                        </a:defRPr>
-                      </a:pPr>
-                      <a:r>
-                        <a:t>Cache</a:t>
-                      </a:r>
-                    </a:p>
-                  </a:txBody>
-                  <a:tcPr>
-                    <a:solidFill>
-                      <a:srgbClr val="121224"/>
-                    </a:solidFill>
-                  </a:tcPr>
-                </a:tc>
-                <a:tc>
-                  <a:txBody>
-                    <a:bodyPr/>
-                    <a:lstStyle/>
-                    <a:p>
-                      <a:pPr>
-                        <a:defRPr sz="1200">
-                          <a:solidFill>
-                            <a:srgbClr val="D1D5DB"/>
-                          </a:solidFill>
-                          <a:latin typeface="Calibri"/>
-                        </a:defRPr>
-                      </a:pPr>
-                      <a:r>
-                        <a:t>LRU with 100-entry limit and 30-minute TTL</a:t>
-                      </a:r>
-                    </a:p>
-                  </a:txBody>
-                  <a:tcPr>
-                    <a:solidFill>
-                      <a:srgbClr val="121224"/>
-                    </a:solidFill>
-                  </a:tcPr>
-                </a:tc>
-              </a:tr>
-              <a:tr h="411480">
-                <a:tc>
-                  <a:txBody>
-                    <a:bodyPr/>
-                    <a:lstStyle/>
-                    <a:p>
-                      <a:pPr>
-                        <a:defRPr sz="1200">
-                          <a:solidFill>
-                            <a:srgbClr val="D1D5DB"/>
-                          </a:solidFill>
-                          <a:latin typeface="Calibri"/>
-                        </a:defRPr>
-                      </a:pPr>
-                      <a:r>
-                        <a:t>Error Propagation</a:t>
-                      </a:r>
-                    </a:p>
-                  </a:txBody>
-                  <a:tcPr>
-                    <a:solidFill>
-                      <a:srgbClr val="121224"/>
-                    </a:solidFill>
-                  </a:tcPr>
-                </a:tc>
-                <a:tc>
-                  <a:txBody>
-                    <a:bodyPr/>
-                    <a:lstStyle/>
-                    <a:p>
-                      <a:pPr>
-                        <a:defRPr sz="1200">
-                          <a:solidFill>
-                            <a:srgbClr val="D1D5DB"/>
-                          </a:solidFill>
-                          <a:latin typeface="Calibri"/>
-                        </a:defRPr>
-                      </a:pPr>
-                      <a:r>
-                        <a:t>Failed nodes skip downstream automatically</a:t>
-                      </a:r>
-                    </a:p>
-                  </a:txBody>
-                  <a:tcPr>
-                    <a:solidFill>
-                      <a:srgbClr val="121224"/>
-                    </a:solidFill>
-                  </a:tcPr>
-                </a:tc>
-              </a:tr>
-            </a:tbl>
-          </a:graphicData>
-        </a:graphic>
-      </p:graphicFrame>
+        </p:nvSpPr>
+        <p:spPr>
+          <a:xfrm>
+            <a:off x="731520" y="1188720"/>
+            <a:ext cx="5029200" cy="457200"/>
+          </a:xfrm>
+          <a:prstGeom prst="rect">
+            <a:avLst/>
+          </a:prstGeom>
+          <a:noFill/>
+        </p:spPr>
+        <p:txBody>
+          <a:bodyPr wrap="square">
+            <a:spAutoFit/>
+          </a:bodyPr>
+          <a:lstStyle/>
+          <a:p>
+            <a:pPr algn="l">
+              <a:defRPr sz="2000" b="1">
+                <a:solidFill>
+                  <a:srgbClr val="4ADE80"/>
+                </a:solidFill>
+                <a:latin typeface="Calibri"/>
+              </a:defRPr>
+            </a:pPr>
+            <a:r>
+              <a:t>Frontend</a:t>
+            </a:r>
+          </a:p>
+        </p:txBody>
+      </p:sp>
+      <p:sp>
+        <p:nvSpPr>
+          <p:cNvPr id="4" name="TextBox 3"/>
+          <p:cNvSpPr txBox="1"/>
+          <p:nvPr/>
+        </p:nvSpPr>
+        <p:spPr>
+          <a:xfrm>
+            <a:off x="731520" y="1645920"/>
+            <a:ext cx="5029200" cy="457200"/>
+          </a:xfrm>
+          <a:prstGeom prst="rect">
+            <a:avLst/>
+          </a:prstGeom>
+          <a:noFill/>
+        </p:spPr>
+        <p:txBody>
+          <a:bodyPr wrap="square">
+            <a:spAutoFit/>
+          </a:bodyPr>
+          <a:lstStyle/>
+          <a:p>
+            <a:pPr algn="l">
+              <a:defRPr sz="1400" b="0">
+                <a:solidFill>
+                  <a:srgbClr val="FFFFFF"/>
+                </a:solidFill>
+                <a:latin typeface="Calibri"/>
+              </a:defRPr>
+            </a:pPr>
+            <a:r>
+              <a:t>React 18 + Vite + ReactFlow + Firebase Auth</a:t>
+            </a:r>
+          </a:p>
+        </p:txBody>
+      </p:sp>
+      <p:sp>
+        <p:nvSpPr>
+          <p:cNvPr id="5" name="TextBox 4"/>
+          <p:cNvSpPr txBox="1"/>
+          <p:nvPr/>
+        </p:nvSpPr>
+        <p:spPr>
+          <a:xfrm>
+            <a:off x="731520" y="2286000"/>
+            <a:ext cx="5029200" cy="457200"/>
+          </a:xfrm>
+          <a:prstGeom prst="rect">
+            <a:avLst/>
+          </a:prstGeom>
+          <a:noFill/>
+        </p:spPr>
+        <p:txBody>
+          <a:bodyPr wrap="square">
+            <a:spAutoFit/>
+          </a:bodyPr>
+          <a:lstStyle/>
+          <a:p>
+            <a:pPr algn="l">
+              <a:defRPr sz="2000" b="1">
+                <a:solidFill>
+                  <a:srgbClr val="4ADE80"/>
+                </a:solidFill>
+                <a:latin typeface="Calibri"/>
+              </a:defRPr>
+            </a:pPr>
+            <a:r>
+              <a:t>Backend</a:t>
+            </a:r>
+          </a:p>
+        </p:txBody>
+      </p:sp>
+      <p:sp>
+        <p:nvSpPr>
+          <p:cNvPr id="6" name="TextBox 5"/>
+          <p:cNvSpPr txBox="1"/>
+          <p:nvPr/>
+        </p:nvSpPr>
+        <p:spPr>
+          <a:xfrm>
+            <a:off x="731520" y="2743200"/>
+            <a:ext cx="5029200" cy="457200"/>
+          </a:xfrm>
+          <a:prstGeom prst="rect">
+            <a:avLst/>
+          </a:prstGeom>
+          <a:noFill/>
+        </p:spPr>
+        <p:txBody>
+          <a:bodyPr wrap="square">
+            <a:spAutoFit/>
+          </a:bodyPr>
+          <a:lstStyle/>
+          <a:p>
+            <a:pPr algn="l">
+              <a:defRPr sz="1400" b="0">
+                <a:solidFill>
+                  <a:srgbClr val="FFFFFF"/>
+                </a:solidFill>
+                <a:latin typeface="Calibri"/>
+              </a:defRPr>
+            </a:pPr>
+            <a:r>
+              <a:t>FastAPI + SQLAlchemy + SSE Streaming</a:t>
+            </a:r>
+          </a:p>
+        </p:txBody>
+      </p:sp>
+      <p:sp>
+        <p:nvSpPr>
+          <p:cNvPr id="7" name="TextBox 6"/>
+          <p:cNvSpPr txBox="1"/>
+          <p:nvPr/>
+        </p:nvSpPr>
+        <p:spPr>
+          <a:xfrm>
+            <a:off x="731520" y="3383280"/>
+            <a:ext cx="5029200" cy="457200"/>
+          </a:xfrm>
+          <a:prstGeom prst="rect">
+            <a:avLst/>
+          </a:prstGeom>
+          <a:noFill/>
+        </p:spPr>
+        <p:txBody>
+          <a:bodyPr wrap="square">
+            <a:spAutoFit/>
+          </a:bodyPr>
+          <a:lstStyle/>
+          <a:p>
+            <a:pPr algn="l">
+              <a:defRPr sz="2000" b="1">
+                <a:solidFill>
+                  <a:srgbClr val="4ADE80"/>
+                </a:solidFill>
+                <a:latin typeface="Calibri"/>
+              </a:defRPr>
+            </a:pPr>
+            <a:r>
+              <a:t>AI Services</a:t>
+            </a:r>
+          </a:p>
+        </p:txBody>
+      </p:sp>
+      <p:sp>
+        <p:nvSpPr>
+          <p:cNvPr id="8" name="TextBox 7"/>
+          <p:cNvSpPr txBox="1"/>
+          <p:nvPr/>
+        </p:nvSpPr>
+        <p:spPr>
+          <a:xfrm>
+            <a:off x="731520" y="3840480"/>
+            <a:ext cx="5029200" cy="457200"/>
+          </a:xfrm>
+          <a:prstGeom prst="rect">
+            <a:avLst/>
+          </a:prstGeom>
+          <a:noFill/>
+        </p:spPr>
+        <p:txBody>
+          <a:bodyPr wrap="square">
+            <a:spAutoFit/>
+          </a:bodyPr>
+          <a:lstStyle/>
+          <a:p>
+            <a:pPr algn="l">
+              <a:defRPr sz="1400" b="0">
+                <a:solidFill>
+                  <a:srgbClr val="FFFFFF"/>
+                </a:solidFill>
+                <a:latin typeface="Calibri"/>
+              </a:defRPr>
+            </a:pPr>
+            <a:r>
+              <a:t>Vertex AI: Gemini, Veo, Lyria, Imagen, TTS</a:t>
+            </a:r>
+          </a:p>
+        </p:txBody>
+      </p:sp>
+      <p:sp>
+        <p:nvSpPr>
+          <p:cNvPr id="9" name="TextBox 8"/>
+          <p:cNvSpPr txBox="1"/>
+          <p:nvPr/>
+        </p:nvSpPr>
+        <p:spPr>
+          <a:xfrm>
+            <a:off x="731520" y="4480560"/>
+            <a:ext cx="5029200" cy="457200"/>
+          </a:xfrm>
+          <a:prstGeom prst="rect">
+            <a:avLst/>
+          </a:prstGeom>
+          <a:noFill/>
+        </p:spPr>
+        <p:txBody>
+          <a:bodyPr wrap="square">
+            <a:spAutoFit/>
+          </a:bodyPr>
+          <a:lstStyle/>
+          <a:p>
+            <a:pPr algn="l">
+              <a:defRPr sz="2000" b="1">
+                <a:solidFill>
+                  <a:srgbClr val="4ADE80"/>
+                </a:solidFill>
+                <a:latin typeface="Calibri"/>
+              </a:defRPr>
+            </a:pPr>
+            <a:r>
+              <a:t>Storage &amp; Auth</a:t>
+            </a:r>
+          </a:p>
+        </p:txBody>
+      </p:sp>
+      <p:sp>
+        <p:nvSpPr>
+          <p:cNvPr id="10" name="TextBox 9"/>
+          <p:cNvSpPr txBox="1"/>
+          <p:nvPr/>
+        </p:nvSpPr>
+        <p:spPr>
+          <a:xfrm>
+            <a:off x="731520" y="4937760"/>
+            <a:ext cx="5029200" cy="457200"/>
+          </a:xfrm>
+          <a:prstGeom prst="rect">
+            <a:avLst/>
+          </a:prstGeom>
+          <a:noFill/>
+        </p:spPr>
+        <p:txBody>
+          <a:bodyPr wrap="square">
+            <a:spAutoFit/>
+          </a:bodyPr>
+          <a:lstStyle/>
+          <a:p>
+            <a:pPr algn="l">
+              <a:defRPr sz="1400" b="0">
+                <a:solidFill>
+                  <a:srgbClr val="FFFFFF"/>
+                </a:solidFill>
+                <a:latin typeface="Calibri"/>
+              </a:defRPr>
+            </a:pPr>
+            <a:r>
+              <a:t>Cloud Run + GCS + Firebase Auth + SQLite</a:t>
+            </a:r>
+          </a:p>
+        </p:txBody>
+      </p:sp>
+      <p:sp>
+        <p:nvSpPr>
+          <p:cNvPr id="11" name="TextBox 10"/>
+          <p:cNvSpPr txBox="1"/>
+          <p:nvPr/>
+        </p:nvSpPr>
+        <p:spPr>
+          <a:xfrm>
+            <a:off x="6400800" y="1188720"/>
+            <a:ext cx="5029200" cy="4572000"/>
+          </a:xfrm>
+          <a:prstGeom prst="rect">
+            <a:avLst/>
+          </a:prstGeom>
+          <a:noFill/>
+        </p:spPr>
+        <p:txBody>
+          <a:bodyPr wrap="square">
+            <a:spAutoFit/>
+          </a:bodyPr>
+          <a:lstStyle/>
+          <a:p>
+            <a:pPr algn="l">
+              <a:defRPr sz="1300" b="0">
+                <a:solidFill>
+                  <a:srgbClr val="9CA3AF"/>
+                </a:solidFill>
+                <a:latin typeface="Calibri"/>
+              </a:defRPr>
+            </a:pPr>
+            <a:r>
+              <a:t>Frontend (React)</a:t>
+            </a:r>
+            <a:br/>
+            <a:r>
+              <a:t>    ↓ SSE / REST + Firebase JWT</a:t>
+            </a:r>
+            <a:br/>
+            <a:r>
+              <a:t>Backend (FastAPI)</a:t>
+            </a:r>
+            <a:br/>
+            <a:r>
+              <a:t>    ├── Auth (Firebase verify)</a:t>
+            </a:r>
+            <a:br/>
+            <a:r>
+              <a:t>    ├── Workflow Engine</a:t>
+            </a:r>
+            <a:br/>
+            <a:r>
+              <a:t>    ├── Team CRUD</a:t>
+            </a:r>
+            <a:br/>
+            <a:r>
+              <a:t>    ├── Asset Library</a:t>
+            </a:r>
+            <a:br/>
+            <a:r>
+              <a:t>    └── Media Serving</a:t>
+            </a:r>
+            <a:br/>
+            <a:r>
+              <a:t>         ↓</a:t>
+            </a:r>
+            <a:br/>
+            <a:r>
+              <a:t>Vertex AI + GCS Storage</a:t>
+            </a:r>
+          </a:p>
+        </p:txBody>
+      </p:sp>
     </p:spTree>
   </p:cSld>
   <p:clrMapOvr>
@@ -4162,375 +4239,487 @@
               </a:defRPr>
             </a:pPr>
             <a:r>
-              <a:t>Architecture</a:t>
-            </a:r>
-          </a:p>
-        </p:txBody>
-      </p:sp>
-      <p:sp>
-        <p:nvSpPr>
-          <p:cNvPr id="3" name="TextBox 2"/>
-          <p:cNvSpPr txBox="1"/>
+              <a:t>Security</a:t>
+            </a:r>
+          </a:p>
+        </p:txBody>
+      </p:sp>
+      <p:graphicFrame>
+        <p:nvGraphicFramePr>
+          <p:cNvPr id="3" name="Table 2"/>
+          <p:cNvGraphicFramePr>
+            <a:graphicFrameLocks noGrp="1"/>
+          </p:cNvGraphicFramePr>
           <p:nvPr/>
-        </p:nvSpPr>
-        <p:spPr>
-          <a:xfrm>
-            <a:off x="731520" y="1188720"/>
-            <a:ext cx="5029200" cy="457200"/>
-          </a:xfrm>
-          <a:prstGeom prst="rect">
-            <a:avLst/>
-          </a:prstGeom>
-          <a:noFill/>
-        </p:spPr>
-        <p:txBody>
-          <a:bodyPr wrap="square">
-            <a:spAutoFit/>
-          </a:bodyPr>
-          <a:lstStyle/>
-          <a:p>
-            <a:pPr algn="l">
-              <a:defRPr sz="2000" b="1">
-                <a:solidFill>
-                  <a:srgbClr val="4ADE80"/>
-                </a:solidFill>
-                <a:latin typeface="Calibri"/>
-              </a:defRPr>
-            </a:pPr>
-            <a:r>
-              <a:t>Frontend</a:t>
-            </a:r>
-          </a:p>
-        </p:txBody>
-      </p:sp>
-      <p:sp>
-        <p:nvSpPr>
-          <p:cNvPr id="4" name="TextBox 3"/>
-          <p:cNvSpPr txBox="1"/>
-          <p:nvPr/>
-        </p:nvSpPr>
-        <p:spPr>
-          <a:xfrm>
-            <a:off x="731520" y="1645920"/>
-            <a:ext cx="5029200" cy="457200"/>
-          </a:xfrm>
-          <a:prstGeom prst="rect">
-            <a:avLst/>
-          </a:prstGeom>
-          <a:noFill/>
-        </p:spPr>
-        <p:txBody>
-          <a:bodyPr wrap="square">
-            <a:spAutoFit/>
-          </a:bodyPr>
-          <a:lstStyle/>
-          <a:p>
-            <a:pPr algn="l">
-              <a:defRPr sz="1400" b="0">
-                <a:solidFill>
-                  <a:srgbClr val="FFFFFF"/>
-                </a:solidFill>
-                <a:latin typeface="Calibri"/>
-              </a:defRPr>
-            </a:pPr>
-            <a:r>
-              <a:t>React 18 + Vite + ReactFlow + Firebase Auth</a:t>
-            </a:r>
-          </a:p>
-        </p:txBody>
-      </p:sp>
-      <p:sp>
-        <p:nvSpPr>
-          <p:cNvPr id="5" name="TextBox 4"/>
-          <p:cNvSpPr txBox="1"/>
-          <p:nvPr/>
-        </p:nvSpPr>
-        <p:spPr>
-          <a:xfrm>
-            <a:off x="731520" y="2286000"/>
-            <a:ext cx="5029200" cy="457200"/>
-          </a:xfrm>
-          <a:prstGeom prst="rect">
-            <a:avLst/>
-          </a:prstGeom>
-          <a:noFill/>
-        </p:spPr>
-        <p:txBody>
-          <a:bodyPr wrap="square">
-            <a:spAutoFit/>
-          </a:bodyPr>
-          <a:lstStyle/>
-          <a:p>
-            <a:pPr algn="l">
-              <a:defRPr sz="2000" b="1">
-                <a:solidFill>
-                  <a:srgbClr val="4ADE80"/>
-                </a:solidFill>
-                <a:latin typeface="Calibri"/>
-              </a:defRPr>
-            </a:pPr>
-            <a:r>
-              <a:t>Backend</a:t>
-            </a:r>
-          </a:p>
-        </p:txBody>
-      </p:sp>
-      <p:sp>
-        <p:nvSpPr>
-          <p:cNvPr id="6" name="TextBox 5"/>
-          <p:cNvSpPr txBox="1"/>
-          <p:nvPr/>
-        </p:nvSpPr>
-        <p:spPr>
-          <a:xfrm>
-            <a:off x="731520" y="2743200"/>
-            <a:ext cx="5029200" cy="457200"/>
-          </a:xfrm>
-          <a:prstGeom prst="rect">
-            <a:avLst/>
-          </a:prstGeom>
-          <a:noFill/>
-        </p:spPr>
-        <p:txBody>
-          <a:bodyPr wrap="square">
-            <a:spAutoFit/>
-          </a:bodyPr>
-          <a:lstStyle/>
-          <a:p>
-            <a:pPr algn="l">
-              <a:defRPr sz="1400" b="0">
-                <a:solidFill>
-                  <a:srgbClr val="FFFFFF"/>
-                </a:solidFill>
-                <a:latin typeface="Calibri"/>
-              </a:defRPr>
-            </a:pPr>
-            <a:r>
-              <a:t>FastAPI + SQLAlchemy + SQLite + SSE Streaming</a:t>
-            </a:r>
-          </a:p>
-        </p:txBody>
-      </p:sp>
-      <p:sp>
-        <p:nvSpPr>
-          <p:cNvPr id="7" name="TextBox 6"/>
-          <p:cNvSpPr txBox="1"/>
-          <p:nvPr/>
-        </p:nvSpPr>
-        <p:spPr>
-          <a:xfrm>
-            <a:off x="731520" y="3383280"/>
-            <a:ext cx="5029200" cy="457200"/>
-          </a:xfrm>
-          <a:prstGeom prst="rect">
-            <a:avLst/>
-          </a:prstGeom>
-          <a:noFill/>
-        </p:spPr>
-        <p:txBody>
-          <a:bodyPr wrap="square">
-            <a:spAutoFit/>
-          </a:bodyPr>
-          <a:lstStyle/>
-          <a:p>
-            <a:pPr algn="l">
-              <a:defRPr sz="2000" b="1">
-                <a:solidFill>
-                  <a:srgbClr val="4ADE80"/>
-                </a:solidFill>
-                <a:latin typeface="Calibri"/>
-              </a:defRPr>
-            </a:pPr>
-            <a:r>
-              <a:t>AI Services</a:t>
-            </a:r>
-          </a:p>
-        </p:txBody>
-      </p:sp>
-      <p:sp>
-        <p:nvSpPr>
-          <p:cNvPr id="8" name="TextBox 7"/>
-          <p:cNvSpPr txBox="1"/>
-          <p:nvPr/>
-        </p:nvSpPr>
-        <p:spPr>
-          <a:xfrm>
-            <a:off x="731520" y="3840480"/>
-            <a:ext cx="5029200" cy="457200"/>
-          </a:xfrm>
-          <a:prstGeom prst="rect">
-            <a:avLst/>
-          </a:prstGeom>
-          <a:noFill/>
-        </p:spPr>
-        <p:txBody>
-          <a:bodyPr wrap="square">
-            <a:spAutoFit/>
-          </a:bodyPr>
-          <a:lstStyle/>
-          <a:p>
-            <a:pPr algn="l">
-              <a:defRPr sz="1400" b="0">
-                <a:solidFill>
-                  <a:srgbClr val="FFFFFF"/>
-                </a:solidFill>
-                <a:latin typeface="Calibri"/>
-              </a:defRPr>
-            </a:pPr>
-            <a:r>
-              <a:t>Vertex AI (Gemini, Veo, Lyria, Imagen, TTS)</a:t>
-            </a:r>
-          </a:p>
-        </p:txBody>
-      </p:sp>
-      <p:sp>
-        <p:nvSpPr>
-          <p:cNvPr id="9" name="TextBox 8"/>
-          <p:cNvSpPr txBox="1"/>
-          <p:nvPr/>
-        </p:nvSpPr>
-        <p:spPr>
-          <a:xfrm>
-            <a:off x="731520" y="4480560"/>
-            <a:ext cx="5029200" cy="457200"/>
-          </a:xfrm>
-          <a:prstGeom prst="rect">
-            <a:avLst/>
-          </a:prstGeom>
-          <a:noFill/>
-        </p:spPr>
-        <p:txBody>
-          <a:bodyPr wrap="square">
-            <a:spAutoFit/>
-          </a:bodyPr>
-          <a:lstStyle/>
-          <a:p>
-            <a:pPr algn="l">
-              <a:defRPr sz="2000" b="1">
-                <a:solidFill>
-                  <a:srgbClr val="4ADE80"/>
-                </a:solidFill>
-                <a:latin typeface="Calibri"/>
-              </a:defRPr>
-            </a:pPr>
-            <a:r>
-              <a:t>Infrastructure</a:t>
-            </a:r>
-          </a:p>
-        </p:txBody>
-      </p:sp>
-      <p:sp>
-        <p:nvSpPr>
-          <p:cNvPr id="10" name="TextBox 9"/>
-          <p:cNvSpPr txBox="1"/>
-          <p:nvPr/>
-        </p:nvSpPr>
-        <p:spPr>
-          <a:xfrm>
-            <a:off x="731520" y="4937760"/>
-            <a:ext cx="5029200" cy="457200"/>
-          </a:xfrm>
-          <a:prstGeom prst="rect">
-            <a:avLst/>
-          </a:prstGeom>
-          <a:noFill/>
-        </p:spPr>
-        <p:txBody>
-          <a:bodyPr wrap="square">
-            <a:spAutoFit/>
-          </a:bodyPr>
-          <a:lstStyle/>
-          <a:p>
-            <a:pPr algn="l">
-              <a:defRPr sz="1400" b="0">
-                <a:solidFill>
-                  <a:srgbClr val="FFFFFF"/>
-                </a:solidFill>
-                <a:latin typeface="Calibri"/>
-              </a:defRPr>
-            </a:pPr>
-            <a:r>
-              <a:t>Google Cloud Run + GCS + Firebase</a:t>
-            </a:r>
-          </a:p>
-        </p:txBody>
-      </p:sp>
-      <p:sp>
-        <p:nvSpPr>
-          <p:cNvPr id="11" name="TextBox 10"/>
-          <p:cNvSpPr txBox="1"/>
-          <p:nvPr/>
-        </p:nvSpPr>
-        <p:spPr>
-          <a:xfrm>
-            <a:off x="6400800" y="1188720"/>
-            <a:ext cx="5029200" cy="4572000"/>
-          </a:xfrm>
-          <a:prstGeom prst="rect">
-            <a:avLst/>
-          </a:prstGeom>
-          <a:noFill/>
-        </p:spPr>
-        <p:txBody>
-          <a:bodyPr wrap="square">
-            <a:spAutoFit/>
-          </a:bodyPr>
-          <a:lstStyle/>
-          <a:p>
-            <a:pPr algn="l">
-              <a:defRPr sz="1400" b="0">
-                <a:solidFill>
-                  <a:srgbClr val="9CA3AF"/>
-                </a:solidFill>
-                <a:latin typeface="Calibri"/>
-              </a:defRPr>
-            </a:pPr>
-            <a:r>
-              <a:t>Frontend (React/Vite)</a:t>
-            </a:r>
-            <a:br/>
-            <a:r>
-              <a:t>    ↓ SSE / REST</a:t>
-            </a:r>
-            <a:br/>
-            <a:r>
-              <a:t>Backend (FastAPI)</a:t>
-            </a:r>
-            <a:br/>
-            <a:r>
-              <a:t>    ↓ Workflow Engine</a:t>
-            </a:r>
-            <a:br/>
-            <a:r>
-              <a:t>    ├── Gemini 3.1 (Text/Image)</a:t>
-            </a:r>
-            <a:br/>
-            <a:r>
-              <a:t>    ├── Veo 3.1 (Video)</a:t>
-            </a:r>
-            <a:br/>
-            <a:r>
-              <a:t>    ├── Lyria 3 (Music)</a:t>
-            </a:r>
-            <a:br/>
-            <a:r>
-              <a:t>    ├── TTS 3.1 (Speech)</a:t>
-            </a:r>
-            <a:br/>
-            <a:r>
-              <a:t>    └── Imagen 4.0 (Upscale)</a:t>
-            </a:r>
-            <a:br/>
-            <a:r>
-              <a:t>    ↓</a:t>
-            </a:r>
-            <a:br/>
-            <a:r>
-              <a:t>GCS Storage → Asset Library</a:t>
-            </a:r>
-          </a:p>
-        </p:txBody>
-      </p:sp>
+        </p:nvGraphicFramePr>
+        <p:xfrm>
+          <a:off x="731520" y="1188720"/>
+          <a:ext cx="10515600" cy="3456432"/>
+        </p:xfrm>
+        <a:graphic>
+          <a:graphicData uri="http://schemas.openxmlformats.org/drawingml/2006/table">
+            <a:tbl>
+              <a:tblPr firstRow="1" bandRow="1">
+                <a:tableStyleId>{5C22544A-7EE6-4342-B048-85BDC9FD1C3A}</a:tableStyleId>
+              </a:tblPr>
+              <a:tblGrid>
+                <a:gridCol w="5257800"/>
+                <a:gridCol w="5257800"/>
+              </a:tblGrid>
+              <a:tr h="384048">
+                <a:tc>
+                  <a:txBody>
+                    <a:bodyPr/>
+                    <a:lstStyle/>
+                    <a:p>
+                      <a:pPr>
+                        <a:defRPr sz="1100" b="1">
+                          <a:solidFill>
+                            <a:srgbClr val="FFFFFF"/>
+                          </a:solidFill>
+                          <a:latin typeface="Calibri"/>
+                        </a:defRPr>
+                      </a:pPr>
+                      <a:r>
+                        <a:t>Feature</a:t>
+                      </a:r>
+                    </a:p>
+                  </a:txBody>
+                  <a:tcPr>
+                    <a:solidFill>
+                      <a:srgbClr val="1F1F3A"/>
+                    </a:solidFill>
+                  </a:tcPr>
+                </a:tc>
+                <a:tc>
+                  <a:txBody>
+                    <a:bodyPr/>
+                    <a:lstStyle/>
+                    <a:p>
+                      <a:pPr>
+                        <a:defRPr sz="1100" b="1">
+                          <a:solidFill>
+                            <a:srgbClr val="FFFFFF"/>
+                          </a:solidFill>
+                          <a:latin typeface="Calibri"/>
+                        </a:defRPr>
+                      </a:pPr>
+                      <a:r>
+                        <a:t>Implementation</a:t>
+                      </a:r>
+                    </a:p>
+                  </a:txBody>
+                  <a:tcPr>
+                    <a:solidFill>
+                      <a:srgbClr val="1F1F3A"/>
+                    </a:solidFill>
+                  </a:tcPr>
+                </a:tc>
+              </a:tr>
+              <a:tr h="384048">
+                <a:tc>
+                  <a:txBody>
+                    <a:bodyPr/>
+                    <a:lstStyle/>
+                    <a:p>
+                      <a:pPr>
+                        <a:defRPr sz="1100">
+                          <a:solidFill>
+                            <a:srgbClr val="D1D5DB"/>
+                          </a:solidFill>
+                          <a:latin typeface="Calibri"/>
+                        </a:defRPr>
+                      </a:pPr>
+                      <a:r>
+                        <a:t>Authentication</a:t>
+                      </a:r>
+                    </a:p>
+                  </a:txBody>
+                  <a:tcPr>
+                    <a:solidFill>
+                      <a:srgbClr val="121224"/>
+                    </a:solidFill>
+                  </a:tcPr>
+                </a:tc>
+                <a:tc>
+                  <a:txBody>
+                    <a:bodyPr/>
+                    <a:lstStyle/>
+                    <a:p>
+                      <a:pPr>
+                        <a:defRPr sz="1100">
+                          <a:solidFill>
+                            <a:srgbClr val="D1D5DB"/>
+                          </a:solidFill>
+                          <a:latin typeface="Calibri"/>
+                        </a:defRPr>
+                      </a:pPr>
+                      <a:r>
+                        <a:t>Firebase Google Sign-In with JWT verification</a:t>
+                      </a:r>
+                    </a:p>
+                  </a:txBody>
+                  <a:tcPr>
+                    <a:solidFill>
+                      <a:srgbClr val="121224"/>
+                    </a:solidFill>
+                  </a:tcPr>
+                </a:tc>
+              </a:tr>
+              <a:tr h="384048">
+                <a:tc>
+                  <a:txBody>
+                    <a:bodyPr/>
+                    <a:lstStyle/>
+                    <a:p>
+                      <a:pPr>
+                        <a:defRPr sz="1100">
+                          <a:solidFill>
+                            <a:srgbClr val="D1D5DB"/>
+                          </a:solidFill>
+                          <a:latin typeface="Calibri"/>
+                        </a:defRPr>
+                      </a:pPr>
+                      <a:r>
+                        <a:t>Authorization</a:t>
+                      </a:r>
+                    </a:p>
+                  </a:txBody>
+                  <a:tcPr>
+                    <a:solidFill>
+                      <a:srgbClr val="121224"/>
+                    </a:solidFill>
+                  </a:tcPr>
+                </a:tc>
+                <a:tc>
+                  <a:txBody>
+                    <a:bodyPr/>
+                    <a:lstStyle/>
+                    <a:p>
+                      <a:pPr>
+                        <a:defRPr sz="1100">
+                          <a:solidFill>
+                            <a:srgbClr val="D1D5DB"/>
+                          </a:solidFill>
+                          <a:latin typeface="Calibri"/>
+                        </a:defRPr>
+                      </a:pPr>
+                      <a:r>
+                        <a:t>Per-route auth deps, team-based access control</a:t>
+                      </a:r>
+                    </a:p>
+                  </a:txBody>
+                  <a:tcPr>
+                    <a:solidFill>
+                      <a:srgbClr val="121224"/>
+                    </a:solidFill>
+                  </a:tcPr>
+                </a:tc>
+              </a:tr>
+              <a:tr h="384048">
+                <a:tc>
+                  <a:txBody>
+                    <a:bodyPr/>
+                    <a:lstStyle/>
+                    <a:p>
+                      <a:pPr>
+                        <a:defRPr sz="1100">
+                          <a:solidFill>
+                            <a:srgbClr val="D1D5DB"/>
+                          </a:solidFill>
+                          <a:latin typeface="Calibri"/>
+                        </a:defRPr>
+                      </a:pPr>
+                      <a:r>
+                        <a:t>Path Traversal</a:t>
+                      </a:r>
+                    </a:p>
+                  </a:txBody>
+                  <a:tcPr>
+                    <a:solidFill>
+                      <a:srgbClr val="121224"/>
+                    </a:solidFill>
+                  </a:tcPr>
+                </a:tc>
+                <a:tc>
+                  <a:txBody>
+                    <a:bodyPr/>
+                    <a:lstStyle/>
+                    <a:p>
+                      <a:pPr>
+                        <a:defRPr sz="1100">
+                          <a:solidFill>
+                            <a:srgbClr val="D1D5DB"/>
+                          </a:solidFill>
+                          <a:latin typeface="Calibri"/>
+                        </a:defRPr>
+                      </a:pPr>
+                      <a:r>
+                        <a:t>realpath validation on all file-serving endpoints</a:t>
+                      </a:r>
+                    </a:p>
+                  </a:txBody>
+                  <a:tcPr>
+                    <a:solidFill>
+                      <a:srgbClr val="121224"/>
+                    </a:solidFill>
+                  </a:tcPr>
+                </a:tc>
+              </a:tr>
+              <a:tr h="384048">
+                <a:tc>
+                  <a:txBody>
+                    <a:bodyPr/>
+                    <a:lstStyle/>
+                    <a:p>
+                      <a:pPr>
+                        <a:defRPr sz="1100">
+                          <a:solidFill>
+                            <a:srgbClr val="D1D5DB"/>
+                          </a:solidFill>
+                          <a:latin typeface="Calibri"/>
+                        </a:defRPr>
+                      </a:pPr>
+                      <a:r>
+                        <a:t>XSS Prevention</a:t>
+                      </a:r>
+                    </a:p>
+                  </a:txBody>
+                  <a:tcPr>
+                    <a:solidFill>
+                      <a:srgbClr val="121224"/>
+                    </a:solidFill>
+                  </a:tcPr>
+                </a:tc>
+                <a:tc>
+                  <a:txBody>
+                    <a:bodyPr/>
+                    <a:lstStyle/>
+                    <a:p>
+                      <a:pPr>
+                        <a:defRPr sz="1100">
+                          <a:solidFill>
+                            <a:srgbClr val="D1D5DB"/>
+                          </a:solidFill>
+                          <a:latin typeface="Calibri"/>
+                        </a:defRPr>
+                      </a:pPr>
+                      <a:r>
+                        <a:t>React state rendering (no innerHTML)</a:t>
+                      </a:r>
+                    </a:p>
+                  </a:txBody>
+                  <a:tcPr>
+                    <a:solidFill>
+                      <a:srgbClr val="121224"/>
+                    </a:solidFill>
+                  </a:tcPr>
+                </a:tc>
+              </a:tr>
+              <a:tr h="384048">
+                <a:tc>
+                  <a:txBody>
+                    <a:bodyPr/>
+                    <a:lstStyle/>
+                    <a:p>
+                      <a:pPr>
+                        <a:defRPr sz="1100">
+                          <a:solidFill>
+                            <a:srgbClr val="D1D5DB"/>
+                          </a:solidFill>
+                          <a:latin typeface="Calibri"/>
+                        </a:defRPr>
+                      </a:pPr>
+                      <a:r>
+                        <a:t>CORS</a:t>
+                      </a:r>
+                    </a:p>
+                  </a:txBody>
+                  <a:tcPr>
+                    <a:solidFill>
+                      <a:srgbClr val="121224"/>
+                    </a:solidFill>
+                  </a:tcPr>
+                </a:tc>
+                <a:tc>
+                  <a:txBody>
+                    <a:bodyPr/>
+                    <a:lstStyle/>
+                    <a:p>
+                      <a:pPr>
+                        <a:defRPr sz="1100">
+                          <a:solidFill>
+                            <a:srgbClr val="D1D5DB"/>
+                          </a:solidFill>
+                          <a:latin typeface="Calibri"/>
+                        </a:defRPr>
+                      </a:pPr>
+                      <a:r>
+                        <a:t>Configurable origins, no wildcard with credentials</a:t>
+                      </a:r>
+                    </a:p>
+                  </a:txBody>
+                  <a:tcPr>
+                    <a:solidFill>
+                      <a:srgbClr val="121224"/>
+                    </a:solidFill>
+                  </a:tcPr>
+                </a:tc>
+              </a:tr>
+              <a:tr h="384048">
+                <a:tc>
+                  <a:txBody>
+                    <a:bodyPr/>
+                    <a:lstStyle/>
+                    <a:p>
+                      <a:pPr>
+                        <a:defRPr sz="1100">
+                          <a:solidFill>
+                            <a:srgbClr val="D1D5DB"/>
+                          </a:solidFill>
+                          <a:latin typeface="Calibri"/>
+                        </a:defRPr>
+                      </a:pPr>
+                      <a:r>
+                        <a:t>Media Serving</a:t>
+                      </a:r>
+                    </a:p>
+                  </a:txBody>
+                  <a:tcPr>
+                    <a:solidFill>
+                      <a:srgbClr val="121224"/>
+                    </a:solidFill>
+                  </a:tcPr>
+                </a:tc>
+                <a:tc>
+                  <a:txBody>
+                    <a:bodyPr/>
+                    <a:lstStyle/>
+                    <a:p>
+                      <a:pPr>
+                        <a:defRPr sz="1100">
+                          <a:solidFill>
+                            <a:srgbClr val="D1D5DB"/>
+                          </a:solidFill>
+                          <a:latin typeface="Calibri"/>
+                        </a:defRPr>
+                      </a:pPr>
+                      <a:r>
+                        <a:t>Dedicated /api/media endpoint with sanitized paths</a:t>
+                      </a:r>
+                    </a:p>
+                  </a:txBody>
+                  <a:tcPr>
+                    <a:solidFill>
+                      <a:srgbClr val="121224"/>
+                    </a:solidFill>
+                  </a:tcPr>
+                </a:tc>
+              </a:tr>
+              <a:tr h="384048">
+                <a:tc>
+                  <a:txBody>
+                    <a:bodyPr/>
+                    <a:lstStyle/>
+                    <a:p>
+                      <a:pPr>
+                        <a:defRPr sz="1100">
+                          <a:solidFill>
+                            <a:srgbClr val="D1D5DB"/>
+                          </a:solidFill>
+                          <a:latin typeface="Calibri"/>
+                        </a:defRPr>
+                      </a:pPr>
+                      <a:r>
+                        <a:t>Cache</a:t>
+                      </a:r>
+                    </a:p>
+                  </a:txBody>
+                  <a:tcPr>
+                    <a:solidFill>
+                      <a:srgbClr val="121224"/>
+                    </a:solidFill>
+                  </a:tcPr>
+                </a:tc>
+                <a:tc>
+                  <a:txBody>
+                    <a:bodyPr/>
+                    <a:lstStyle/>
+                    <a:p>
+                      <a:pPr>
+                        <a:defRPr sz="1100">
+                          <a:solidFill>
+                            <a:srgbClr val="D1D5DB"/>
+                          </a:solidFill>
+                          <a:latin typeface="Calibri"/>
+                        </a:defRPr>
+                      </a:pPr>
+                      <a:r>
+                        <a:t>LRU with 100-entry limit and 30-minute TTL</a:t>
+                      </a:r>
+                    </a:p>
+                  </a:txBody>
+                  <a:tcPr>
+                    <a:solidFill>
+                      <a:srgbClr val="121224"/>
+                    </a:solidFill>
+                  </a:tcPr>
+                </a:tc>
+              </a:tr>
+              <a:tr h="384048">
+                <a:tc>
+                  <a:txBody>
+                    <a:bodyPr/>
+                    <a:lstStyle/>
+                    <a:p>
+                      <a:pPr>
+                        <a:defRPr sz="1100">
+                          <a:solidFill>
+                            <a:srgbClr val="D1D5DB"/>
+                          </a:solidFill>
+                          <a:latin typeface="Calibri"/>
+                        </a:defRPr>
+                      </a:pPr>
+                      <a:r>
+                        <a:t>Error Propagation</a:t>
+                      </a:r>
+                    </a:p>
+                  </a:txBody>
+                  <a:tcPr>
+                    <a:solidFill>
+                      <a:srgbClr val="121224"/>
+                    </a:solidFill>
+                  </a:tcPr>
+                </a:tc>
+                <a:tc>
+                  <a:txBody>
+                    <a:bodyPr/>
+                    <a:lstStyle/>
+                    <a:p>
+                      <a:pPr>
+                        <a:defRPr sz="1100">
+                          <a:solidFill>
+                            <a:srgbClr val="D1D5DB"/>
+                          </a:solidFill>
+                          <a:latin typeface="Calibri"/>
+                        </a:defRPr>
+                      </a:pPr>
+                      <a:r>
+                        <a:t>Failed nodes auto-skip downstream</a:t>
+                      </a:r>
+                    </a:p>
+                  </a:txBody>
+                  <a:tcPr>
+                    <a:solidFill>
+                      <a:srgbClr val="121224"/>
+                    </a:solidFill>
+                  </a:tcPr>
+                </a:tc>
+              </a:tr>
+            </a:tbl>
+          </a:graphicData>
+        </a:graphic>
+      </p:graphicFrame>
     </p:spTree>
   </p:cSld>
   <p:clrMapOvr>
@@ -4588,7 +4777,7 @@
               </a:defRPr>
             </a:pPr>
             <a:r>
-              <a:t>Example: Product Ad Workflow</a:t>
+              <a:t>Deployment</a:t>
             </a:r>
           </a:p>
         </p:txBody>
@@ -4602,7 +4791,7 @@
         <p:spPr>
           <a:xfrm>
             <a:off x="731520" y="1188720"/>
-            <a:ext cx="10058400" cy="3657600"/>
+            <a:ext cx="5029200" cy="457200"/>
           </a:xfrm>
           <a:prstGeom prst="rect">
             <a:avLst/>
@@ -4616,7 +4805,7 @@
           <a:lstStyle/>
           <a:p>
             <a:pPr algn="l">
-              <a:defRPr sz="1600" b="0">
+              <a:defRPr sz="1800" b="0">
                 <a:solidFill>
                   <a:srgbClr val="FFFFFF"/>
                 </a:solidFill>
@@ -4624,45 +4813,7 @@
               </a:defRPr>
             </a:pPr>
             <a:r>
-              <a:t>[Text Input: "Luxury watch"]</a:t>
-            </a:r>
-            <a:br/>
-            <a:r>
-              <a:t>    → [Gemini Image: Generate product photo]</a:t>
-            </a:r>
-            <a:br/>
-            <a:r>
-              <a:t>        → [Image Upscaler: 4K enhancement]</a:t>
-            </a:r>
-            <a:br/>
-            <a:r>
-              <a:t>            → [Output: High-res image]</a:t>
-            </a:r>
-            <a:br/>
-            <a:br/>
-            <a:r>
-              <a:t>    → [Gemini Text: Write ad copy]</a:t>
-            </a:r>
-            <a:br/>
-            <a:r>
-              <a:t>        → [Speech Gen: Narrate in French]</a:t>
-            </a:r>
-            <a:br/>
-            <a:r>
-              <a:t>            → [Output: Audio narration]</a:t>
-            </a:r>
-            <a:br/>
-            <a:br/>
-            <a:r>
-              <a:t>    → [Veo Standard: Generate video ad]</a:t>
-            </a:r>
-            <a:br/>
-            <a:r>
-              <a:t>        → [Video Upscaler: 4K]</a:t>
-            </a:r>
-            <a:br/>
-            <a:r>
-              <a:t>            → [Output: Video ad]</a:t>
+              <a:t>Single command Cloud Run deploy:</a:t>
             </a:r>
           </a:p>
         </p:txBody>
@@ -4675,8 +4826,8 @@
         </p:nvSpPr>
         <p:spPr>
           <a:xfrm>
-            <a:off x="731520" y="5303520"/>
-            <a:ext cx="10058400" cy="457200"/>
+            <a:off x="731520" y="1828800"/>
+            <a:ext cx="5029200" cy="457200"/>
           </a:xfrm>
           <a:prstGeom prst="rect">
             <a:avLst/>
@@ -4689,8 +4840,44 @@
           </a:bodyPr>
           <a:lstStyle/>
           <a:p>
-            <a:pPr algn="ctr">
-              <a:defRPr sz="1600" b="0">
+            <a:pPr algn="l">
+              <a:defRPr sz="1200" b="0">
+                <a:solidFill>
+                  <a:srgbClr val="4ADE80"/>
+                </a:solidFill>
+                <a:latin typeface="Calibri"/>
+              </a:defRPr>
+            </a:pPr>
+            <a:r>
+              <a:t>export GOOGLE_CLOUD_PROJECT=your-project &amp;&amp; ./deploy.sh</a:t>
+            </a:r>
+          </a:p>
+        </p:txBody>
+      </p:sp>
+      <p:sp>
+        <p:nvSpPr>
+          <p:cNvPr id="5" name="TextBox 4"/>
+          <p:cNvSpPr txBox="1"/>
+          <p:nvPr/>
+        </p:nvSpPr>
+        <p:spPr>
+          <a:xfrm>
+            <a:off x="731520" y="2743200"/>
+            <a:ext cx="5029200" cy="457200"/>
+          </a:xfrm>
+          <a:prstGeom prst="rect">
+            <a:avLst/>
+          </a:prstGeom>
+          <a:noFill/>
+        </p:spPr>
+        <p:txBody>
+          <a:bodyPr wrap="square">
+            <a:spAutoFit/>
+          </a:bodyPr>
+          <a:lstStyle/>
+          <a:p>
+            <a:pPr algn="l">
+              <a:defRPr sz="1800" b="1">
                 <a:solidFill>
                   <a:srgbClr val="FBBF24"/>
                 </a:solidFill>
@@ -4698,11 +4885,460 @@
               </a:defRPr>
             </a:pPr>
             <a:r>
-              <a:t>Three parallel pipelines from a single text input — image, audio, and video</a:t>
-            </a:r>
-          </a:p>
-        </p:txBody>
-      </p:sp>
+              <a:t>Requirements:</a:t>
+            </a:r>
+          </a:p>
+        </p:txBody>
+      </p:sp>
+      <p:sp>
+        <p:nvSpPr>
+          <p:cNvPr id="6" name="TextBox 5"/>
+          <p:cNvSpPr txBox="1"/>
+          <p:nvPr/>
+        </p:nvSpPr>
+        <p:spPr>
+          <a:xfrm>
+            <a:off x="731520" y="3291840"/>
+            <a:ext cx="5029200" cy="1828800"/>
+          </a:xfrm>
+          <a:prstGeom prst="rect">
+            <a:avLst/>
+          </a:prstGeom>
+          <a:noFill/>
+        </p:spPr>
+        <p:txBody>
+          <a:bodyPr wrap="square">
+            <a:spAutoFit/>
+          </a:bodyPr>
+          <a:lstStyle/>
+          <a:p>
+            <a:pPr>
+              <a:spcAft>
+                <a:spcPts val="800"/>
+              </a:spcAft>
+              <a:defRPr sz="1400">
+                <a:solidFill>
+                  <a:srgbClr val="FFFFFF"/>
+                </a:solidFill>
+                <a:latin typeface="Calibri"/>
+              </a:defRPr>
+            </a:pPr>
+            <a:r>
+              <a:t>GCP project with Vertex AI enabled</a:t>
+            </a:r>
+          </a:p>
+          <a:p>
+            <a:pPr>
+              <a:spcAft>
+                <a:spcPts val="800"/>
+              </a:spcAft>
+              <a:defRPr sz="1400">
+                <a:solidFill>
+                  <a:srgbClr val="FFFFFF"/>
+                </a:solidFill>
+                <a:latin typeface="Calibri"/>
+              </a:defRPr>
+            </a:pPr>
+            <a:r>
+              <a:t>Firebase project (optional, for auth)</a:t>
+            </a:r>
+          </a:p>
+          <a:p>
+            <a:pPr>
+              <a:spcAft>
+                <a:spcPts val="800"/>
+              </a:spcAft>
+              <a:defRPr sz="1400">
+                <a:solidFill>
+                  <a:srgbClr val="FFFFFF"/>
+                </a:solidFill>
+                <a:latin typeface="Calibri"/>
+              </a:defRPr>
+            </a:pPr>
+            <a:r>
+              <a:t>GCS bucket for video storage</a:t>
+            </a:r>
+          </a:p>
+          <a:p>
+            <a:pPr>
+              <a:spcAft>
+                <a:spcPts val="800"/>
+              </a:spcAft>
+              <a:defRPr sz="1400">
+                <a:solidFill>
+                  <a:srgbClr val="FFFFFF"/>
+                </a:solidFill>
+                <a:latin typeface="Calibri"/>
+              </a:defRPr>
+            </a:pPr>
+            <a:r>
+              <a:t>~2GB memory, 1 CPU</a:t>
+            </a:r>
+          </a:p>
+        </p:txBody>
+      </p:sp>
+      <p:sp>
+        <p:nvSpPr>
+          <p:cNvPr id="7" name="TextBox 6"/>
+          <p:cNvSpPr txBox="1"/>
+          <p:nvPr/>
+        </p:nvSpPr>
+        <p:spPr>
+          <a:xfrm>
+            <a:off x="6400800" y="1188720"/>
+            <a:ext cx="5029200" cy="457200"/>
+          </a:xfrm>
+          <a:prstGeom prst="rect">
+            <a:avLst/>
+          </a:prstGeom>
+          <a:noFill/>
+        </p:spPr>
+        <p:txBody>
+          <a:bodyPr wrap="square">
+            <a:spAutoFit/>
+          </a:bodyPr>
+          <a:lstStyle/>
+          <a:p>
+            <a:pPr algn="l">
+              <a:defRPr sz="1800" b="1">
+                <a:solidFill>
+                  <a:srgbClr val="FBBF24"/>
+                </a:solidFill>
+                <a:latin typeface="Calibri"/>
+              </a:defRPr>
+            </a:pPr>
+            <a:r>
+              <a:t>Environment Variables:</a:t>
+            </a:r>
+          </a:p>
+        </p:txBody>
+      </p:sp>
+      <p:graphicFrame>
+        <p:nvGraphicFramePr>
+          <p:cNvPr id="8" name="Table 7"/>
+          <p:cNvGraphicFramePr>
+            <a:graphicFrameLocks noGrp="1"/>
+          </p:cNvGraphicFramePr>
+          <p:nvPr/>
+        </p:nvGraphicFramePr>
+        <p:xfrm>
+          <a:off x="6400800" y="1828800"/>
+          <a:ext cx="5029200" cy="2304288"/>
+        </p:xfrm>
+        <a:graphic>
+          <a:graphicData uri="http://schemas.openxmlformats.org/drawingml/2006/table">
+            <a:tbl>
+              <a:tblPr firstRow="1" bandRow="1">
+                <a:tableStyleId>{5C22544A-7EE6-4342-B048-85BDC9FD1C3A}</a:tableStyleId>
+              </a:tblPr>
+              <a:tblGrid>
+                <a:gridCol w="2514600"/>
+                <a:gridCol w="2514600"/>
+              </a:tblGrid>
+              <a:tr h="384048">
+                <a:tc>
+                  <a:txBody>
+                    <a:bodyPr/>
+                    <a:lstStyle/>
+                    <a:p>
+                      <a:pPr>
+                        <a:defRPr sz="1100" b="1">
+                          <a:solidFill>
+                            <a:srgbClr val="FFFFFF"/>
+                          </a:solidFill>
+                          <a:latin typeface="Calibri"/>
+                        </a:defRPr>
+                      </a:pPr>
+                      <a:r>
+                        <a:t>Variable</a:t>
+                      </a:r>
+                    </a:p>
+                  </a:txBody>
+                  <a:tcPr>
+                    <a:solidFill>
+                      <a:srgbClr val="1F1F3A"/>
+                    </a:solidFill>
+                  </a:tcPr>
+                </a:tc>
+                <a:tc>
+                  <a:txBody>
+                    <a:bodyPr/>
+                    <a:lstStyle/>
+                    <a:p>
+                      <a:pPr>
+                        <a:defRPr sz="1100" b="1">
+                          <a:solidFill>
+                            <a:srgbClr val="FFFFFF"/>
+                          </a:solidFill>
+                          <a:latin typeface="Calibri"/>
+                        </a:defRPr>
+                      </a:pPr>
+                      <a:r>
+                        <a:t>Purpose</a:t>
+                      </a:r>
+                    </a:p>
+                  </a:txBody>
+                  <a:tcPr>
+                    <a:solidFill>
+                      <a:srgbClr val="1F1F3A"/>
+                    </a:solidFill>
+                  </a:tcPr>
+                </a:tc>
+              </a:tr>
+              <a:tr h="384048">
+                <a:tc>
+                  <a:txBody>
+                    <a:bodyPr/>
+                    <a:lstStyle/>
+                    <a:p>
+                      <a:pPr>
+                        <a:defRPr sz="1100">
+                          <a:solidFill>
+                            <a:srgbClr val="D1D5DB"/>
+                          </a:solidFill>
+                          <a:latin typeface="Calibri"/>
+                        </a:defRPr>
+                      </a:pPr>
+                      <a:r>
+                        <a:t>GOOGLE_CLOUD_PROJECT</a:t>
+                      </a:r>
+                    </a:p>
+                  </a:txBody>
+                  <a:tcPr>
+                    <a:solidFill>
+                      <a:srgbClr val="121224"/>
+                    </a:solidFill>
+                  </a:tcPr>
+                </a:tc>
+                <a:tc>
+                  <a:txBody>
+                    <a:bodyPr/>
+                    <a:lstStyle/>
+                    <a:p>
+                      <a:pPr>
+                        <a:defRPr sz="1100">
+                          <a:solidFill>
+                            <a:srgbClr val="D1D5DB"/>
+                          </a:solidFill>
+                          <a:latin typeface="Calibri"/>
+                        </a:defRPr>
+                      </a:pPr>
+                      <a:r>
+                        <a:t>GCP project ID (required)</a:t>
+                      </a:r>
+                    </a:p>
+                  </a:txBody>
+                  <a:tcPr>
+                    <a:solidFill>
+                      <a:srgbClr val="121224"/>
+                    </a:solidFill>
+                  </a:tcPr>
+                </a:tc>
+              </a:tr>
+              <a:tr h="384048">
+                <a:tc>
+                  <a:txBody>
+                    <a:bodyPr/>
+                    <a:lstStyle/>
+                    <a:p>
+                      <a:pPr>
+                        <a:defRPr sz="1100">
+                          <a:solidFill>
+                            <a:srgbClr val="D1D5DB"/>
+                          </a:solidFill>
+                          <a:latin typeface="Calibri"/>
+                        </a:defRPr>
+                      </a:pPr>
+                      <a:r>
+                        <a:t>FIREBASE_PROJECT_ID</a:t>
+                      </a:r>
+                    </a:p>
+                  </a:txBody>
+                  <a:tcPr>
+                    <a:solidFill>
+                      <a:srgbClr val="121224"/>
+                    </a:solidFill>
+                  </a:tcPr>
+                </a:tc>
+                <a:tc>
+                  <a:txBody>
+                    <a:bodyPr/>
+                    <a:lstStyle/>
+                    <a:p>
+                      <a:pPr>
+                        <a:defRPr sz="1100">
+                          <a:solidFill>
+                            <a:srgbClr val="D1D5DB"/>
+                          </a:solidFill>
+                          <a:latin typeface="Calibri"/>
+                        </a:defRPr>
+                      </a:pPr>
+                      <a:r>
+                        <a:t>Firebase project</a:t>
+                      </a:r>
+                    </a:p>
+                  </a:txBody>
+                  <a:tcPr>
+                    <a:solidFill>
+                      <a:srgbClr val="121224"/>
+                    </a:solidFill>
+                  </a:tcPr>
+                </a:tc>
+              </a:tr>
+              <a:tr h="384048">
+                <a:tc>
+                  <a:txBody>
+                    <a:bodyPr/>
+                    <a:lstStyle/>
+                    <a:p>
+                      <a:pPr>
+                        <a:defRPr sz="1100">
+                          <a:solidFill>
+                            <a:srgbClr val="D1D5DB"/>
+                          </a:solidFill>
+                          <a:latin typeface="Calibri"/>
+                        </a:defRPr>
+                      </a:pPr>
+                      <a:r>
+                        <a:t>VEO_BUCKET</a:t>
+                      </a:r>
+                    </a:p>
+                  </a:txBody>
+                  <a:tcPr>
+                    <a:solidFill>
+                      <a:srgbClr val="121224"/>
+                    </a:solidFill>
+                  </a:tcPr>
+                </a:tc>
+                <a:tc>
+                  <a:txBody>
+                    <a:bodyPr/>
+                    <a:lstStyle/>
+                    <a:p>
+                      <a:pPr>
+                        <a:defRPr sz="1100">
+                          <a:solidFill>
+                            <a:srgbClr val="D1D5DB"/>
+                          </a:solidFill>
+                          <a:latin typeface="Calibri"/>
+                        </a:defRPr>
+                      </a:pPr>
+                      <a:r>
+                        <a:t>GCS bucket for videos</a:t>
+                      </a:r>
+                    </a:p>
+                  </a:txBody>
+                  <a:tcPr>
+                    <a:solidFill>
+                      <a:srgbClr val="121224"/>
+                    </a:solidFill>
+                  </a:tcPr>
+                </a:tc>
+              </a:tr>
+              <a:tr h="384048">
+                <a:tc>
+                  <a:txBody>
+                    <a:bodyPr/>
+                    <a:lstStyle/>
+                    <a:p>
+                      <a:pPr>
+                        <a:defRPr sz="1100">
+                          <a:solidFill>
+                            <a:srgbClr val="D1D5DB"/>
+                          </a:solidFill>
+                          <a:latin typeface="Calibri"/>
+                        </a:defRPr>
+                      </a:pPr>
+                      <a:r>
+                        <a:t>CORS_ORIGINS</a:t>
+                      </a:r>
+                    </a:p>
+                  </a:txBody>
+                  <a:tcPr>
+                    <a:solidFill>
+                      <a:srgbClr val="121224"/>
+                    </a:solidFill>
+                  </a:tcPr>
+                </a:tc>
+                <a:tc>
+                  <a:txBody>
+                    <a:bodyPr/>
+                    <a:lstStyle/>
+                    <a:p>
+                      <a:pPr>
+                        <a:defRPr sz="1100">
+                          <a:solidFill>
+                            <a:srgbClr val="D1D5DB"/>
+                          </a:solidFill>
+                          <a:latin typeface="Calibri"/>
+                        </a:defRPr>
+                      </a:pPr>
+                      <a:r>
+                        <a:t>Allowed origins</a:t>
+                      </a:r>
+                    </a:p>
+                  </a:txBody>
+                  <a:tcPr>
+                    <a:solidFill>
+                      <a:srgbClr val="121224"/>
+                    </a:solidFill>
+                  </a:tcPr>
+                </a:tc>
+              </a:tr>
+              <a:tr h="384048">
+                <a:tc>
+                  <a:txBody>
+                    <a:bodyPr/>
+                    <a:lstStyle/>
+                    <a:p>
+                      <a:pPr>
+                        <a:defRPr sz="1100">
+                          <a:solidFill>
+                            <a:srgbClr val="D1D5DB"/>
+                          </a:solidFill>
+                          <a:latin typeface="Calibri"/>
+                        </a:defRPr>
+                      </a:pPr>
+                      <a:r>
+                        <a:t>VITE_FIREBASE_API_KEY</a:t>
+                      </a:r>
+                    </a:p>
+                  </a:txBody>
+                  <a:tcPr>
+                    <a:solidFill>
+                      <a:srgbClr val="121224"/>
+                    </a:solidFill>
+                  </a:tcPr>
+                </a:tc>
+                <a:tc>
+                  <a:txBody>
+                    <a:bodyPr/>
+                    <a:lstStyle/>
+                    <a:p>
+                      <a:pPr>
+                        <a:defRPr sz="1100">
+                          <a:solidFill>
+                            <a:srgbClr val="D1D5DB"/>
+                          </a:solidFill>
+                          <a:latin typeface="Calibri"/>
+                        </a:defRPr>
+                      </a:pPr>
+                      <a:r>
+                        <a:t>Frontend Firebase key</a:t>
+                      </a:r>
+                    </a:p>
+                  </a:txBody>
+                  <a:tcPr>
+                    <a:solidFill>
+                      <a:srgbClr val="121224"/>
+                    </a:solidFill>
+                  </a:tcPr>
+                </a:tc>
+              </a:tr>
+            </a:tbl>
+          </a:graphicData>
+        </a:graphic>
+      </p:graphicFrame>
     </p:spTree>
   </p:cSld>
   <p:clrMapOvr>
@@ -4737,559 +5373,6 @@
         </p:nvSpPr>
         <p:spPr>
           <a:xfrm>
-            <a:off x="731520" y="365760"/>
-            <a:ext cx="10058400" cy="640080"/>
-          </a:xfrm>
-          <a:prstGeom prst="rect">
-            <a:avLst/>
-          </a:prstGeom>
-          <a:noFill/>
-        </p:spPr>
-        <p:txBody>
-          <a:bodyPr wrap="square">
-            <a:spAutoFit/>
-          </a:bodyPr>
-          <a:lstStyle/>
-          <a:p>
-            <a:pPr algn="l">
-              <a:defRPr sz="3600" b="1">
-                <a:solidFill>
-                  <a:srgbClr val="60A5FA"/>
-                </a:solidFill>
-                <a:latin typeface="Calibri"/>
-              </a:defRPr>
-            </a:pPr>
-            <a:r>
-              <a:t>Deployment</a:t>
-            </a:r>
-          </a:p>
-        </p:txBody>
-      </p:sp>
-      <p:sp>
-        <p:nvSpPr>
-          <p:cNvPr id="3" name="TextBox 2"/>
-          <p:cNvSpPr txBox="1"/>
-          <p:nvPr/>
-        </p:nvSpPr>
-        <p:spPr>
-          <a:xfrm>
-            <a:off x="731520" y="1188720"/>
-            <a:ext cx="5029200" cy="457200"/>
-          </a:xfrm>
-          <a:prstGeom prst="rect">
-            <a:avLst/>
-          </a:prstGeom>
-          <a:noFill/>
-        </p:spPr>
-        <p:txBody>
-          <a:bodyPr wrap="square">
-            <a:spAutoFit/>
-          </a:bodyPr>
-          <a:lstStyle/>
-          <a:p>
-            <a:pPr algn="l">
-              <a:defRPr sz="1800" b="0">
-                <a:solidFill>
-                  <a:srgbClr val="FFFFFF"/>
-                </a:solidFill>
-                <a:latin typeface="Calibri"/>
-              </a:defRPr>
-            </a:pPr>
-            <a:r>
-              <a:t>Single command deploy to Cloud Run:</a:t>
-            </a:r>
-          </a:p>
-        </p:txBody>
-      </p:sp>
-      <p:sp>
-        <p:nvSpPr>
-          <p:cNvPr id="4" name="TextBox 3"/>
-          <p:cNvSpPr txBox="1"/>
-          <p:nvPr/>
-        </p:nvSpPr>
-        <p:spPr>
-          <a:xfrm>
-            <a:off x="731520" y="1828800"/>
-            <a:ext cx="5029200" cy="457200"/>
-          </a:xfrm>
-          <a:prstGeom prst="rect">
-            <a:avLst/>
-          </a:prstGeom>
-          <a:noFill/>
-        </p:spPr>
-        <p:txBody>
-          <a:bodyPr wrap="square">
-            <a:spAutoFit/>
-          </a:bodyPr>
-          <a:lstStyle/>
-          <a:p>
-            <a:pPr algn="l">
-              <a:defRPr sz="1300" b="0">
-                <a:solidFill>
-                  <a:srgbClr val="4ADE80"/>
-                </a:solidFill>
-                <a:latin typeface="Calibri"/>
-              </a:defRPr>
-            </a:pPr>
-            <a:r>
-              <a:t>export GOOGLE_CLOUD_PROJECT=your-project &amp;&amp; ./deploy.sh</a:t>
-            </a:r>
-          </a:p>
-        </p:txBody>
-      </p:sp>
-      <p:sp>
-        <p:nvSpPr>
-          <p:cNvPr id="5" name="TextBox 4"/>
-          <p:cNvSpPr txBox="1"/>
-          <p:nvPr/>
-        </p:nvSpPr>
-        <p:spPr>
-          <a:xfrm>
-            <a:off x="731520" y="2743200"/>
-            <a:ext cx="5029200" cy="457200"/>
-          </a:xfrm>
-          <a:prstGeom prst="rect">
-            <a:avLst/>
-          </a:prstGeom>
-          <a:noFill/>
-        </p:spPr>
-        <p:txBody>
-          <a:bodyPr wrap="square">
-            <a:spAutoFit/>
-          </a:bodyPr>
-          <a:lstStyle/>
-          <a:p>
-            <a:pPr algn="l">
-              <a:defRPr sz="1800" b="1">
-                <a:solidFill>
-                  <a:srgbClr val="FBBF24"/>
-                </a:solidFill>
-                <a:latin typeface="Calibri"/>
-              </a:defRPr>
-            </a:pPr>
-            <a:r>
-              <a:t>Requirements:</a:t>
-            </a:r>
-          </a:p>
-        </p:txBody>
-      </p:sp>
-      <p:sp>
-        <p:nvSpPr>
-          <p:cNvPr id="6" name="TextBox 5"/>
-          <p:cNvSpPr txBox="1"/>
-          <p:nvPr/>
-        </p:nvSpPr>
-        <p:spPr>
-          <a:xfrm>
-            <a:off x="731520" y="3291840"/>
-            <a:ext cx="5029200" cy="1828800"/>
-          </a:xfrm>
-          <a:prstGeom prst="rect">
-            <a:avLst/>
-          </a:prstGeom>
-          <a:noFill/>
-        </p:spPr>
-        <p:txBody>
-          <a:bodyPr wrap="square">
-            <a:spAutoFit/>
-          </a:bodyPr>
-          <a:lstStyle/>
-          <a:p>
-            <a:pPr>
-              <a:spcAft>
-                <a:spcPts val="800"/>
-              </a:spcAft>
-              <a:defRPr sz="1500">
-                <a:solidFill>
-                  <a:srgbClr val="FFFFFF"/>
-                </a:solidFill>
-                <a:latin typeface="Calibri"/>
-              </a:defRPr>
-            </a:pPr>
-            <a:r>
-              <a:t>GCP project with Vertex AI enabled</a:t>
-            </a:r>
-          </a:p>
-          <a:p>
-            <a:pPr>
-              <a:spcAft>
-                <a:spcPts val="800"/>
-              </a:spcAft>
-              <a:defRPr sz="1500">
-                <a:solidFill>
-                  <a:srgbClr val="FFFFFF"/>
-                </a:solidFill>
-                <a:latin typeface="Calibri"/>
-              </a:defRPr>
-            </a:pPr>
-            <a:r>
-              <a:t>Firebase project with Google auth</a:t>
-            </a:r>
-          </a:p>
-          <a:p>
-            <a:pPr>
-              <a:spcAft>
-                <a:spcPts val="800"/>
-              </a:spcAft>
-              <a:defRPr sz="1500">
-                <a:solidFill>
-                  <a:srgbClr val="FFFFFF"/>
-                </a:solidFill>
-                <a:latin typeface="Calibri"/>
-              </a:defRPr>
-            </a:pPr>
-            <a:r>
-              <a:t>~2GB memory, 1 CPU</a:t>
-            </a:r>
-          </a:p>
-        </p:txBody>
-      </p:sp>
-      <p:sp>
-        <p:nvSpPr>
-          <p:cNvPr id="7" name="TextBox 6"/>
-          <p:cNvSpPr txBox="1"/>
-          <p:nvPr/>
-        </p:nvSpPr>
-        <p:spPr>
-          <a:xfrm>
-            <a:off x="6400800" y="1188720"/>
-            <a:ext cx="5029200" cy="457200"/>
-          </a:xfrm>
-          <a:prstGeom prst="rect">
-            <a:avLst/>
-          </a:prstGeom>
-          <a:noFill/>
-        </p:spPr>
-        <p:txBody>
-          <a:bodyPr wrap="square">
-            <a:spAutoFit/>
-          </a:bodyPr>
-          <a:lstStyle/>
-          <a:p>
-            <a:pPr algn="l">
-              <a:defRPr sz="1800" b="1">
-                <a:solidFill>
-                  <a:srgbClr val="FBBF24"/>
-                </a:solidFill>
-                <a:latin typeface="Calibri"/>
-              </a:defRPr>
-            </a:pPr>
-            <a:r>
-              <a:t>Environment Variables:</a:t>
-            </a:r>
-          </a:p>
-        </p:txBody>
-      </p:sp>
-      <p:graphicFrame>
-        <p:nvGraphicFramePr>
-          <p:cNvPr id="8" name="Table 7"/>
-          <p:cNvGraphicFramePr>
-            <a:graphicFrameLocks noGrp="1"/>
-          </p:cNvGraphicFramePr>
-          <p:nvPr/>
-        </p:nvGraphicFramePr>
-        <p:xfrm>
-          <a:off x="6400800" y="1828800"/>
-          <a:ext cx="5029200" cy="2057400"/>
-        </p:xfrm>
-        <a:graphic>
-          <a:graphicData uri="http://schemas.openxmlformats.org/drawingml/2006/table">
-            <a:tbl>
-              <a:tblPr firstRow="1" bandRow="1">
-                <a:tableStyleId>{5C22544A-7EE6-4342-B048-85BDC9FD1C3A}</a:tableStyleId>
-              </a:tblPr>
-              <a:tblGrid>
-                <a:gridCol w="2514600"/>
-                <a:gridCol w="2514600"/>
-              </a:tblGrid>
-              <a:tr h="411480">
-                <a:tc>
-                  <a:txBody>
-                    <a:bodyPr/>
-                    <a:lstStyle/>
-                    <a:p>
-                      <a:pPr>
-                        <a:defRPr sz="1200" b="1">
-                          <a:solidFill>
-                            <a:srgbClr val="FFFFFF"/>
-                          </a:solidFill>
-                          <a:latin typeface="Calibri"/>
-                        </a:defRPr>
-                      </a:pPr>
-                      <a:r>
-                        <a:t>Variable</a:t>
-                      </a:r>
-                    </a:p>
-                  </a:txBody>
-                  <a:tcPr>
-                    <a:solidFill>
-                      <a:srgbClr val="1F1F3A"/>
-                    </a:solidFill>
-                  </a:tcPr>
-                </a:tc>
-                <a:tc>
-                  <a:txBody>
-                    <a:bodyPr/>
-                    <a:lstStyle/>
-                    <a:p>
-                      <a:pPr>
-                        <a:defRPr sz="1200" b="1">
-                          <a:solidFill>
-                            <a:srgbClr val="FFFFFF"/>
-                          </a:solidFill>
-                          <a:latin typeface="Calibri"/>
-                        </a:defRPr>
-                      </a:pPr>
-                      <a:r>
-                        <a:t>Purpose</a:t>
-                      </a:r>
-                    </a:p>
-                  </a:txBody>
-                  <a:tcPr>
-                    <a:solidFill>
-                      <a:srgbClr val="1F1F3A"/>
-                    </a:solidFill>
-                  </a:tcPr>
-                </a:tc>
-              </a:tr>
-              <a:tr h="411480">
-                <a:tc>
-                  <a:txBody>
-                    <a:bodyPr/>
-                    <a:lstStyle/>
-                    <a:p>
-                      <a:pPr>
-                        <a:defRPr sz="1200">
-                          <a:solidFill>
-                            <a:srgbClr val="D1D5DB"/>
-                          </a:solidFill>
-                          <a:latin typeface="Calibri"/>
-                        </a:defRPr>
-                      </a:pPr>
-                      <a:r>
-                        <a:t>GOOGLE_CLOUD_PROJECT</a:t>
-                      </a:r>
-                    </a:p>
-                  </a:txBody>
-                  <a:tcPr>
-                    <a:solidFill>
-                      <a:srgbClr val="121224"/>
-                    </a:solidFill>
-                  </a:tcPr>
-                </a:tc>
-                <a:tc>
-                  <a:txBody>
-                    <a:bodyPr/>
-                    <a:lstStyle/>
-                    <a:p>
-                      <a:pPr>
-                        <a:defRPr sz="1200">
-                          <a:solidFill>
-                            <a:srgbClr val="D1D5DB"/>
-                          </a:solidFill>
-                          <a:latin typeface="Calibri"/>
-                        </a:defRPr>
-                      </a:pPr>
-                      <a:r>
-                        <a:t>GCP project ID</a:t>
-                      </a:r>
-                    </a:p>
-                  </a:txBody>
-                  <a:tcPr>
-                    <a:solidFill>
-                      <a:srgbClr val="121224"/>
-                    </a:solidFill>
-                  </a:tcPr>
-                </a:tc>
-              </a:tr>
-              <a:tr h="411480">
-                <a:tc>
-                  <a:txBody>
-                    <a:bodyPr/>
-                    <a:lstStyle/>
-                    <a:p>
-                      <a:pPr>
-                        <a:defRPr sz="1200">
-                          <a:solidFill>
-                            <a:srgbClr val="D1D5DB"/>
-                          </a:solidFill>
-                          <a:latin typeface="Calibri"/>
-                        </a:defRPr>
-                      </a:pPr>
-                      <a:r>
-                        <a:t>FIREBASE_PROJECT_ID</a:t>
-                      </a:r>
-                    </a:p>
-                  </a:txBody>
-                  <a:tcPr>
-                    <a:solidFill>
-                      <a:srgbClr val="121224"/>
-                    </a:solidFill>
-                  </a:tcPr>
-                </a:tc>
-                <a:tc>
-                  <a:txBody>
-                    <a:bodyPr/>
-                    <a:lstStyle/>
-                    <a:p>
-                      <a:pPr>
-                        <a:defRPr sz="1200">
-                          <a:solidFill>
-                            <a:srgbClr val="D1D5DB"/>
-                          </a:solidFill>
-                          <a:latin typeface="Calibri"/>
-                        </a:defRPr>
-                      </a:pPr>
-                      <a:r>
-                        <a:t>Firebase project</a:t>
-                      </a:r>
-                    </a:p>
-                  </a:txBody>
-                  <a:tcPr>
-                    <a:solidFill>
-                      <a:srgbClr val="121224"/>
-                    </a:solidFill>
-                  </a:tcPr>
-                </a:tc>
-              </a:tr>
-              <a:tr h="411480">
-                <a:tc>
-                  <a:txBody>
-                    <a:bodyPr/>
-                    <a:lstStyle/>
-                    <a:p>
-                      <a:pPr>
-                        <a:defRPr sz="1200">
-                          <a:solidFill>
-                            <a:srgbClr val="D1D5DB"/>
-                          </a:solidFill>
-                          <a:latin typeface="Calibri"/>
-                        </a:defRPr>
-                      </a:pPr>
-                      <a:r>
-                        <a:t>CORS_ORIGINS</a:t>
-                      </a:r>
-                    </a:p>
-                  </a:txBody>
-                  <a:tcPr>
-                    <a:solidFill>
-                      <a:srgbClr val="121224"/>
-                    </a:solidFill>
-                  </a:tcPr>
-                </a:tc>
-                <a:tc>
-                  <a:txBody>
-                    <a:bodyPr/>
-                    <a:lstStyle/>
-                    <a:p>
-                      <a:pPr>
-                        <a:defRPr sz="1200">
-                          <a:solidFill>
-                            <a:srgbClr val="D1D5DB"/>
-                          </a:solidFill>
-                          <a:latin typeface="Calibri"/>
-                        </a:defRPr>
-                      </a:pPr>
-                      <a:r>
-                        <a:t>Allowed frontend origins</a:t>
-                      </a:r>
-                    </a:p>
-                  </a:txBody>
-                  <a:tcPr>
-                    <a:solidFill>
-                      <a:srgbClr val="121224"/>
-                    </a:solidFill>
-                  </a:tcPr>
-                </a:tc>
-              </a:tr>
-              <a:tr h="411480">
-                <a:tc>
-                  <a:txBody>
-                    <a:bodyPr/>
-                    <a:lstStyle/>
-                    <a:p>
-                      <a:pPr>
-                        <a:defRPr sz="1200">
-                          <a:solidFill>
-                            <a:srgbClr val="D1D5DB"/>
-                          </a:solidFill>
-                          <a:latin typeface="Calibri"/>
-                        </a:defRPr>
-                      </a:pPr>
-                      <a:r>
-                        <a:t>VEO_BUCKET</a:t>
-                      </a:r>
-                    </a:p>
-                  </a:txBody>
-                  <a:tcPr>
-                    <a:solidFill>
-                      <a:srgbClr val="121224"/>
-                    </a:solidFill>
-                  </a:tcPr>
-                </a:tc>
-                <a:tc>
-                  <a:txBody>
-                    <a:bodyPr/>
-                    <a:lstStyle/>
-                    <a:p>
-                      <a:pPr>
-                        <a:defRPr sz="1200">
-                          <a:solidFill>
-                            <a:srgbClr val="D1D5DB"/>
-                          </a:solidFill>
-                          <a:latin typeface="Calibri"/>
-                        </a:defRPr>
-                      </a:pPr>
-                      <a:r>
-                        <a:t>GCS bucket for video storage</a:t>
-                      </a:r>
-                    </a:p>
-                  </a:txBody>
-                  <a:tcPr>
-                    <a:solidFill>
-                      <a:srgbClr val="121224"/>
-                    </a:solidFill>
-                  </a:tcPr>
-                </a:tc>
-              </a:tr>
-            </a:tbl>
-          </a:graphicData>
-        </a:graphic>
-      </p:graphicFrame>
-    </p:spTree>
-  </p:cSld>
-  <p:clrMapOvr>
-    <a:masterClrMapping/>
-  </p:clrMapOvr>
-</p:sld>
-</file>
-
-<file path=ppt/slides/slide15.xml><?xml version="1.0" encoding="utf-8"?>
-<p:sld xmlns:a="http://schemas.openxmlformats.org/drawingml/2006/main" xmlns:p="http://schemas.openxmlformats.org/presentationml/2006/main" xmlns:r="http://schemas.openxmlformats.org/officeDocument/2006/relationships">
-  <p:cSld>
-    <p:bg>
-      <p:bgPr>
-        <a:solidFill>
-          <a:srgbClr val="0A0A14"/>
-        </a:solidFill>
-        <a:effectLst/>
-      </p:bgPr>
-    </p:bg>
-    <p:spTree>
-      <p:nvGrpSpPr>
-        <p:cNvPr id="1" name=""/>
-        <p:cNvGrpSpPr/>
-        <p:nvPr/>
-      </p:nvGrpSpPr>
-      <p:grpSpPr/>
-      <p:sp>
-        <p:nvSpPr>
-          <p:cNvPr id="2" name="TextBox 1"/>
-          <p:cNvSpPr txBox="1"/>
-          <p:nvPr/>
-        </p:nvSpPr>
-        <p:spPr>
-          <a:xfrm>
             <a:off x="914400" y="914400"/>
             <a:ext cx="10058400" cy="640080"/>
           </a:xfrm>
@@ -5416,7 +5499,7 @@
               </a:defRPr>
             </a:pPr>
             <a:r>
-              <a:t>Real-time collaboration — Multiple users on same workflow</a:t>
+              <a:t>Real-time collaboration — Multi-user editing</a:t>
             </a:r>
           </a:p>
           <a:p>
@@ -5445,8 +5528,8 @@
         </p:nvSpPr>
         <p:spPr>
           <a:xfrm>
-            <a:off x="914400" y="5669280"/>
-            <a:ext cx="10058400" cy="457200"/>
+            <a:off x="914400" y="5943600"/>
+            <a:ext cx="10058400" cy="365760"/>
           </a:xfrm>
           <a:prstGeom prst="rect">
             <a:avLst/>
@@ -5460,7 +5543,7 @@
           <a:lstStyle/>
           <a:p>
             <a:pPr algn="ctr">
-              <a:defRPr sz="1400" b="0">
+              <a:defRPr sz="1300" b="0">
                 <a:solidFill>
                   <a:srgbClr val="9CA3AF"/>
                 </a:solidFill>
@@ -5468,7 +5551,7 @@
               </a:defRPr>
             </a:pPr>
             <a:r>
-              <a:t>Built with Gemini, Veo, Lyria, and Cloud TTS on Google Cloud</a:t>
+              <a:t>Built with Vertex AI on Google Cloud</a:t>
             </a:r>
           </a:p>
         </p:txBody>
@@ -5566,7 +5649,7 @@
               </a:defRPr>
             </a:pPr>
             <a:r>
-              <a:t>A visual node-based workflow engine that chains multiple AI models together to create complex media generation pipelines — without writing code.</a:t>
+              <a:t>Visual node-based workflow engine that chains AI models for media generation. No code required.</a:t>
             </a:r>
           </a:p>
         </p:txBody>
@@ -5605,7 +5688,7 @@
               </a:defRPr>
             </a:pPr>
             <a:r>
-              <a:t>Visual workflow builder — drag, drop, connect AI nodes</a:t>
+              <a:t>Drag-drop visual builder with ReactFlow</a:t>
             </a:r>
           </a:p>
           <a:p>
@@ -5621,7 +5704,7 @@
               </a:defRPr>
             </a:pPr>
             <a:r>
-              <a:t>Multi-model orchestration — chain Gemini, Veo, Lyria, TTS</a:t>
+              <a:t>Real-time SSE execution streaming</a:t>
             </a:r>
           </a:p>
           <a:p>
@@ -5637,7 +5720,7 @@
               </a:defRPr>
             </a:pPr>
             <a:r>
-              <a:t>Real-time execution — results stream node-by-node via SSE</a:t>
+              <a:t>Multiple workflow tabs side by side</a:t>
             </a:r>
           </a:p>
           <a:p>
@@ -5653,7 +5736,7 @@
               </a:defRPr>
             </a:pPr>
             <a:r>
-              <a:t>Team collaboration — share workflows with teams or publicly</a:t>
+              <a:t>Team collaboration with private/team/public sharing</a:t>
             </a:r>
           </a:p>
           <a:p>
@@ -5669,7 +5752,7 @@
               </a:defRPr>
             </a:pPr>
             <a:r>
-              <a:t>Asset management — every generated asset saved with prompts</a:t>
+              <a:t>Auto-saved asset library with prompts</a:t>
             </a:r>
           </a:p>
           <a:p>
@@ -5685,7 +5768,7 @@
               </a:defRPr>
             </a:pPr>
             <a:r>
-              <a:t>Multiple workflow tabs — work on several projects at once</a:t>
+              <a:t>Firebase Google authentication</a:t>
             </a:r>
           </a:p>
         </p:txBody>
@@ -5771,633 +5854,169 @@
               </a:defRPr>
             </a:pPr>
             <a:r>
-              <a:t>Node Types</a:t>
-            </a:r>
-          </a:p>
-        </p:txBody>
-      </p:sp>
-      <p:graphicFrame>
-        <p:nvGraphicFramePr>
-          <p:cNvPr id="3" name="Table 2"/>
-          <p:cNvGraphicFramePr>
-            <a:graphicFrameLocks noGrp="1"/>
-          </p:cNvGraphicFramePr>
+              <a:t>Multiple Workflow Tabs</a:t>
+            </a:r>
+          </a:p>
+        </p:txBody>
+      </p:sp>
+      <p:sp>
+        <p:nvSpPr>
+          <p:cNvPr id="3" name="TextBox 2"/>
+          <p:cNvSpPr txBox="1"/>
           <p:nvPr/>
-        </p:nvGraphicFramePr>
-        <p:xfrm>
-          <a:off x="731520" y="1188720"/>
-          <a:ext cx="10515600" cy="3291840"/>
-        </p:xfrm>
-        <a:graphic>
-          <a:graphicData uri="http://schemas.openxmlformats.org/drawingml/2006/table">
-            <a:tbl>
-              <a:tblPr firstRow="1" bandRow="1">
-                <a:tableStyleId>{5C22544A-7EE6-4342-B048-85BDC9FD1C3A}</a:tableStyleId>
-              </a:tblPr>
-              <a:tblGrid>
-                <a:gridCol w="3505200"/>
-                <a:gridCol w="3505200"/>
-                <a:gridCol w="3505200"/>
-              </a:tblGrid>
-              <a:tr h="411480">
-                <a:tc>
-                  <a:txBody>
-                    <a:bodyPr/>
-                    <a:lstStyle/>
-                    <a:p>
-                      <a:pPr>
-                        <a:defRPr sz="1200" b="1">
-                          <a:solidFill>
-                            <a:srgbClr val="FFFFFF"/>
-                          </a:solidFill>
-                          <a:latin typeface="Calibri"/>
-                        </a:defRPr>
-                      </a:pPr>
-                      <a:r>
-                        <a:t>Category</a:t>
-                      </a:r>
-                    </a:p>
-                  </a:txBody>
-                  <a:tcPr>
-                    <a:solidFill>
-                      <a:srgbClr val="1F1F3A"/>
-                    </a:solidFill>
-                  </a:tcPr>
-                </a:tc>
-                <a:tc>
-                  <a:txBody>
-                    <a:bodyPr/>
-                    <a:lstStyle/>
-                    <a:p>
-                      <a:pPr>
-                        <a:defRPr sz="1200" b="1">
-                          <a:solidFill>
-                            <a:srgbClr val="FFFFFF"/>
-                          </a:solidFill>
-                          <a:latin typeface="Calibri"/>
-                        </a:defRPr>
-                      </a:pPr>
-                      <a:r>
-                        <a:t>Nodes</a:t>
-                      </a:r>
-                    </a:p>
-                  </a:txBody>
-                  <a:tcPr>
-                    <a:solidFill>
-                      <a:srgbClr val="1F1F3A"/>
-                    </a:solidFill>
-                  </a:tcPr>
-                </a:tc>
-                <a:tc>
-                  <a:txBody>
-                    <a:bodyPr/>
-                    <a:lstStyle/>
-                    <a:p>
-                      <a:pPr>
-                        <a:defRPr sz="1200" b="1">
-                          <a:solidFill>
-                            <a:srgbClr val="FFFFFF"/>
-                          </a:solidFill>
-                          <a:latin typeface="Calibri"/>
-                        </a:defRPr>
-                      </a:pPr>
-                      <a:r>
-                        <a:t>Description</a:t>
-                      </a:r>
-                    </a:p>
-                  </a:txBody>
-                  <a:tcPr>
-                    <a:solidFill>
-                      <a:srgbClr val="1F1F3A"/>
-                    </a:solidFill>
-                  </a:tcPr>
-                </a:tc>
-              </a:tr>
-              <a:tr h="411480">
-                <a:tc>
-                  <a:txBody>
-                    <a:bodyPr/>
-                    <a:lstStyle/>
-                    <a:p>
-                      <a:pPr>
-                        <a:defRPr sz="1200">
-                          <a:solidFill>
-                            <a:srgbClr val="D1D5DB"/>
-                          </a:solidFill>
-                          <a:latin typeface="Calibri"/>
-                        </a:defRPr>
-                      </a:pPr>
-                      <a:r>
-                        <a:t>Inputs</a:t>
-                      </a:r>
-                    </a:p>
-                  </a:txBody>
-                  <a:tcPr>
-                    <a:solidFill>
-                      <a:srgbClr val="121224"/>
-                    </a:solidFill>
-                  </a:tcPr>
-                </a:tc>
-                <a:tc>
-                  <a:txBody>
-                    <a:bodyPr/>
-                    <a:lstStyle/>
-                    <a:p>
-                      <a:pPr>
-                        <a:defRPr sz="1200">
-                          <a:solidFill>
-                            <a:srgbClr val="D1D5DB"/>
-                          </a:solidFill>
-                          <a:latin typeface="Calibri"/>
-                        </a:defRPr>
-                      </a:pPr>
-                      <a:r>
-                        <a:t>Text, Image, Video, Audio</a:t>
-                      </a:r>
-                    </a:p>
-                  </a:txBody>
-                  <a:tcPr>
-                    <a:solidFill>
-                      <a:srgbClr val="121224"/>
-                    </a:solidFill>
-                  </a:tcPr>
-                </a:tc>
-                <a:tc>
-                  <a:txBody>
-                    <a:bodyPr/>
-                    <a:lstStyle/>
-                    <a:p>
-                      <a:pPr>
-                        <a:defRPr sz="1200">
-                          <a:solidFill>
-                            <a:srgbClr val="D1D5DB"/>
-                          </a:solidFill>
-                          <a:latin typeface="Calibri"/>
-                        </a:defRPr>
-                      </a:pPr>
-                      <a:r>
-                        <a:t>Upload or type content to feed into pipelines</a:t>
-                      </a:r>
-                    </a:p>
-                  </a:txBody>
-                  <a:tcPr>
-                    <a:solidFill>
-                      <a:srgbClr val="121224"/>
-                    </a:solidFill>
-                  </a:tcPr>
-                </a:tc>
-              </a:tr>
-              <a:tr h="411480">
-                <a:tc>
-                  <a:txBody>
-                    <a:bodyPr/>
-                    <a:lstStyle/>
-                    <a:p>
-                      <a:pPr>
-                        <a:defRPr sz="1200">
-                          <a:solidFill>
-                            <a:srgbClr val="D1D5DB"/>
-                          </a:solidFill>
-                          <a:latin typeface="Calibri"/>
-                        </a:defRPr>
-                      </a:pPr>
-                      <a:r>
-                        <a:t>Gemini</a:t>
-                      </a:r>
-                    </a:p>
-                  </a:txBody>
-                  <a:tcPr>
-                    <a:solidFill>
-                      <a:srgbClr val="121224"/>
-                    </a:solidFill>
-                  </a:tcPr>
-                </a:tc>
-                <a:tc>
-                  <a:txBody>
-                    <a:bodyPr/>
-                    <a:lstStyle/>
-                    <a:p>
-                      <a:pPr>
-                        <a:defRPr sz="1200">
-                          <a:solidFill>
-                            <a:srgbClr val="D1D5DB"/>
-                          </a:solidFill>
-                          <a:latin typeface="Calibri"/>
-                        </a:defRPr>
-                      </a:pPr>
-                      <a:r>
-                        <a:t>Gemini Text, Gemini Image</a:t>
-                      </a:r>
-                    </a:p>
-                  </a:txBody>
-                  <a:tcPr>
-                    <a:solidFill>
-                      <a:srgbClr val="121224"/>
-                    </a:solidFill>
-                  </a:tcPr>
-                </a:tc>
-                <a:tc>
-                  <a:txBody>
-                    <a:bodyPr/>
-                    <a:lstStyle/>
-                    <a:p>
-                      <a:pPr>
-                        <a:defRPr sz="1200">
-                          <a:solidFill>
-                            <a:srgbClr val="D1D5DB"/>
-                          </a:solidFill>
-                          <a:latin typeface="Calibri"/>
-                        </a:defRPr>
-                      </a:pPr>
-                      <a:r>
-                        <a:t>Generate text or images from multimodal prompts</a:t>
-                      </a:r>
-                    </a:p>
-                  </a:txBody>
-                  <a:tcPr>
-                    <a:solidFill>
-                      <a:srgbClr val="121224"/>
-                    </a:solidFill>
-                  </a:tcPr>
-                </a:tc>
-              </a:tr>
-              <a:tr h="411480">
-                <a:tc>
-                  <a:txBody>
-                    <a:bodyPr/>
-                    <a:lstStyle/>
-                    <a:p>
-                      <a:pPr>
-                        <a:defRPr sz="1200">
-                          <a:solidFill>
-                            <a:srgbClr val="D1D5DB"/>
-                          </a:solidFill>
-                          <a:latin typeface="Calibri"/>
-                        </a:defRPr>
-                      </a:pPr>
-                      <a:r>
-                        <a:t>Voice &amp; Music</a:t>
-                      </a:r>
-                    </a:p>
-                  </a:txBody>
-                  <a:tcPr>
-                    <a:solidFill>
-                      <a:srgbClr val="121224"/>
-                    </a:solidFill>
-                  </a:tcPr>
-                </a:tc>
-                <a:tc>
-                  <a:txBody>
-                    <a:bodyPr/>
-                    <a:lstStyle/>
-                    <a:p>
-                      <a:pPr>
-                        <a:defRPr sz="1200">
-                          <a:solidFill>
-                            <a:srgbClr val="D1D5DB"/>
-                          </a:solidFill>
-                          <a:latin typeface="Calibri"/>
-                        </a:defRPr>
-                      </a:pPr>
-                      <a:r>
-                        <a:t>Speech Gen, Lyria Clip, Lyria Pro</a:t>
-                      </a:r>
-                    </a:p>
-                  </a:txBody>
-                  <a:tcPr>
-                    <a:solidFill>
-                      <a:srgbClr val="121224"/>
-                    </a:solidFill>
-                  </a:tcPr>
-                </a:tc>
-                <a:tc>
-                  <a:txBody>
-                    <a:bodyPr/>
-                    <a:lstStyle/>
-                    <a:p>
-                      <a:pPr>
-                        <a:defRPr sz="1200">
-                          <a:solidFill>
-                            <a:srgbClr val="D1D5DB"/>
-                          </a:solidFill>
-                          <a:latin typeface="Calibri"/>
-                        </a:defRPr>
-                      </a:pPr>
-                      <a:r>
-                        <a:t>TTS (23 langs, 7 voices) and AI music generation</a:t>
-                      </a:r>
-                    </a:p>
-                  </a:txBody>
-                  <a:tcPr>
-                    <a:solidFill>
-                      <a:srgbClr val="121224"/>
-                    </a:solidFill>
-                  </a:tcPr>
-                </a:tc>
-              </a:tr>
-              <a:tr h="411480">
-                <a:tc>
-                  <a:txBody>
-                    <a:bodyPr/>
-                    <a:lstStyle/>
-                    <a:p>
-                      <a:pPr>
-                        <a:defRPr sz="1200">
-                          <a:solidFill>
-                            <a:srgbClr val="D1D5DB"/>
-                          </a:solidFill>
-                          <a:latin typeface="Calibri"/>
-                        </a:defRPr>
-                      </a:pPr>
-                      <a:r>
-                        <a:t>Video</a:t>
-                      </a:r>
-                    </a:p>
-                  </a:txBody>
-                  <a:tcPr>
-                    <a:solidFill>
-                      <a:srgbClr val="121224"/>
-                    </a:solidFill>
-                  </a:tcPr>
-                </a:tc>
-                <a:tc>
-                  <a:txBody>
-                    <a:bodyPr/>
-                    <a:lstStyle/>
-                    <a:p>
-                      <a:pPr>
-                        <a:defRPr sz="1200">
-                          <a:solidFill>
-                            <a:srgbClr val="D1D5DB"/>
-                          </a:solidFill>
-                          <a:latin typeface="Calibri"/>
-                        </a:defRPr>
-                      </a:pPr>
-                      <a:r>
-                        <a:t>Veo Standard, Extend, Reference</a:t>
-                      </a:r>
-                    </a:p>
-                  </a:txBody>
-                  <a:tcPr>
-                    <a:solidFill>
-                      <a:srgbClr val="121224"/>
-                    </a:solidFill>
-                  </a:tcPr>
-                </a:tc>
-                <a:tc>
-                  <a:txBody>
-                    <a:bodyPr/>
-                    <a:lstStyle/>
-                    <a:p>
-                      <a:pPr>
-                        <a:defRPr sz="1200">
-                          <a:solidFill>
-                            <a:srgbClr val="D1D5DB"/>
-                          </a:solidFill>
-                          <a:latin typeface="Calibri"/>
-                        </a:defRPr>
-                      </a:pPr>
-                      <a:r>
-                        <a:t>Generate, extend, or style-match videos</a:t>
-                      </a:r>
-                    </a:p>
-                  </a:txBody>
-                  <a:tcPr>
-                    <a:solidFill>
-                      <a:srgbClr val="121224"/>
-                    </a:solidFill>
-                  </a:tcPr>
-                </a:tc>
-              </a:tr>
-              <a:tr h="411480">
-                <a:tc>
-                  <a:txBody>
-                    <a:bodyPr/>
-                    <a:lstStyle/>
-                    <a:p>
-                      <a:pPr>
-                        <a:defRPr sz="1200">
-                          <a:solidFill>
-                            <a:srgbClr val="D1D5DB"/>
-                          </a:solidFill>
-                          <a:latin typeface="Calibri"/>
-                        </a:defRPr>
-                      </a:pPr>
-                      <a:r>
-                        <a:t>Upscale</a:t>
-                      </a:r>
-                    </a:p>
-                  </a:txBody>
-                  <a:tcPr>
-                    <a:solidFill>
-                      <a:srgbClr val="121224"/>
-                    </a:solidFill>
-                  </a:tcPr>
-                </a:tc>
-                <a:tc>
-                  <a:txBody>
-                    <a:bodyPr/>
-                    <a:lstStyle/>
-                    <a:p>
-                      <a:pPr>
-                        <a:defRPr sz="1200">
-                          <a:solidFill>
-                            <a:srgbClr val="D1D5DB"/>
-                          </a:solidFill>
-                          <a:latin typeface="Calibri"/>
-                        </a:defRPr>
-                      </a:pPr>
-                      <a:r>
-                        <a:t>Image Upscaler, Video Upscaler</a:t>
-                      </a:r>
-                    </a:p>
-                  </a:txBody>
-                  <a:tcPr>
-                    <a:solidFill>
-                      <a:srgbClr val="121224"/>
-                    </a:solidFill>
-                  </a:tcPr>
-                </a:tc>
-                <a:tc>
-                  <a:txBody>
-                    <a:bodyPr/>
-                    <a:lstStyle/>
-                    <a:p>
-                      <a:pPr>
-                        <a:defRPr sz="1200">
-                          <a:solidFill>
-                            <a:srgbClr val="D1D5DB"/>
-                          </a:solidFill>
-                          <a:latin typeface="Calibri"/>
-                        </a:defRPr>
-                      </a:pPr>
-                      <a:r>
-                        <a:t>Enhance resolution up to 4K</a:t>
-                      </a:r>
-                    </a:p>
-                  </a:txBody>
-                  <a:tcPr>
-                    <a:solidFill>
-                      <a:srgbClr val="121224"/>
-                    </a:solidFill>
-                  </a:tcPr>
-                </a:tc>
-              </a:tr>
-              <a:tr h="411480">
-                <a:tc>
-                  <a:txBody>
-                    <a:bodyPr/>
-                    <a:lstStyle/>
-                    <a:p>
-                      <a:pPr>
-                        <a:defRPr sz="1200">
-                          <a:solidFill>
-                            <a:srgbClr val="D1D5DB"/>
-                          </a:solidFill>
-                          <a:latin typeface="Calibri"/>
-                        </a:defRPr>
-                      </a:pPr>
-                      <a:r>
-                        <a:t>Editor</a:t>
-                      </a:r>
-                    </a:p>
-                  </a:txBody>
-                  <a:tcPr>
-                    <a:solidFill>
-                      <a:srgbClr val="121224"/>
-                    </a:solidFill>
-                  </a:tcPr>
-                </a:tc>
-                <a:tc>
-                  <a:txBody>
-                    <a:bodyPr/>
-                    <a:lstStyle/>
-                    <a:p>
-                      <a:pPr>
-                        <a:defRPr sz="1200">
-                          <a:solidFill>
-                            <a:srgbClr val="D1D5DB"/>
-                          </a:solidFill>
-                          <a:latin typeface="Calibri"/>
-                        </a:defRPr>
-                      </a:pPr>
-                      <a:r>
-                        <a:t>Video Editor</a:t>
-                      </a:r>
-                    </a:p>
-                  </a:txBody>
-                  <a:tcPr>
-                    <a:solidFill>
-                      <a:srgbClr val="121224"/>
-                    </a:solidFill>
-                  </a:tcPr>
-                </a:tc>
-                <a:tc>
-                  <a:txBody>
-                    <a:bodyPr/>
-                    <a:lstStyle/>
-                    <a:p>
-                      <a:pPr>
-                        <a:defRPr sz="1200">
-                          <a:solidFill>
-                            <a:srgbClr val="D1D5DB"/>
-                          </a:solidFill>
-                          <a:latin typeface="Calibri"/>
-                        </a:defRPr>
-                      </a:pPr>
-                      <a:r>
-                        <a:t>Combine videos, audio, backgrounds with ffmpeg</a:t>
-                      </a:r>
-                    </a:p>
-                  </a:txBody>
-                  <a:tcPr>
-                    <a:solidFill>
-                      <a:srgbClr val="121224"/>
-                    </a:solidFill>
-                  </a:tcPr>
-                </a:tc>
-              </a:tr>
-              <a:tr h="411480">
-                <a:tc>
-                  <a:txBody>
-                    <a:bodyPr/>
-                    <a:lstStyle/>
-                    <a:p>
-                      <a:pPr>
-                        <a:defRPr sz="1200">
-                          <a:solidFill>
-                            <a:srgbClr val="D1D5DB"/>
-                          </a:solidFill>
-                          <a:latin typeface="Calibri"/>
-                        </a:defRPr>
-                      </a:pPr>
-                      <a:r>
-                        <a:t>Outputs</a:t>
-                      </a:r>
-                    </a:p>
-                  </a:txBody>
-                  <a:tcPr>
-                    <a:solidFill>
-                      <a:srgbClr val="121224"/>
-                    </a:solidFill>
-                  </a:tcPr>
-                </a:tc>
-                <a:tc>
-                  <a:txBody>
-                    <a:bodyPr/>
-                    <a:lstStyle/>
-                    <a:p>
-                      <a:pPr>
-                        <a:defRPr sz="1200">
-                          <a:solidFill>
-                            <a:srgbClr val="D1D5DB"/>
-                          </a:solidFill>
-                          <a:latin typeface="Calibri"/>
-                        </a:defRPr>
-                      </a:pPr>
-                      <a:r>
-                        <a:t>Text, Image, Audio, Video</a:t>
-                      </a:r>
-                    </a:p>
-                  </a:txBody>
-                  <a:tcPr>
-                    <a:solidFill>
-                      <a:srgbClr val="121224"/>
-                    </a:solidFill>
-                  </a:tcPr>
-                </a:tc>
-                <a:tc>
-                  <a:txBody>
-                    <a:bodyPr/>
-                    <a:lstStyle/>
-                    <a:p>
-                      <a:pPr>
-                        <a:defRPr sz="1200">
-                          <a:solidFill>
-                            <a:srgbClr val="D1D5DB"/>
-                          </a:solidFill>
-                          <a:latin typeface="Calibri"/>
-                        </a:defRPr>
-                      </a:pPr>
-                      <a:r>
-                        <a:t>Display and download results</a:t>
-                      </a:r>
-                    </a:p>
-                  </a:txBody>
-                  <a:tcPr>
-                    <a:solidFill>
-                      <a:srgbClr val="121224"/>
-                    </a:solidFill>
-                  </a:tcPr>
-                </a:tc>
-              </a:tr>
-            </a:tbl>
-          </a:graphicData>
-        </a:graphic>
-      </p:graphicFrame>
+        </p:nvSpPr>
+        <p:spPr>
+          <a:xfrm>
+            <a:off x="731520" y="1097280"/>
+            <a:ext cx="5486400" cy="457200"/>
+          </a:xfrm>
+          <a:prstGeom prst="rect">
+            <a:avLst/>
+          </a:prstGeom>
+          <a:noFill/>
+        </p:spPr>
+        <p:txBody>
+          <a:bodyPr wrap="square">
+            <a:spAutoFit/>
+          </a:bodyPr>
+          <a:lstStyle/>
+          <a:p>
+            <a:pPr algn="l">
+              <a:defRPr sz="1600" b="0">
+                <a:solidFill>
+                  <a:srgbClr val="9CA3AF"/>
+                </a:solidFill>
+                <a:latin typeface="Calibri"/>
+              </a:defRPr>
+            </a:pPr>
+            <a:r>
+              <a:t>Work on multiple workflows in parallel — never lose state</a:t>
+            </a:r>
+          </a:p>
+        </p:txBody>
+      </p:sp>
+      <p:sp>
+        <p:nvSpPr>
+          <p:cNvPr id="4" name="TextBox 3"/>
+          <p:cNvSpPr txBox="1"/>
+          <p:nvPr/>
+        </p:nvSpPr>
+        <p:spPr>
+          <a:xfrm>
+            <a:off x="731520" y="1828800"/>
+            <a:ext cx="5029200" cy="3657600"/>
+          </a:xfrm>
+          <a:prstGeom prst="rect">
+            <a:avLst/>
+          </a:prstGeom>
+          <a:noFill/>
+        </p:spPr>
+        <p:txBody>
+          <a:bodyPr wrap="square">
+            <a:spAutoFit/>
+          </a:bodyPr>
+          <a:lstStyle/>
+          <a:p>
+            <a:pPr>
+              <a:spcAft>
+                <a:spcPts val="800"/>
+              </a:spcAft>
+              <a:defRPr sz="1500">
+                <a:solidFill>
+                  <a:srgbClr val="FFFFFF"/>
+                </a:solidFill>
+                <a:latin typeface="Calibri"/>
+              </a:defRPr>
+            </a:pPr>
+            <a:r>
+              <a:t>"+ New" — Create new workflow tab</a:t>
+            </a:r>
+          </a:p>
+          <a:p>
+            <a:pPr>
+              <a:spcAft>
+                <a:spcPts val="800"/>
+              </a:spcAft>
+              <a:defRPr sz="1500">
+                <a:solidFill>
+                  <a:srgbClr val="FFFFFF"/>
+                </a:solidFill>
+                <a:latin typeface="Calibri"/>
+              </a:defRPr>
+            </a:pPr>
+            <a:r>
+              <a:t>Click any tab to switch instantly</a:t>
+            </a:r>
+          </a:p>
+          <a:p>
+            <a:pPr>
+              <a:spcAft>
+                <a:spcPts val="800"/>
+              </a:spcAft>
+              <a:defRPr sz="1500">
+                <a:solidFill>
+                  <a:srgbClr val="FFFFFF"/>
+                </a:solidFill>
+                <a:latin typeface="Calibri"/>
+              </a:defRPr>
+            </a:pPr>
+            <a:r>
+              <a:t>Double-click tab name to rename</a:t>
+            </a:r>
+          </a:p>
+          <a:p>
+            <a:pPr>
+              <a:spcAft>
+                <a:spcPts val="800"/>
+              </a:spcAft>
+              <a:defRPr sz="1500">
+                <a:solidFill>
+                  <a:srgbClr val="FFFFFF"/>
+                </a:solidFill>
+                <a:latin typeface="Calibri"/>
+              </a:defRPr>
+            </a:pPr>
+            <a:r>
+              <a:t>"x" closes a tab (can't close last)</a:t>
+            </a:r>
+          </a:p>
+          <a:p>
+            <a:pPr>
+              <a:spcAft>
+                <a:spcPts val="800"/>
+              </a:spcAft>
+              <a:defRPr sz="1500">
+                <a:solidFill>
+                  <a:srgbClr val="FFFFFF"/>
+                </a:solidFill>
+                <a:latin typeface="Calibri"/>
+              </a:defRPr>
+            </a:pPr>
+            <a:r>
+              <a:t>All tabs render simultaneously — switching never loses work</a:t>
+            </a:r>
+          </a:p>
+          <a:p>
+            <a:pPr>
+              <a:spcAft>
+                <a:spcPts val="800"/>
+              </a:spcAft>
+              <a:defRPr sz="1500">
+                <a:solidFill>
+                  <a:srgbClr val="FFFFFF"/>
+                </a:solidFill>
+                <a:latin typeface="Calibri"/>
+              </a:defRPr>
+            </a:pPr>
+            <a:r>
+              <a:t>Switch between Canvas/History/Studio tabs without losing edits</a:t>
+            </a:r>
+          </a:p>
+        </p:txBody>
+      </p:sp>
       <p:pic>
         <p:nvPicPr>
-          <p:cNvPr id="4" name="Picture 3" descr="02-toolbar-nodes.png"/>
+          <p:cNvPr id="5" name="Picture 4" descr="02-workflow-tabs.png"/>
           <p:cNvPicPr>
             <a:picLocks noChangeAspect="1"/>
           </p:cNvPicPr>
@@ -6411,8 +6030,8 @@
         </p:blipFill>
         <p:spPr>
           <a:xfrm>
-            <a:off x="8686800" y="1188720"/>
-            <a:ext cx="3017520" cy="4240839"/>
+            <a:off x="6400800" y="2286000"/>
+            <a:ext cx="5303520" cy="397764"/>
           </a:xfrm>
           <a:prstGeom prst="rect">
             <a:avLst/>
@@ -6476,245 +6095,556 @@
               </a:defRPr>
             </a:pPr>
             <a:r>
-              <a:t>How It Works</a:t>
-            </a:r>
-          </a:p>
-        </p:txBody>
-      </p:sp>
-      <p:sp>
-        <p:nvSpPr>
-          <p:cNvPr id="3" name="TextBox 2"/>
-          <p:cNvSpPr txBox="1"/>
+              <a:t>Node Types</a:t>
+            </a:r>
+          </a:p>
+        </p:txBody>
+      </p:sp>
+      <p:graphicFrame>
+        <p:nvGraphicFramePr>
+          <p:cNvPr id="3" name="Table 2"/>
+          <p:cNvGraphicFramePr>
+            <a:graphicFrameLocks noGrp="1"/>
+          </p:cNvGraphicFramePr>
           <p:nvPr/>
-        </p:nvSpPr>
-        <p:spPr>
-          <a:xfrm>
-            <a:off x="731520" y="1371600"/>
-            <a:ext cx="5029200" cy="3200400"/>
-          </a:xfrm>
-          <a:prstGeom prst="rect">
-            <a:avLst/>
-          </a:prstGeom>
-          <a:noFill/>
-        </p:spPr>
-        <p:txBody>
-          <a:bodyPr wrap="square">
-            <a:spAutoFit/>
-          </a:bodyPr>
-          <a:lstStyle/>
-          <a:p>
-            <a:pPr>
-              <a:spcAft>
-                <a:spcPts val="800"/>
-              </a:spcAft>
-              <a:defRPr sz="1700">
-                <a:solidFill>
-                  <a:srgbClr val="FFFFFF"/>
-                </a:solidFill>
-                <a:latin typeface="Calibri"/>
-              </a:defRPr>
-            </a:pPr>
-            <a:r>
-              <a:t>1. Build — Drag nodes onto canvas, connect with edges</a:t>
-            </a:r>
-          </a:p>
-          <a:p>
-            <a:pPr>
-              <a:spcAft>
-                <a:spcPts val="800"/>
-              </a:spcAft>
-              <a:defRPr sz="1700">
-                <a:solidFill>
-                  <a:srgbClr val="FFFFFF"/>
-                </a:solidFill>
-                <a:latin typeface="Calibri"/>
-              </a:defRPr>
-            </a:pPr>
-            <a:r>
-              <a:t>2. Configure — Set model, voice, language, aspect ratio per node</a:t>
-            </a:r>
-          </a:p>
-          <a:p>
-            <a:pPr>
-              <a:spcAft>
-                <a:spcPts val="800"/>
-              </a:spcAft>
-              <a:defRPr sz="1700">
-                <a:solidFill>
-                  <a:srgbClr val="FFFFFF"/>
-                </a:solidFill>
-                <a:latin typeface="Calibri"/>
-              </a:defRPr>
-            </a:pPr>
-            <a:r>
-              <a:t>3. Run — Click Run, nodes execute in topological order</a:t>
-            </a:r>
-          </a:p>
-          <a:p>
-            <a:pPr>
-              <a:spcAft>
-                <a:spcPts val="800"/>
-              </a:spcAft>
-              <a:defRPr sz="1700">
-                <a:solidFill>
-                  <a:srgbClr val="FFFFFF"/>
-                </a:solidFill>
-                <a:latin typeface="Calibri"/>
-              </a:defRPr>
-            </a:pPr>
-            <a:r>
-              <a:t>4. Stream — Results appear in real-time via Server-Sent Events</a:t>
-            </a:r>
-          </a:p>
-          <a:p>
-            <a:pPr>
-              <a:spcAft>
-                <a:spcPts val="800"/>
-              </a:spcAft>
-              <a:defRPr sz="1700">
-                <a:solidFill>
-                  <a:srgbClr val="FFFFFF"/>
-                </a:solidFill>
-                <a:latin typeface="Calibri"/>
-              </a:defRPr>
-            </a:pPr>
-            <a:r>
-              <a:t>5. Save — Generated media auto-saved to Asset Library</a:t>
-            </a:r>
-          </a:p>
-        </p:txBody>
-      </p:sp>
-      <p:sp>
-        <p:nvSpPr>
-          <p:cNvPr id="4" name="TextBox 3"/>
-          <p:cNvSpPr txBox="1"/>
-          <p:nvPr/>
-        </p:nvSpPr>
-        <p:spPr>
-          <a:xfrm>
-            <a:off x="731520" y="4572000"/>
-            <a:ext cx="5029200" cy="457200"/>
-          </a:xfrm>
-          <a:prstGeom prst="rect">
-            <a:avLst/>
-          </a:prstGeom>
-          <a:noFill/>
-        </p:spPr>
-        <p:txBody>
-          <a:bodyPr wrap="square">
-            <a:spAutoFit/>
-          </a:bodyPr>
-          <a:lstStyle/>
-          <a:p>
-            <a:pPr algn="l">
-              <a:defRPr sz="1800" b="1">
-                <a:solidFill>
-                  <a:srgbClr val="FBBF24"/>
-                </a:solidFill>
-                <a:latin typeface="Calibri"/>
-              </a:defRPr>
-            </a:pPr>
-            <a:r>
-              <a:t>Smart Error Handling:</a:t>
-            </a:r>
-          </a:p>
-        </p:txBody>
-      </p:sp>
-      <p:sp>
-        <p:nvSpPr>
-          <p:cNvPr id="5" name="TextBox 4"/>
-          <p:cNvSpPr txBox="1"/>
-          <p:nvPr/>
-        </p:nvSpPr>
-        <p:spPr>
-          <a:xfrm>
-            <a:off x="731520" y="5029200"/>
-            <a:ext cx="5029200" cy="1371600"/>
-          </a:xfrm>
-          <a:prstGeom prst="rect">
-            <a:avLst/>
-          </a:prstGeom>
-          <a:noFill/>
-        </p:spPr>
-        <p:txBody>
-          <a:bodyPr wrap="square">
-            <a:spAutoFit/>
-          </a:bodyPr>
-          <a:lstStyle/>
-          <a:p>
-            <a:pPr>
-              <a:spcAft>
-                <a:spcPts val="800"/>
-              </a:spcAft>
-              <a:defRPr sz="1400">
-                <a:solidFill>
-                  <a:srgbClr val="9CA3AF"/>
-                </a:solidFill>
-                <a:latin typeface="Calibri"/>
-              </a:defRPr>
-            </a:pPr>
-            <a:r>
-              <a:t>Failed nodes show red status badge</a:t>
-            </a:r>
-          </a:p>
-          <a:p>
-            <a:pPr>
-              <a:spcAft>
-                <a:spcPts val="800"/>
-              </a:spcAft>
-              <a:defRPr sz="1400">
-                <a:solidFill>
-                  <a:srgbClr val="9CA3AF"/>
-                </a:solidFill>
-                <a:latin typeface="Calibri"/>
-              </a:defRPr>
-            </a:pPr>
-            <a:r>
-              <a:t>Downstream nodes automatically skipped</a:t>
-            </a:r>
-          </a:p>
-          <a:p>
-            <a:pPr>
-              <a:spcAft>
-                <a:spcPts val="800"/>
-              </a:spcAft>
-              <a:defRPr sz="1400">
-                <a:solidFill>
-                  <a:srgbClr val="9CA3AF"/>
-                </a:solidFill>
-                <a:latin typeface="Calibri"/>
-              </a:defRPr>
-            </a:pPr>
-            <a:r>
-              <a:t>Clear error messages at point of failure</a:t>
-            </a:r>
-          </a:p>
-        </p:txBody>
-      </p:sp>
-      <p:pic>
-        <p:nvPicPr>
-          <p:cNvPr id="6" name="Picture 5" descr="06-canvas-full.png"/>
-          <p:cNvPicPr>
-            <a:picLocks noChangeAspect="1"/>
-          </p:cNvPicPr>
-          <p:nvPr/>
-        </p:nvPicPr>
-        <p:blipFill>
-          <a:blip r:embed="rId2"/>
-          <a:stretch>
-            <a:fillRect/>
-          </a:stretch>
-        </p:blipFill>
-        <p:spPr>
-          <a:xfrm>
-            <a:off x="6400800" y="1188720"/>
-            <a:ext cx="5303520" cy="3409406"/>
-          </a:xfrm>
-          <a:prstGeom prst="rect">
-            <a:avLst/>
-          </a:prstGeom>
-        </p:spPr>
-      </p:pic>
+        </p:nvGraphicFramePr>
+        <p:xfrm>
+          <a:off x="731520" y="1188720"/>
+          <a:ext cx="10515600" cy="2688336"/>
+        </p:xfrm>
+        <a:graphic>
+          <a:graphicData uri="http://schemas.openxmlformats.org/drawingml/2006/table">
+            <a:tbl>
+              <a:tblPr firstRow="1" bandRow="1">
+                <a:tableStyleId>{5C22544A-7EE6-4342-B048-85BDC9FD1C3A}</a:tableStyleId>
+              </a:tblPr>
+              <a:tblGrid>
+                <a:gridCol w="3505200"/>
+                <a:gridCol w="3505200"/>
+                <a:gridCol w="3505200"/>
+              </a:tblGrid>
+              <a:tr h="384048">
+                <a:tc>
+                  <a:txBody>
+                    <a:bodyPr/>
+                    <a:lstStyle/>
+                    <a:p>
+                      <a:pPr>
+                        <a:defRPr sz="1100" b="1">
+                          <a:solidFill>
+                            <a:srgbClr val="FFFFFF"/>
+                          </a:solidFill>
+                          <a:latin typeface="Calibri"/>
+                        </a:defRPr>
+                      </a:pPr>
+                      <a:r>
+                        <a:t>Category</a:t>
+                      </a:r>
+                    </a:p>
+                  </a:txBody>
+                  <a:tcPr>
+                    <a:solidFill>
+                      <a:srgbClr val="1F1F3A"/>
+                    </a:solidFill>
+                  </a:tcPr>
+                </a:tc>
+                <a:tc>
+                  <a:txBody>
+                    <a:bodyPr/>
+                    <a:lstStyle/>
+                    <a:p>
+                      <a:pPr>
+                        <a:defRPr sz="1100" b="1">
+                          <a:solidFill>
+                            <a:srgbClr val="FFFFFF"/>
+                          </a:solidFill>
+                          <a:latin typeface="Calibri"/>
+                        </a:defRPr>
+                      </a:pPr>
+                      <a:r>
+                        <a:t>Nodes</a:t>
+                      </a:r>
+                    </a:p>
+                  </a:txBody>
+                  <a:tcPr>
+                    <a:solidFill>
+                      <a:srgbClr val="1F1F3A"/>
+                    </a:solidFill>
+                  </a:tcPr>
+                </a:tc>
+                <a:tc>
+                  <a:txBody>
+                    <a:bodyPr/>
+                    <a:lstStyle/>
+                    <a:p>
+                      <a:pPr>
+                        <a:defRPr sz="1100" b="1">
+                          <a:solidFill>
+                            <a:srgbClr val="FFFFFF"/>
+                          </a:solidFill>
+                          <a:latin typeface="Calibri"/>
+                        </a:defRPr>
+                      </a:pPr>
+                      <a:r>
+                        <a:t>Capabilities</a:t>
+                      </a:r>
+                    </a:p>
+                  </a:txBody>
+                  <a:tcPr>
+                    <a:solidFill>
+                      <a:srgbClr val="1F1F3A"/>
+                    </a:solidFill>
+                  </a:tcPr>
+                </a:tc>
+              </a:tr>
+              <a:tr h="384048">
+                <a:tc>
+                  <a:txBody>
+                    <a:bodyPr/>
+                    <a:lstStyle/>
+                    <a:p>
+                      <a:pPr>
+                        <a:defRPr sz="1100">
+                          <a:solidFill>
+                            <a:srgbClr val="D1D5DB"/>
+                          </a:solidFill>
+                          <a:latin typeface="Calibri"/>
+                        </a:defRPr>
+                      </a:pPr>
+                      <a:r>
+                        <a:t>Inputs</a:t>
+                      </a:r>
+                    </a:p>
+                  </a:txBody>
+                  <a:tcPr>
+                    <a:solidFill>
+                      <a:srgbClr val="121224"/>
+                    </a:solidFill>
+                  </a:tcPr>
+                </a:tc>
+                <a:tc>
+                  <a:txBody>
+                    <a:bodyPr/>
+                    <a:lstStyle/>
+                    <a:p>
+                      <a:pPr>
+                        <a:defRPr sz="1100">
+                          <a:solidFill>
+                            <a:srgbClr val="D1D5DB"/>
+                          </a:solidFill>
+                          <a:latin typeface="Calibri"/>
+                        </a:defRPr>
+                      </a:pPr>
+                      <a:r>
+                        <a:t>Text, Image, Video, Audio</a:t>
+                      </a:r>
+                    </a:p>
+                  </a:txBody>
+                  <a:tcPr>
+                    <a:solidFill>
+                      <a:srgbClr val="121224"/>
+                    </a:solidFill>
+                  </a:tcPr>
+                </a:tc>
+                <a:tc>
+                  <a:txBody>
+                    <a:bodyPr/>
+                    <a:lstStyle/>
+                    <a:p>
+                      <a:pPr>
+                        <a:defRPr sz="1100">
+                          <a:solidFill>
+                            <a:srgbClr val="D1D5DB"/>
+                          </a:solidFill>
+                          <a:latin typeface="Calibri"/>
+                        </a:defRPr>
+                      </a:pPr>
+                      <a:r>
+                        <a:t>Upload or type content. Video auto-uploads to GCS</a:t>
+                      </a:r>
+                    </a:p>
+                  </a:txBody>
+                  <a:tcPr>
+                    <a:solidFill>
+                      <a:srgbClr val="121224"/>
+                    </a:solidFill>
+                  </a:tcPr>
+                </a:tc>
+              </a:tr>
+              <a:tr h="384048">
+                <a:tc>
+                  <a:txBody>
+                    <a:bodyPr/>
+                    <a:lstStyle/>
+                    <a:p>
+                      <a:pPr>
+                        <a:defRPr sz="1100">
+                          <a:solidFill>
+                            <a:srgbClr val="D1D5DB"/>
+                          </a:solidFill>
+                          <a:latin typeface="Calibri"/>
+                        </a:defRPr>
+                      </a:pPr>
+                      <a:r>
+                        <a:t>Gemini</a:t>
+                      </a:r>
+                    </a:p>
+                  </a:txBody>
+                  <a:tcPr>
+                    <a:solidFill>
+                      <a:srgbClr val="121224"/>
+                    </a:solidFill>
+                  </a:tcPr>
+                </a:tc>
+                <a:tc>
+                  <a:txBody>
+                    <a:bodyPr/>
+                    <a:lstStyle/>
+                    <a:p>
+                      <a:pPr>
+                        <a:defRPr sz="1100">
+                          <a:solidFill>
+                            <a:srgbClr val="D1D5DB"/>
+                          </a:solidFill>
+                          <a:latin typeface="Calibri"/>
+                        </a:defRPr>
+                      </a:pPr>
+                      <a:r>
+                        <a:t>Text, Image</a:t>
+                      </a:r>
+                    </a:p>
+                  </a:txBody>
+                  <a:tcPr>
+                    <a:solidFill>
+                      <a:srgbClr val="121224"/>
+                    </a:solidFill>
+                  </a:tcPr>
+                </a:tc>
+                <a:tc>
+                  <a:txBody>
+                    <a:bodyPr/>
+                    <a:lstStyle/>
+                    <a:p>
+                      <a:pPr>
+                        <a:defRPr sz="1100">
+                          <a:solidFill>
+                            <a:srgbClr val="D1D5DB"/>
+                          </a:solidFill>
+                          <a:latin typeface="Calibri"/>
+                        </a:defRPr>
+                      </a:pPr>
+                      <a:r>
+                        <a:t>Multimodal text generation, image generation</a:t>
+                      </a:r>
+                    </a:p>
+                  </a:txBody>
+                  <a:tcPr>
+                    <a:solidFill>
+                      <a:srgbClr val="121224"/>
+                    </a:solidFill>
+                  </a:tcPr>
+                </a:tc>
+              </a:tr>
+              <a:tr h="384048">
+                <a:tc>
+                  <a:txBody>
+                    <a:bodyPr/>
+                    <a:lstStyle/>
+                    <a:p>
+                      <a:pPr>
+                        <a:defRPr sz="1100">
+                          <a:solidFill>
+                            <a:srgbClr val="D1D5DB"/>
+                          </a:solidFill>
+                          <a:latin typeface="Calibri"/>
+                        </a:defRPr>
+                      </a:pPr>
+                      <a:r>
+                        <a:t>Voice &amp; Music</a:t>
+                      </a:r>
+                    </a:p>
+                  </a:txBody>
+                  <a:tcPr>
+                    <a:solidFill>
+                      <a:srgbClr val="121224"/>
+                    </a:solidFill>
+                  </a:tcPr>
+                </a:tc>
+                <a:tc>
+                  <a:txBody>
+                    <a:bodyPr/>
+                    <a:lstStyle/>
+                    <a:p>
+                      <a:pPr>
+                        <a:defRPr sz="1100">
+                          <a:solidFill>
+                            <a:srgbClr val="D1D5DB"/>
+                          </a:solidFill>
+                          <a:latin typeface="Calibri"/>
+                        </a:defRPr>
+                      </a:pPr>
+                      <a:r>
+                        <a:t>Speech Gen, Lyria Clip, Lyria Pro</a:t>
+                      </a:r>
+                    </a:p>
+                  </a:txBody>
+                  <a:tcPr>
+                    <a:solidFill>
+                      <a:srgbClr val="121224"/>
+                    </a:solidFill>
+                  </a:tcPr>
+                </a:tc>
+                <a:tc>
+                  <a:txBody>
+                    <a:bodyPr/>
+                    <a:lstStyle/>
+                    <a:p>
+                      <a:pPr>
+                        <a:defRPr sz="1100">
+                          <a:solidFill>
+                            <a:srgbClr val="D1D5DB"/>
+                          </a:solidFill>
+                          <a:latin typeface="Calibri"/>
+                        </a:defRPr>
+                      </a:pPr>
+                      <a:r>
+                        <a:t>TTS (23 langs, 7 voices), 30s clips, full songs</a:t>
+                      </a:r>
+                    </a:p>
+                  </a:txBody>
+                  <a:tcPr>
+                    <a:solidFill>
+                      <a:srgbClr val="121224"/>
+                    </a:solidFill>
+                  </a:tcPr>
+                </a:tc>
+              </a:tr>
+              <a:tr h="384048">
+                <a:tc>
+                  <a:txBody>
+                    <a:bodyPr/>
+                    <a:lstStyle/>
+                    <a:p>
+                      <a:pPr>
+                        <a:defRPr sz="1100">
+                          <a:solidFill>
+                            <a:srgbClr val="D1D5DB"/>
+                          </a:solidFill>
+                          <a:latin typeface="Calibri"/>
+                        </a:defRPr>
+                      </a:pPr>
+                      <a:r>
+                        <a:t>Video</a:t>
+                      </a:r>
+                    </a:p>
+                  </a:txBody>
+                  <a:tcPr>
+                    <a:solidFill>
+                      <a:srgbClr val="121224"/>
+                    </a:solidFill>
+                  </a:tcPr>
+                </a:tc>
+                <a:tc>
+                  <a:txBody>
+                    <a:bodyPr/>
+                    <a:lstStyle/>
+                    <a:p>
+                      <a:pPr>
+                        <a:defRPr sz="1100">
+                          <a:solidFill>
+                            <a:srgbClr val="D1D5DB"/>
+                          </a:solidFill>
+                          <a:latin typeface="Calibri"/>
+                        </a:defRPr>
+                      </a:pPr>
+                      <a:r>
+                        <a:t>Veo Standard, Extend, Reference, Upscaler</a:t>
+                      </a:r>
+                    </a:p>
+                  </a:txBody>
+                  <a:tcPr>
+                    <a:solidFill>
+                      <a:srgbClr val="121224"/>
+                    </a:solidFill>
+                  </a:tcPr>
+                </a:tc>
+                <a:tc>
+                  <a:txBody>
+                    <a:bodyPr/>
+                    <a:lstStyle/>
+                    <a:p>
+                      <a:pPr>
+                        <a:defRPr sz="1100">
+                          <a:solidFill>
+                            <a:srgbClr val="D1D5DB"/>
+                          </a:solidFill>
+                          <a:latin typeface="Calibri"/>
+                        </a:defRPr>
+                      </a:pPr>
+                      <a:r>
+                        <a:t>Generate, extend, style-match, 4K upscale</a:t>
+                      </a:r>
+                    </a:p>
+                  </a:txBody>
+                  <a:tcPr>
+                    <a:solidFill>
+                      <a:srgbClr val="121224"/>
+                    </a:solidFill>
+                  </a:tcPr>
+                </a:tc>
+              </a:tr>
+              <a:tr h="384048">
+                <a:tc>
+                  <a:txBody>
+                    <a:bodyPr/>
+                    <a:lstStyle/>
+                    <a:p>
+                      <a:pPr>
+                        <a:defRPr sz="1100">
+                          <a:solidFill>
+                            <a:srgbClr val="D1D5DB"/>
+                          </a:solidFill>
+                          <a:latin typeface="Calibri"/>
+                        </a:defRPr>
+                      </a:pPr>
+                      <a:r>
+                        <a:t>Utility</a:t>
+                      </a:r>
+                    </a:p>
+                  </a:txBody>
+                  <a:tcPr>
+                    <a:solidFill>
+                      <a:srgbClr val="121224"/>
+                    </a:solidFill>
+                  </a:tcPr>
+                </a:tc>
+                <a:tc>
+                  <a:txBody>
+                    <a:bodyPr/>
+                    <a:lstStyle/>
+                    <a:p>
+                      <a:pPr>
+                        <a:defRPr sz="1100">
+                          <a:solidFill>
+                            <a:srgbClr val="D1D5DB"/>
+                          </a:solidFill>
+                          <a:latin typeface="Calibri"/>
+                        </a:defRPr>
+                      </a:pPr>
+                      <a:r>
+                        <a:t>Image Upscaler, Video Editor</a:t>
+                      </a:r>
+                    </a:p>
+                  </a:txBody>
+                  <a:tcPr>
+                    <a:solidFill>
+                      <a:srgbClr val="121224"/>
+                    </a:solidFill>
+                  </a:tcPr>
+                </a:tc>
+                <a:tc>
+                  <a:txBody>
+                    <a:bodyPr/>
+                    <a:lstStyle/>
+                    <a:p>
+                      <a:pPr>
+                        <a:defRPr sz="1100">
+                          <a:solidFill>
+                            <a:srgbClr val="D1D5DB"/>
+                          </a:solidFill>
+                          <a:latin typeface="Calibri"/>
+                        </a:defRPr>
+                      </a:pPr>
+                      <a:r>
+                        <a:t>Image enhance, ffmpeg video composition</a:t>
+                      </a:r>
+                    </a:p>
+                  </a:txBody>
+                  <a:tcPr>
+                    <a:solidFill>
+                      <a:srgbClr val="121224"/>
+                    </a:solidFill>
+                  </a:tcPr>
+                </a:tc>
+              </a:tr>
+              <a:tr h="384048">
+                <a:tc>
+                  <a:txBody>
+                    <a:bodyPr/>
+                    <a:lstStyle/>
+                    <a:p>
+                      <a:pPr>
+                        <a:defRPr sz="1100">
+                          <a:solidFill>
+                            <a:srgbClr val="D1D5DB"/>
+                          </a:solidFill>
+                          <a:latin typeface="Calibri"/>
+                        </a:defRPr>
+                      </a:pPr>
+                      <a:r>
+                        <a:t>Outputs</a:t>
+                      </a:r>
+                    </a:p>
+                  </a:txBody>
+                  <a:tcPr>
+                    <a:solidFill>
+                      <a:srgbClr val="121224"/>
+                    </a:solidFill>
+                  </a:tcPr>
+                </a:tc>
+                <a:tc>
+                  <a:txBody>
+                    <a:bodyPr/>
+                    <a:lstStyle/>
+                    <a:p>
+                      <a:pPr>
+                        <a:defRPr sz="1100">
+                          <a:solidFill>
+                            <a:srgbClr val="D1D5DB"/>
+                          </a:solidFill>
+                          <a:latin typeface="Calibri"/>
+                        </a:defRPr>
+                      </a:pPr>
+                      <a:r>
+                        <a:t>Text, Image, Audio, Video</a:t>
+                      </a:r>
+                    </a:p>
+                  </a:txBody>
+                  <a:tcPr>
+                    <a:solidFill>
+                      <a:srgbClr val="121224"/>
+                    </a:solidFill>
+                  </a:tcPr>
+                </a:tc>
+                <a:tc>
+                  <a:txBody>
+                    <a:bodyPr/>
+                    <a:lstStyle/>
+                    <a:p>
+                      <a:pPr>
+                        <a:defRPr sz="1100">
+                          <a:solidFill>
+                            <a:srgbClr val="D1D5DB"/>
+                          </a:solidFill>
+                          <a:latin typeface="Calibri"/>
+                        </a:defRPr>
+                      </a:pPr>
+                      <a:r>
+                        <a:t>Display and download results</a:t>
+                      </a:r>
+                    </a:p>
+                  </a:txBody>
+                  <a:tcPr>
+                    <a:solidFill>
+                      <a:srgbClr val="121224"/>
+                    </a:solidFill>
+                  </a:tcPr>
+                </a:tc>
+              </a:tr>
+            </a:tbl>
+          </a:graphicData>
+        </a:graphic>
+      </p:graphicFrame>
     </p:spTree>
   </p:cSld>
   <p:clrMapOvr>
@@ -6772,21 +6702,566 @@
               </a:defRPr>
             </a:pPr>
             <a:r>
-              <a:t>Workflow Tabs</a:t>
-            </a:r>
-          </a:p>
-        </p:txBody>
-      </p:sp>
-      <p:sp>
-        <p:nvSpPr>
-          <p:cNvPr id="3" name="TextBox 2"/>
+              <a:t>Supported AI Models</a:t>
+            </a:r>
+          </a:p>
+        </p:txBody>
+      </p:sp>
+      <p:graphicFrame>
+        <p:nvGraphicFramePr>
+          <p:cNvPr id="3" name="Table 2"/>
+          <p:cNvGraphicFramePr>
+            <a:graphicFrameLocks noGrp="1"/>
+          </p:cNvGraphicFramePr>
+          <p:nvPr/>
+        </p:nvGraphicFramePr>
+        <p:xfrm>
+          <a:off x="731520" y="1188720"/>
+          <a:ext cx="10515600" cy="2688336"/>
+        </p:xfrm>
+        <a:graphic>
+          <a:graphicData uri="http://schemas.openxmlformats.org/drawingml/2006/table">
+            <a:tbl>
+              <a:tblPr firstRow="1" bandRow="1">
+                <a:tableStyleId>{5C22544A-7EE6-4342-B048-85BDC9FD1C3A}</a:tableStyleId>
+              </a:tblPr>
+              <a:tblGrid>
+                <a:gridCol w="3505200"/>
+                <a:gridCol w="3505200"/>
+                <a:gridCol w="3505200"/>
+              </a:tblGrid>
+              <a:tr h="384048">
+                <a:tc>
+                  <a:txBody>
+                    <a:bodyPr/>
+                    <a:lstStyle/>
+                    <a:p>
+                      <a:pPr>
+                        <a:defRPr sz="1100" b="1">
+                          <a:solidFill>
+                            <a:srgbClr val="FFFFFF"/>
+                          </a:solidFill>
+                          <a:latin typeface="Calibri"/>
+                        </a:defRPr>
+                      </a:pPr>
+                      <a:r>
+                        <a:t>Capability</a:t>
+                      </a:r>
+                    </a:p>
+                  </a:txBody>
+                  <a:tcPr>
+                    <a:solidFill>
+                      <a:srgbClr val="1F1F3A"/>
+                    </a:solidFill>
+                  </a:tcPr>
+                </a:tc>
+                <a:tc>
+                  <a:txBody>
+                    <a:bodyPr/>
+                    <a:lstStyle/>
+                    <a:p>
+                      <a:pPr>
+                        <a:defRPr sz="1100" b="1">
+                          <a:solidFill>
+                            <a:srgbClr val="FFFFFF"/>
+                          </a:solidFill>
+                          <a:latin typeface="Calibri"/>
+                        </a:defRPr>
+                      </a:pPr>
+                      <a:r>
+                        <a:t>Models</a:t>
+                      </a:r>
+                    </a:p>
+                  </a:txBody>
+                  <a:tcPr>
+                    <a:solidFill>
+                      <a:srgbClr val="1F1F3A"/>
+                    </a:solidFill>
+                  </a:tcPr>
+                </a:tc>
+                <a:tc>
+                  <a:txBody>
+                    <a:bodyPr/>
+                    <a:lstStyle/>
+                    <a:p>
+                      <a:pPr>
+                        <a:defRPr sz="1100" b="1">
+                          <a:solidFill>
+                            <a:srgbClr val="FFFFFF"/>
+                          </a:solidFill>
+                          <a:latin typeface="Calibri"/>
+                        </a:defRPr>
+                      </a:pPr>
+                      <a:r>
+                        <a:t>Default</a:t>
+                      </a:r>
+                    </a:p>
+                  </a:txBody>
+                  <a:tcPr>
+                    <a:solidFill>
+                      <a:srgbClr val="1F1F3A"/>
+                    </a:solidFill>
+                  </a:tcPr>
+                </a:tc>
+              </a:tr>
+              <a:tr h="384048">
+                <a:tc>
+                  <a:txBody>
+                    <a:bodyPr/>
+                    <a:lstStyle/>
+                    <a:p>
+                      <a:pPr>
+                        <a:defRPr sz="1100">
+                          <a:solidFill>
+                            <a:srgbClr val="D1D5DB"/>
+                          </a:solidFill>
+                          <a:latin typeface="Calibri"/>
+                        </a:defRPr>
+                      </a:pPr>
+                      <a:r>
+                        <a:t>Text</a:t>
+                      </a:r>
+                    </a:p>
+                  </a:txBody>
+                  <a:tcPr>
+                    <a:solidFill>
+                      <a:srgbClr val="121224"/>
+                    </a:solidFill>
+                  </a:tcPr>
+                </a:tc>
+                <a:tc>
+                  <a:txBody>
+                    <a:bodyPr/>
+                    <a:lstStyle/>
+                    <a:p>
+                      <a:pPr>
+                        <a:defRPr sz="1100">
+                          <a:solidFill>
+                            <a:srgbClr val="D1D5DB"/>
+                          </a:solidFill>
+                          <a:latin typeface="Calibri"/>
+                        </a:defRPr>
+                      </a:pPr>
+                      <a:r>
+                        <a:t>gemini-3.1-pro-preview, gemini-3.1-flash-lite-preview</a:t>
+                      </a:r>
+                    </a:p>
+                  </a:txBody>
+                  <a:tcPr>
+                    <a:solidFill>
+                      <a:srgbClr val="121224"/>
+                    </a:solidFill>
+                  </a:tcPr>
+                </a:tc>
+                <a:tc>
+                  <a:txBody>
+                    <a:bodyPr/>
+                    <a:lstStyle/>
+                    <a:p>
+                      <a:pPr>
+                        <a:defRPr sz="1100">
+                          <a:solidFill>
+                            <a:srgbClr val="D1D5DB"/>
+                          </a:solidFill>
+                          <a:latin typeface="Calibri"/>
+                        </a:defRPr>
+                      </a:pPr>
+                      <a:r>
+                        <a:t>flash-lite</a:t>
+                      </a:r>
+                    </a:p>
+                  </a:txBody>
+                  <a:tcPr>
+                    <a:solidFill>
+                      <a:srgbClr val="121224"/>
+                    </a:solidFill>
+                  </a:tcPr>
+                </a:tc>
+              </a:tr>
+              <a:tr h="384048">
+                <a:tc>
+                  <a:txBody>
+                    <a:bodyPr/>
+                    <a:lstStyle/>
+                    <a:p>
+                      <a:pPr>
+                        <a:defRPr sz="1100">
+                          <a:solidFill>
+                            <a:srgbClr val="D1D5DB"/>
+                          </a:solidFill>
+                          <a:latin typeface="Calibri"/>
+                        </a:defRPr>
+                      </a:pPr>
+                      <a:r>
+                        <a:t>Image</a:t>
+                      </a:r>
+                    </a:p>
+                  </a:txBody>
+                  <a:tcPr>
+                    <a:solidFill>
+                      <a:srgbClr val="121224"/>
+                    </a:solidFill>
+                  </a:tcPr>
+                </a:tc>
+                <a:tc>
+                  <a:txBody>
+                    <a:bodyPr/>
+                    <a:lstStyle/>
+                    <a:p>
+                      <a:pPr>
+                        <a:defRPr sz="1100">
+                          <a:solidFill>
+                            <a:srgbClr val="D1D5DB"/>
+                          </a:solidFill>
+                          <a:latin typeface="Calibri"/>
+                        </a:defRPr>
+                      </a:pPr>
+                      <a:r>
+                        <a:t>gemini-3.1-flash-image-preview, gemini-2.5-flash-image</a:t>
+                      </a:r>
+                    </a:p>
+                  </a:txBody>
+                  <a:tcPr>
+                    <a:solidFill>
+                      <a:srgbClr val="121224"/>
+                    </a:solidFill>
+                  </a:tcPr>
+                </a:tc>
+                <a:tc>
+                  <a:txBody>
+                    <a:bodyPr/>
+                    <a:lstStyle/>
+                    <a:p>
+                      <a:pPr>
+                        <a:defRPr sz="1100">
+                          <a:solidFill>
+                            <a:srgbClr val="D1D5DB"/>
+                          </a:solidFill>
+                          <a:latin typeface="Calibri"/>
+                        </a:defRPr>
+                      </a:pPr>
+                      <a:r>
+                        <a:t>flash-image</a:t>
+                      </a:r>
+                    </a:p>
+                  </a:txBody>
+                  <a:tcPr>
+                    <a:solidFill>
+                      <a:srgbClr val="121224"/>
+                    </a:solidFill>
+                  </a:tcPr>
+                </a:tc>
+              </a:tr>
+              <a:tr h="384048">
+                <a:tc>
+                  <a:txBody>
+                    <a:bodyPr/>
+                    <a:lstStyle/>
+                    <a:p>
+                      <a:pPr>
+                        <a:defRPr sz="1100">
+                          <a:solidFill>
+                            <a:srgbClr val="D1D5DB"/>
+                          </a:solidFill>
+                          <a:latin typeface="Calibri"/>
+                        </a:defRPr>
+                      </a:pPr>
+                      <a:r>
+                        <a:t>Video</a:t>
+                      </a:r>
+                    </a:p>
+                  </a:txBody>
+                  <a:tcPr>
+                    <a:solidFill>
+                      <a:srgbClr val="121224"/>
+                    </a:solidFill>
+                  </a:tcPr>
+                </a:tc>
+                <a:tc>
+                  <a:txBody>
+                    <a:bodyPr/>
+                    <a:lstStyle/>
+                    <a:p>
+                      <a:pPr>
+                        <a:defRPr sz="1100">
+                          <a:solidFill>
+                            <a:srgbClr val="D1D5DB"/>
+                          </a:solidFill>
+                          <a:latin typeface="Calibri"/>
+                        </a:defRPr>
+                      </a:pPr>
+                      <a:r>
+                        <a:t>veo-3.1-generate-001, fast-generate-001, lite-generate-001</a:t>
+                      </a:r>
+                    </a:p>
+                  </a:txBody>
+                  <a:tcPr>
+                    <a:solidFill>
+                      <a:srgbClr val="121224"/>
+                    </a:solidFill>
+                  </a:tcPr>
+                </a:tc>
+                <a:tc>
+                  <a:txBody>
+                    <a:bodyPr/>
+                    <a:lstStyle/>
+                    <a:p>
+                      <a:pPr>
+                        <a:defRPr sz="1100">
+                          <a:solidFill>
+                            <a:srgbClr val="D1D5DB"/>
+                          </a:solidFill>
+                          <a:latin typeface="Calibri"/>
+                        </a:defRPr>
+                      </a:pPr>
+                      <a:r>
+                        <a:t>lite</a:t>
+                      </a:r>
+                    </a:p>
+                  </a:txBody>
+                  <a:tcPr>
+                    <a:solidFill>
+                      <a:srgbClr val="121224"/>
+                    </a:solidFill>
+                  </a:tcPr>
+                </a:tc>
+              </a:tr>
+              <a:tr h="384048">
+                <a:tc>
+                  <a:txBody>
+                    <a:bodyPr/>
+                    <a:lstStyle/>
+                    <a:p>
+                      <a:pPr>
+                        <a:defRPr sz="1100">
+                          <a:solidFill>
+                            <a:srgbClr val="D1D5DB"/>
+                          </a:solidFill>
+                          <a:latin typeface="Calibri"/>
+                        </a:defRPr>
+                      </a:pPr>
+                      <a:r>
+                        <a:t>Music</a:t>
+                      </a:r>
+                    </a:p>
+                  </a:txBody>
+                  <a:tcPr>
+                    <a:solidFill>
+                      <a:srgbClr val="121224"/>
+                    </a:solidFill>
+                  </a:tcPr>
+                </a:tc>
+                <a:tc>
+                  <a:txBody>
+                    <a:bodyPr/>
+                    <a:lstStyle/>
+                    <a:p>
+                      <a:pPr>
+                        <a:defRPr sz="1100">
+                          <a:solidFill>
+                            <a:srgbClr val="D1D5DB"/>
+                          </a:solidFill>
+                          <a:latin typeface="Calibri"/>
+                        </a:defRPr>
+                      </a:pPr>
+                      <a:r>
+                        <a:t>lyria-3-pro-preview (full songs), lyria-3-clip-preview (30s)</a:t>
+                      </a:r>
+                    </a:p>
+                  </a:txBody>
+                  <a:tcPr>
+                    <a:solidFill>
+                      <a:srgbClr val="121224"/>
+                    </a:solidFill>
+                  </a:tcPr>
+                </a:tc>
+                <a:tc>
+                  <a:txBody>
+                    <a:bodyPr/>
+                    <a:lstStyle/>
+                    <a:p>
+                      <a:pPr>
+                        <a:defRPr sz="1100">
+                          <a:solidFill>
+                            <a:srgbClr val="D1D5DB"/>
+                          </a:solidFill>
+                          <a:latin typeface="Calibri"/>
+                        </a:defRPr>
+                      </a:pPr>
+                      <a:r>
+                        <a:t>clip</a:t>
+                      </a:r>
+                    </a:p>
+                  </a:txBody>
+                  <a:tcPr>
+                    <a:solidFill>
+                      <a:srgbClr val="121224"/>
+                    </a:solidFill>
+                  </a:tcPr>
+                </a:tc>
+              </a:tr>
+              <a:tr h="384048">
+                <a:tc>
+                  <a:txBody>
+                    <a:bodyPr/>
+                    <a:lstStyle/>
+                    <a:p>
+                      <a:pPr>
+                        <a:defRPr sz="1100">
+                          <a:solidFill>
+                            <a:srgbClr val="D1D5DB"/>
+                          </a:solidFill>
+                          <a:latin typeface="Calibri"/>
+                        </a:defRPr>
+                      </a:pPr>
+                      <a:r>
+                        <a:t>TTS</a:t>
+                      </a:r>
+                    </a:p>
+                  </a:txBody>
+                  <a:tcPr>
+                    <a:solidFill>
+                      <a:srgbClr val="121224"/>
+                    </a:solidFill>
+                  </a:tcPr>
+                </a:tc>
+                <a:tc>
+                  <a:txBody>
+                    <a:bodyPr/>
+                    <a:lstStyle/>
+                    <a:p>
+                      <a:pPr>
+                        <a:defRPr sz="1100">
+                          <a:solidFill>
+                            <a:srgbClr val="D1D5DB"/>
+                          </a:solidFill>
+                          <a:latin typeface="Calibri"/>
+                        </a:defRPr>
+                      </a:pPr>
+                      <a:r>
+                        <a:t>gemini-3.1-flash-tts-preview (23 langs, 7 voices)</a:t>
+                      </a:r>
+                    </a:p>
+                  </a:txBody>
+                  <a:tcPr>
+                    <a:solidFill>
+                      <a:srgbClr val="121224"/>
+                    </a:solidFill>
+                  </a:tcPr>
+                </a:tc>
+                <a:tc>
+                  <a:txBody>
+                    <a:bodyPr/>
+                    <a:lstStyle/>
+                    <a:p>
+                      <a:pPr>
+                        <a:defRPr sz="1100">
+                          <a:solidFill>
+                            <a:srgbClr val="D1D5DB"/>
+                          </a:solidFill>
+                          <a:latin typeface="Calibri"/>
+                        </a:defRPr>
+                      </a:pPr>
+                      <a:r>
+                        <a:t>flash-tts</a:t>
+                      </a:r>
+                    </a:p>
+                  </a:txBody>
+                  <a:tcPr>
+                    <a:solidFill>
+                      <a:srgbClr val="121224"/>
+                    </a:solidFill>
+                  </a:tcPr>
+                </a:tc>
+              </a:tr>
+              <a:tr h="384048">
+                <a:tc>
+                  <a:txBody>
+                    <a:bodyPr/>
+                    <a:lstStyle/>
+                    <a:p>
+                      <a:pPr>
+                        <a:defRPr sz="1100">
+                          <a:solidFill>
+                            <a:srgbClr val="D1D5DB"/>
+                          </a:solidFill>
+                          <a:latin typeface="Calibri"/>
+                        </a:defRPr>
+                      </a:pPr>
+                      <a:r>
+                        <a:t>Upscale</a:t>
+                      </a:r>
+                    </a:p>
+                  </a:txBody>
+                  <a:tcPr>
+                    <a:solidFill>
+                      <a:srgbClr val="121224"/>
+                    </a:solidFill>
+                  </a:tcPr>
+                </a:tc>
+                <a:tc>
+                  <a:txBody>
+                    <a:bodyPr/>
+                    <a:lstStyle/>
+                    <a:p>
+                      <a:pPr>
+                        <a:defRPr sz="1100">
+                          <a:solidFill>
+                            <a:srgbClr val="D1D5DB"/>
+                          </a:solidFill>
+                          <a:latin typeface="Calibri"/>
+                        </a:defRPr>
+                      </a:pPr>
+                      <a:r>
+                        <a:t>imagen-4.0-upscale-preview, veo-3.1-generate-001 (4K)</a:t>
+                      </a:r>
+                    </a:p>
+                  </a:txBody>
+                  <a:tcPr>
+                    <a:solidFill>
+                      <a:srgbClr val="121224"/>
+                    </a:solidFill>
+                  </a:tcPr>
+                </a:tc>
+                <a:tc>
+                  <a:txBody>
+                    <a:bodyPr/>
+                    <a:lstStyle/>
+                    <a:p>
+                      <a:pPr>
+                        <a:defRPr sz="1100">
+                          <a:solidFill>
+                            <a:srgbClr val="D1D5DB"/>
+                          </a:solidFill>
+                          <a:latin typeface="Calibri"/>
+                        </a:defRPr>
+                      </a:pPr>
+                      <a:r>
+                        <a:t>—</a:t>
+                      </a:r>
+                    </a:p>
+                  </a:txBody>
+                  <a:tcPr>
+                    <a:solidFill>
+                      <a:srgbClr val="121224"/>
+                    </a:solidFill>
+                  </a:tcPr>
+                </a:tc>
+              </a:tr>
+            </a:tbl>
+          </a:graphicData>
+        </a:graphic>
+      </p:graphicFrame>
+      <p:sp>
+        <p:nvSpPr>
+          <p:cNvPr id="4" name="TextBox 3"/>
           <p:cNvSpPr txBox="1"/>
           <p:nvPr/>
         </p:nvSpPr>
         <p:spPr>
           <a:xfrm>
-            <a:off x="731520" y="1371600"/>
-            <a:ext cx="5029200" cy="3657600"/>
+            <a:off x="731520" y="5029200"/>
+            <a:ext cx="10058400" cy="365760"/>
           </a:xfrm>
           <a:prstGeom prst="rect">
             <a:avLst/>
@@ -6799,111 +7274,20 @@
           </a:bodyPr>
           <a:lstStyle/>
           <a:p>
-            <a:pPr>
-              <a:spcAft>
-                <a:spcPts val="800"/>
-              </a:spcAft>
-              <a:defRPr sz="1700">
-                <a:solidFill>
-                  <a:srgbClr val="FFFFFF"/>
+            <a:pPr algn="ctr">
+              <a:defRPr sz="1300" b="0">
+                <a:solidFill>
+                  <a:srgbClr val="FBBF24"/>
                 </a:solidFill>
                 <a:latin typeface="Calibri"/>
               </a:defRPr>
             </a:pPr>
             <a:r>
-              <a:t>"+ New" — Create a new blank workflow tab</a:t>
-            </a:r>
-          </a:p>
-          <a:p>
-            <a:pPr>
-              <a:spcAft>
-                <a:spcPts val="800"/>
-              </a:spcAft>
-              <a:defRPr sz="1700">
-                <a:solidFill>
-                  <a:srgbClr val="FFFFFF"/>
-                </a:solidFill>
-                <a:latin typeface="Calibri"/>
-              </a:defRPr>
-            </a:pPr>
-            <a:r>
-              <a:t>Click tabs — Switch between workflows instantly</a:t>
-            </a:r>
-          </a:p>
-          <a:p>
-            <a:pPr>
-              <a:spcAft>
-                <a:spcPts val="800"/>
-              </a:spcAft>
-              <a:defRPr sz="1700">
-                <a:solidFill>
-                  <a:srgbClr val="FFFFFF"/>
-                </a:solidFill>
-                <a:latin typeface="Calibri"/>
-              </a:defRPr>
-            </a:pPr>
-            <a:r>
-              <a:t>Double-click — Rename a tab inline</a:t>
-            </a:r>
-          </a:p>
-          <a:p>
-            <a:pPr>
-              <a:spcAft>
-                <a:spcPts val="800"/>
-              </a:spcAft>
-              <a:defRPr sz="1700">
-                <a:solidFill>
-                  <a:srgbClr val="FFFFFF"/>
-                </a:solidFill>
-                <a:latin typeface="Calibri"/>
-              </a:defRPr>
-            </a:pPr>
-            <a:r>
-              <a:t>"x" — Close a tab (can't close the last one)</a:t>
-            </a:r>
-          </a:p>
-          <a:p>
-            <a:pPr>
-              <a:spcAft>
-                <a:spcPts val="800"/>
-              </a:spcAft>
-              <a:defRPr sz="1700">
-                <a:solidFill>
-                  <a:srgbClr val="FFFFFF"/>
-                </a:solidFill>
-                <a:latin typeface="Calibri"/>
-              </a:defRPr>
-            </a:pPr>
-            <a:r>
-              <a:t>State preserved — Switching views doesn't lose work</a:t>
-            </a:r>
-          </a:p>
-        </p:txBody>
-      </p:sp>
-      <p:pic>
-        <p:nvPicPr>
-          <p:cNvPr id="4" name="Picture 3" descr="03-workflow-tabs.png"/>
-          <p:cNvPicPr>
-            <a:picLocks noChangeAspect="1"/>
-          </p:cNvPicPr>
-          <p:nvPr/>
-        </p:nvPicPr>
-        <p:blipFill>
-          <a:blip r:embed="rId2"/>
-          <a:stretch>
-            <a:fillRect/>
-          </a:stretch>
-        </p:blipFill>
-        <p:spPr>
-          <a:xfrm>
-            <a:off x="6400800" y="1188720"/>
-            <a:ext cx="5303520" cy="3409406"/>
-          </a:xfrm>
-          <a:prstGeom prst="rect">
-            <a:avLst/>
-          </a:prstGeom>
-        </p:spPr>
-      </p:pic>
+              <a:t>Lite model not supported for Veo Reference/Extend — auto-upgraded to fast</a:t>
+            </a:r>
+          </a:p>
+        </p:txBody>
+      </p:sp>
     </p:spTree>
   </p:cSld>
   <p:clrMapOvr>
@@ -6961,7 +7345,7 @@
               </a:defRPr>
             </a:pPr>
             <a:r>
-              <a:t>Team Collaboration</a:t>
+              <a:t>Text-to-Speech</a:t>
             </a:r>
           </a:p>
         </p:txBody>
@@ -6997,7 +7381,7 @@
               </a:defRPr>
             </a:pPr>
             <a:r>
-              <a:t>Create &amp; Join Teams</a:t>
+              <a:t>23 Languages</a:t>
             </a:r>
           </a:p>
         </p:txBody>
@@ -7011,6 +7395,150 @@
         <p:spPr>
           <a:xfrm>
             <a:off x="731520" y="1737360"/>
+            <a:ext cx="5029200" cy="1371600"/>
+          </a:xfrm>
+          <a:prstGeom prst="rect">
+            <a:avLst/>
+          </a:prstGeom>
+          <a:noFill/>
+        </p:spPr>
+        <p:txBody>
+          <a:bodyPr wrap="square">
+            <a:spAutoFit/>
+          </a:bodyPr>
+          <a:lstStyle/>
+          <a:p>
+            <a:pPr algn="l">
+              <a:defRPr sz="1400" b="0">
+                <a:solidFill>
+                  <a:srgbClr val="9CA3AF"/>
+                </a:solidFill>
+                <a:latin typeface="Calibri"/>
+              </a:defRPr>
+            </a:pPr>
+            <a:r>
+              <a:t>English, Spanish, French, German, Italian, Portuguese, Japanese, Korean, Chinese, Hindi, Arabic, Russian, Thai, Vietnamese, Indonesian, and more</a:t>
+            </a:r>
+          </a:p>
+        </p:txBody>
+      </p:sp>
+      <p:sp>
+        <p:nvSpPr>
+          <p:cNvPr id="5" name="TextBox 4"/>
+          <p:cNvSpPr txBox="1"/>
+          <p:nvPr/>
+        </p:nvSpPr>
+        <p:spPr>
+          <a:xfrm>
+            <a:off x="731520" y="3017520"/>
+            <a:ext cx="5029200" cy="457200"/>
+          </a:xfrm>
+          <a:prstGeom prst="rect">
+            <a:avLst/>
+          </a:prstGeom>
+          <a:noFill/>
+        </p:spPr>
+        <p:txBody>
+          <a:bodyPr wrap="square">
+            <a:spAutoFit/>
+          </a:bodyPr>
+          <a:lstStyle/>
+          <a:p>
+            <a:pPr algn="l">
+              <a:defRPr sz="2200" b="1">
+                <a:solidFill>
+                  <a:srgbClr val="4ADE80"/>
+                </a:solidFill>
+                <a:latin typeface="Calibri"/>
+              </a:defRPr>
+            </a:pPr>
+            <a:r>
+              <a:t>7 Voices</a:t>
+            </a:r>
+          </a:p>
+        </p:txBody>
+      </p:sp>
+      <p:sp>
+        <p:nvSpPr>
+          <p:cNvPr id="6" name="TextBox 5"/>
+          <p:cNvSpPr txBox="1"/>
+          <p:nvPr/>
+        </p:nvSpPr>
+        <p:spPr>
+          <a:xfrm>
+            <a:off x="731520" y="3566160"/>
+            <a:ext cx="5029200" cy="457200"/>
+          </a:xfrm>
+          <a:prstGeom prst="rect">
+            <a:avLst/>
+          </a:prstGeom>
+          <a:noFill/>
+        </p:spPr>
+        <p:txBody>
+          <a:bodyPr wrap="square">
+            <a:spAutoFit/>
+          </a:bodyPr>
+          <a:lstStyle/>
+          <a:p>
+            <a:pPr algn="l">
+              <a:defRPr sz="1500" b="0">
+                <a:solidFill>
+                  <a:srgbClr val="FFFFFF"/>
+                </a:solidFill>
+                <a:latin typeface="Calibri"/>
+              </a:defRPr>
+            </a:pPr>
+            <a:r>
+              <a:t>Kore, Leda, Puck, Charon, Fenrir, Aoede, Enceladus</a:t>
+            </a:r>
+          </a:p>
+        </p:txBody>
+      </p:sp>
+      <p:sp>
+        <p:nvSpPr>
+          <p:cNvPr id="7" name="TextBox 6"/>
+          <p:cNvSpPr txBox="1"/>
+          <p:nvPr/>
+        </p:nvSpPr>
+        <p:spPr>
+          <a:xfrm>
+            <a:off x="731520" y="4114800"/>
+            <a:ext cx="5029200" cy="457200"/>
+          </a:xfrm>
+          <a:prstGeom prst="rect">
+            <a:avLst/>
+          </a:prstGeom>
+          <a:noFill/>
+        </p:spPr>
+        <p:txBody>
+          <a:bodyPr wrap="square">
+            <a:spAutoFit/>
+          </a:bodyPr>
+          <a:lstStyle/>
+          <a:p>
+            <a:pPr algn="l">
+              <a:defRPr sz="2200" b="1">
+                <a:solidFill>
+                  <a:srgbClr val="4ADE80"/>
+                </a:solidFill>
+                <a:latin typeface="Calibri"/>
+              </a:defRPr>
+            </a:pPr>
+            <a:r>
+              <a:t>System Instructions</a:t>
+            </a:r>
+          </a:p>
+        </p:txBody>
+      </p:sp>
+      <p:sp>
+        <p:nvSpPr>
+          <p:cNvPr id="8" name="TextBox 7"/>
+          <p:cNvSpPr txBox="1"/>
+          <p:nvPr/>
+        </p:nvSpPr>
+        <p:spPr>
+          <a:xfrm>
+            <a:off x="731520" y="4663440"/>
             <a:ext cx="5029200" cy="1828800"/>
           </a:xfrm>
           <a:prstGeom prst="rect">
@@ -7028,15 +7556,15 @@
               <a:spcAft>
                 <a:spcPts val="800"/>
               </a:spcAft>
-              <a:defRPr sz="1500">
-                <a:solidFill>
-                  <a:srgbClr val="FFFFFF"/>
+              <a:defRPr sz="1400">
+                <a:solidFill>
+                  <a:srgbClr val="9CA3AF"/>
                 </a:solidFill>
                 <a:latin typeface="Calibri"/>
               </a:defRPr>
             </a:pPr>
             <a:r>
-              <a:t>Click "+" next to Teams in sidebar → name your team</a:t>
+              <a:t>"Speak cheerfully and with enthusiasm"</a:t>
             </a:r>
           </a:p>
           <a:p>
@@ -7044,15 +7572,15 @@
               <a:spcAft>
                 <a:spcPts val="800"/>
               </a:spcAft>
-              <a:defRPr sz="1500">
-                <a:solidFill>
-                  <a:srgbClr val="FFFFFF"/>
+              <a:defRPr sz="1400">
+                <a:solidFill>
+                  <a:srgbClr val="9CA3AF"/>
                 </a:solidFill>
                 <a:latin typeface="Calibri"/>
               </a:defRPr>
             </a:pPr>
             <a:r>
-              <a:t>Auto-generated join code — share with teammates</a:t>
+              <a:t>"Use a calm, professional news anchor tone"</a:t>
             </a:r>
           </a:p>
           <a:p>
@@ -7060,281 +7588,19 @@
               <a:spcAft>
                 <a:spcPts val="800"/>
               </a:spcAft>
-              <a:defRPr sz="1500">
-                <a:solidFill>
-                  <a:srgbClr val="FFFFFF"/>
+              <a:defRPr sz="1400">
+                <a:solidFill>
+                  <a:srgbClr val="9CA3AF"/>
                 </a:solidFill>
                 <a:latin typeface="Calibri"/>
               </a:defRPr>
             </a:pPr>
             <a:r>
-              <a:t>Teammates enter code to join instantly</a:t>
-            </a:r>
-          </a:p>
-        </p:txBody>
-      </p:sp>
-      <p:sp>
-        <p:nvSpPr>
-          <p:cNvPr id="5" name="TextBox 4"/>
-          <p:cNvSpPr txBox="1"/>
-          <p:nvPr/>
-        </p:nvSpPr>
-        <p:spPr>
-          <a:xfrm>
-            <a:off x="731520" y="3200400"/>
-            <a:ext cx="5029200" cy="457200"/>
-          </a:xfrm>
-          <a:prstGeom prst="rect">
-            <a:avLst/>
-          </a:prstGeom>
-          <a:noFill/>
-        </p:spPr>
-        <p:txBody>
-          <a:bodyPr wrap="square">
-            <a:spAutoFit/>
-          </a:bodyPr>
-          <a:lstStyle/>
-          <a:p>
-            <a:pPr algn="l">
-              <a:defRPr sz="2200" b="1">
-                <a:solidFill>
-                  <a:srgbClr val="4ADE80"/>
-                </a:solidFill>
-                <a:latin typeface="Calibri"/>
-              </a:defRPr>
-            </a:pPr>
-            <a:r>
-              <a:t>Workflow Visibility</a:t>
-            </a:r>
-          </a:p>
-        </p:txBody>
-      </p:sp>
-      <p:graphicFrame>
-        <p:nvGraphicFramePr>
-          <p:cNvPr id="6" name="Table 5"/>
-          <p:cNvGraphicFramePr>
-            <a:graphicFrameLocks noGrp="1"/>
-          </p:cNvGraphicFramePr>
-          <p:nvPr/>
-        </p:nvGraphicFramePr>
-        <p:xfrm>
-          <a:off x="731520" y="3840480"/>
-          <a:ext cx="5029200" cy="1645920"/>
-        </p:xfrm>
-        <a:graphic>
-          <a:graphicData uri="http://schemas.openxmlformats.org/drawingml/2006/table">
-            <a:tbl>
-              <a:tblPr firstRow="1" bandRow="1">
-                <a:tableStyleId>{5C22544A-7EE6-4342-B048-85BDC9FD1C3A}</a:tableStyleId>
-              </a:tblPr>
-              <a:tblGrid>
-                <a:gridCol w="2514600"/>
-                <a:gridCol w="2514600"/>
-              </a:tblGrid>
-              <a:tr h="411480">
-                <a:tc>
-                  <a:txBody>
-                    <a:bodyPr/>
-                    <a:lstStyle/>
-                    <a:p>
-                      <a:pPr>
-                        <a:defRPr sz="1200" b="1">
-                          <a:solidFill>
-                            <a:srgbClr val="FFFFFF"/>
-                          </a:solidFill>
-                          <a:latin typeface="Calibri"/>
-                        </a:defRPr>
-                      </a:pPr>
-                      <a:r>
-                        <a:t>Level</a:t>
-                      </a:r>
-                    </a:p>
-                  </a:txBody>
-                  <a:tcPr>
-                    <a:solidFill>
-                      <a:srgbClr val="1F1F3A"/>
-                    </a:solidFill>
-                  </a:tcPr>
-                </a:tc>
-                <a:tc>
-                  <a:txBody>
-                    <a:bodyPr/>
-                    <a:lstStyle/>
-                    <a:p>
-                      <a:pPr>
-                        <a:defRPr sz="1200" b="1">
-                          <a:solidFill>
-                            <a:srgbClr val="FFFFFF"/>
-                          </a:solidFill>
-                          <a:latin typeface="Calibri"/>
-                        </a:defRPr>
-                      </a:pPr>
-                      <a:r>
-                        <a:t>Who sees it</a:t>
-                      </a:r>
-                    </a:p>
-                  </a:txBody>
-                  <a:tcPr>
-                    <a:solidFill>
-                      <a:srgbClr val="1F1F3A"/>
-                    </a:solidFill>
-                  </a:tcPr>
-                </a:tc>
-              </a:tr>
-              <a:tr h="411480">
-                <a:tc>
-                  <a:txBody>
-                    <a:bodyPr/>
-                    <a:lstStyle/>
-                    <a:p>
-                      <a:pPr>
-                        <a:defRPr sz="1200">
-                          <a:solidFill>
-                            <a:srgbClr val="D1D5DB"/>
-                          </a:solidFill>
-                          <a:latin typeface="Calibri"/>
-                        </a:defRPr>
-                      </a:pPr>
-                      <a:r>
-                        <a:t>Private</a:t>
-                      </a:r>
-                    </a:p>
-                  </a:txBody>
-                  <a:tcPr>
-                    <a:solidFill>
-                      <a:srgbClr val="121224"/>
-                    </a:solidFill>
-                  </a:tcPr>
-                </a:tc>
-                <a:tc>
-                  <a:txBody>
-                    <a:bodyPr/>
-                    <a:lstStyle/>
-                    <a:p>
-                      <a:pPr>
-                        <a:defRPr sz="1200">
-                          <a:solidFill>
-                            <a:srgbClr val="D1D5DB"/>
-                          </a:solidFill>
-                          <a:latin typeface="Calibri"/>
-                        </a:defRPr>
-                      </a:pPr>
-                      <a:r>
-                        <a:t>Only you (default)</a:t>
-                      </a:r>
-                    </a:p>
-                  </a:txBody>
-                  <a:tcPr>
-                    <a:solidFill>
-                      <a:srgbClr val="121224"/>
-                    </a:solidFill>
-                  </a:tcPr>
-                </a:tc>
-              </a:tr>
-              <a:tr h="411480">
-                <a:tc>
-                  <a:txBody>
-                    <a:bodyPr/>
-                    <a:lstStyle/>
-                    <a:p>
-                      <a:pPr>
-                        <a:defRPr sz="1200">
-                          <a:solidFill>
-                            <a:srgbClr val="D1D5DB"/>
-                          </a:solidFill>
-                          <a:latin typeface="Calibri"/>
-                        </a:defRPr>
-                      </a:pPr>
-                      <a:r>
-                        <a:t>Team</a:t>
-                      </a:r>
-                    </a:p>
-                  </a:txBody>
-                  <a:tcPr>
-                    <a:solidFill>
-                      <a:srgbClr val="121224"/>
-                    </a:solidFill>
-                  </a:tcPr>
-                </a:tc>
-                <a:tc>
-                  <a:txBody>
-                    <a:bodyPr/>
-                    <a:lstStyle/>
-                    <a:p>
-                      <a:pPr>
-                        <a:defRPr sz="1200">
-                          <a:solidFill>
-                            <a:srgbClr val="D1D5DB"/>
-                          </a:solidFill>
-                          <a:latin typeface="Calibri"/>
-                        </a:defRPr>
-                      </a:pPr>
-                      <a:r>
-                        <a:t>All members of selected team</a:t>
-                      </a:r>
-                    </a:p>
-                  </a:txBody>
-                  <a:tcPr>
-                    <a:solidFill>
-                      <a:srgbClr val="121224"/>
-                    </a:solidFill>
-                  </a:tcPr>
-                </a:tc>
-              </a:tr>
-              <a:tr h="411480">
-                <a:tc>
-                  <a:txBody>
-                    <a:bodyPr/>
-                    <a:lstStyle/>
-                    <a:p>
-                      <a:pPr>
-                        <a:defRPr sz="1200">
-                          <a:solidFill>
-                            <a:srgbClr val="D1D5DB"/>
-                          </a:solidFill>
-                          <a:latin typeface="Calibri"/>
-                        </a:defRPr>
-                      </a:pPr>
-                      <a:r>
-                        <a:t>Public</a:t>
-                      </a:r>
-                    </a:p>
-                  </a:txBody>
-                  <a:tcPr>
-                    <a:solidFill>
-                      <a:srgbClr val="121224"/>
-                    </a:solidFill>
-                  </a:tcPr>
-                </a:tc>
-                <a:tc>
-                  <a:txBody>
-                    <a:bodyPr/>
-                    <a:lstStyle/>
-                    <a:p>
-                      <a:pPr>
-                        <a:defRPr sz="1200">
-                          <a:solidFill>
-                            <a:srgbClr val="D1D5DB"/>
-                          </a:solidFill>
-                          <a:latin typeface="Calibri"/>
-                        </a:defRPr>
-                      </a:pPr>
-                      <a:r>
-                        <a:t>Everyone on the platform</a:t>
-                      </a:r>
-                    </a:p>
-                  </a:txBody>
-                  <a:tcPr>
-                    <a:solidFill>
-                      <a:srgbClr val="121224"/>
-                    </a:solidFill>
-                  </a:tcPr>
-                </a:tc>
-              </a:tr>
-            </a:tbl>
-          </a:graphicData>
-        </a:graphic>
-      </p:graphicFrame>
+              <a:t>"Whisper softly as if telling a secret"</a:t>
+            </a:r>
+          </a:p>
+        </p:txBody>
+      </p:sp>
     </p:spTree>
   </p:cSld>
   <p:clrMapOvr>
@@ -7392,7 +7658,7 @@
               </a:defRPr>
             </a:pPr>
             <a:r>
-              <a:t>Saved Canvas</a:t>
+              <a:t>Production-Ready Templates</a:t>
             </a:r>
           </a:p>
         </p:txBody>
@@ -7405,8 +7671,8 @@
         </p:nvSpPr>
         <p:spPr>
           <a:xfrm>
-            <a:off x="731520" y="1188720"/>
-            <a:ext cx="5029200" cy="1828800"/>
+            <a:off x="731520" y="1097280"/>
+            <a:ext cx="10058400" cy="457200"/>
           </a:xfrm>
           <a:prstGeom prst="rect">
             <a:avLst/>
@@ -7419,181 +7685,346 @@
           </a:bodyPr>
           <a:lstStyle/>
           <a:p>
-            <a:pPr>
-              <a:spcAft>
-                <a:spcPts val="800"/>
-              </a:spcAft>
-              <a:defRPr sz="1700">
-                <a:solidFill>
-                  <a:srgbClr val="FFFFFF"/>
+            <a:pPr algn="l">
+              <a:defRPr sz="1400" b="0">
+                <a:solidFill>
+                  <a:srgbClr val="9CA3AF"/>
                 </a:solidFill>
                 <a:latin typeface="Calibri"/>
               </a:defRPr>
             </a:pPr>
             <a:r>
-              <a:t>Mine — Your private and shared workflows</a:t>
-            </a:r>
-          </a:p>
-          <a:p>
-            <a:pPr>
-              <a:spcAft>
-                <a:spcPts val="800"/>
-              </a:spcAft>
-              <a:defRPr sz="1700">
-                <a:solidFill>
-                  <a:srgbClr val="FFFFFF"/>
-                </a:solidFill>
-                <a:latin typeface="Calibri"/>
-              </a:defRPr>
-            </a:pPr>
-            <a:r>
-              <a:t>Team — Workflows shared by teammates</a:t>
-            </a:r>
-          </a:p>
-          <a:p>
-            <a:pPr>
-              <a:spcAft>
-                <a:spcPts val="800"/>
-              </a:spcAft>
-              <a:defRPr sz="1700">
-                <a:solidFill>
-                  <a:srgbClr val="FFFFFF"/>
-                </a:solidFill>
-                <a:latin typeface="Calibri"/>
-              </a:defRPr>
-            </a:pPr>
-            <a:r>
-              <a:t>Public — Community workflows</a:t>
-            </a:r>
-          </a:p>
-        </p:txBody>
-      </p:sp>
-      <p:sp>
-        <p:nvSpPr>
-          <p:cNvPr id="4" name="TextBox 3"/>
-          <p:cNvSpPr txBox="1"/>
+              <a:t>Customizable scaffolds — empty inputs ready to fill in. All 16:9 widescreen.</a:t>
+            </a:r>
+          </a:p>
+        </p:txBody>
+      </p:sp>
+      <p:graphicFrame>
+        <p:nvGraphicFramePr>
+          <p:cNvPr id="4" name="Table 3"/>
+          <p:cNvGraphicFramePr>
+            <a:graphicFrameLocks noGrp="1"/>
+          </p:cNvGraphicFramePr>
           <p:nvPr/>
-        </p:nvSpPr>
-        <p:spPr>
-          <a:xfrm>
-            <a:off x="731520" y="2926080"/>
-            <a:ext cx="5029200" cy="457200"/>
-          </a:xfrm>
-          <a:prstGeom prst="rect">
-            <a:avLst/>
-          </a:prstGeom>
-          <a:noFill/>
-        </p:spPr>
-        <p:txBody>
-          <a:bodyPr wrap="square">
-            <a:spAutoFit/>
-          </a:bodyPr>
-          <a:lstStyle/>
-          <a:p>
-            <a:pPr algn="l">
-              <a:defRPr sz="1800" b="1">
-                <a:solidFill>
-                  <a:srgbClr val="FBBF24"/>
-                </a:solidFill>
-                <a:latin typeface="Calibri"/>
-              </a:defRPr>
-            </a:pPr>
-            <a:r>
-              <a:t>Built-in Templates:</a:t>
-            </a:r>
-          </a:p>
-        </p:txBody>
-      </p:sp>
-      <p:sp>
-        <p:nvSpPr>
-          <p:cNvPr id="5" name="TextBox 4"/>
-          <p:cNvSpPr txBox="1"/>
-          <p:nvPr/>
-        </p:nvSpPr>
-        <p:spPr>
-          <a:xfrm>
-            <a:off x="731520" y="3474720"/>
-            <a:ext cx="5029200" cy="1828800"/>
-          </a:xfrm>
-          <a:prstGeom prst="rect">
-            <a:avLst/>
-          </a:prstGeom>
-          <a:noFill/>
-        </p:spPr>
-        <p:txBody>
-          <a:bodyPr wrap="square">
-            <a:spAutoFit/>
-          </a:bodyPr>
-          <a:lstStyle/>
-          <a:p>
-            <a:pPr>
-              <a:spcAft>
-                <a:spcPts val="800"/>
-              </a:spcAft>
-              <a:defRPr sz="1500">
-                <a:solidFill>
-                  <a:srgbClr val="9CA3AF"/>
-                </a:solidFill>
-                <a:latin typeface="Calibri"/>
-              </a:defRPr>
-            </a:pPr>
-            <a:r>
-              <a:t>Product Ad Workflow</a:t>
-            </a:r>
-          </a:p>
-          <a:p>
-            <a:pPr>
-              <a:spcAft>
-                <a:spcPts val="800"/>
-              </a:spcAft>
-              <a:defRPr sz="1500">
-                <a:solidFill>
-                  <a:srgbClr val="9CA3AF"/>
-                </a:solidFill>
-                <a:latin typeface="Calibri"/>
-              </a:defRPr>
-            </a:pPr>
-            <a:r>
-              <a:t>Influencer Video</a:t>
-            </a:r>
-          </a:p>
-          <a:p>
-            <a:pPr>
-              <a:spcAft>
-                <a:spcPts val="800"/>
-              </a:spcAft>
-              <a:defRPr sz="1500">
-                <a:solidFill>
-                  <a:srgbClr val="9CA3AF"/>
-                </a:solidFill>
-                <a:latin typeface="Calibri"/>
-              </a:defRPr>
-            </a:pPr>
-            <a:r>
-              <a:t>Fashion Virtual Tryon</a:t>
-            </a:r>
-          </a:p>
-          <a:p>
-            <a:pPr>
-              <a:spcAft>
-                <a:spcPts val="800"/>
-              </a:spcAft>
-              <a:defRPr sz="1500">
-                <a:solidFill>
-                  <a:srgbClr val="9CA3AF"/>
-                </a:solidFill>
-                <a:latin typeface="Calibri"/>
-              </a:defRPr>
-            </a:pPr>
-            <a:r>
-              <a:t>Look Book Creation</a:t>
-            </a:r>
-          </a:p>
-        </p:txBody>
-      </p:sp>
+        </p:nvGraphicFramePr>
+        <p:xfrm>
+          <a:off x="731520" y="1737360"/>
+          <a:ext cx="10515600" cy="1536192"/>
+        </p:xfrm>
+        <a:graphic>
+          <a:graphicData uri="http://schemas.openxmlformats.org/drawingml/2006/table">
+            <a:tbl>
+              <a:tblPr firstRow="1" bandRow="1">
+                <a:tableStyleId>{5C22544A-7EE6-4342-B048-85BDC9FD1C3A}</a:tableStyleId>
+              </a:tblPr>
+              <a:tblGrid>
+                <a:gridCol w="3505200"/>
+                <a:gridCol w="3505200"/>
+                <a:gridCol w="3505200"/>
+              </a:tblGrid>
+              <a:tr h="384048">
+                <a:tc>
+                  <a:txBody>
+                    <a:bodyPr/>
+                    <a:lstStyle/>
+                    <a:p>
+                      <a:pPr>
+                        <a:defRPr sz="1100" b="1">
+                          <a:solidFill>
+                            <a:srgbClr val="FFFFFF"/>
+                          </a:solidFill>
+                          <a:latin typeface="Calibri"/>
+                        </a:defRPr>
+                      </a:pPr>
+                      <a:r>
+                        <a:t>Template</a:t>
+                      </a:r>
+                    </a:p>
+                  </a:txBody>
+                  <a:tcPr>
+                    <a:solidFill>
+                      <a:srgbClr val="1F1F3A"/>
+                    </a:solidFill>
+                  </a:tcPr>
+                </a:tc>
+                <a:tc>
+                  <a:txBody>
+                    <a:bodyPr/>
+                    <a:lstStyle/>
+                    <a:p>
+                      <a:pPr>
+                        <a:defRPr sz="1100" b="1">
+                          <a:solidFill>
+                            <a:srgbClr val="FFFFFF"/>
+                          </a:solidFill>
+                          <a:latin typeface="Calibri"/>
+                        </a:defRPr>
+                      </a:pPr>
+                      <a:r>
+                        <a:t>Inputs</a:t>
+                      </a:r>
+                    </a:p>
+                  </a:txBody>
+                  <a:tcPr>
+                    <a:solidFill>
+                      <a:srgbClr val="1F1F3A"/>
+                    </a:solidFill>
+                  </a:tcPr>
+                </a:tc>
+                <a:tc>
+                  <a:txBody>
+                    <a:bodyPr/>
+                    <a:lstStyle/>
+                    <a:p>
+                      <a:pPr>
+                        <a:defRPr sz="1100" b="1">
+                          <a:solidFill>
+                            <a:srgbClr val="FFFFFF"/>
+                          </a:solidFill>
+                          <a:latin typeface="Calibri"/>
+                        </a:defRPr>
+                      </a:pPr>
+                      <a:r>
+                        <a:t>Pipeline</a:t>
+                      </a:r>
+                    </a:p>
+                  </a:txBody>
+                  <a:tcPr>
+                    <a:solidFill>
+                      <a:srgbClr val="1F1F3A"/>
+                    </a:solidFill>
+                  </a:tcPr>
+                </a:tc>
+              </a:tr>
+              <a:tr h="384048">
+                <a:tc>
+                  <a:txBody>
+                    <a:bodyPr/>
+                    <a:lstStyle/>
+                    <a:p>
+                      <a:pPr>
+                        <a:defRPr sz="1100">
+                          <a:solidFill>
+                            <a:srgbClr val="D1D5DB"/>
+                          </a:solidFill>
+                          <a:latin typeface="Calibri"/>
+                        </a:defRPr>
+                      </a:pPr>
+                      <a:r>
+                        <a:t>Product Ad</a:t>
+                      </a:r>
+                    </a:p>
+                  </a:txBody>
+                  <a:tcPr>
+                    <a:solidFill>
+                      <a:srgbClr val="121224"/>
+                    </a:solidFill>
+                  </a:tcPr>
+                </a:tc>
+                <a:tc>
+                  <a:txBody>
+                    <a:bodyPr/>
+                    <a:lstStyle/>
+                    <a:p>
+                      <a:pPr>
+                        <a:defRPr sz="1100">
+                          <a:solidFill>
+                            <a:srgbClr val="D1D5DB"/>
+                          </a:solidFill>
+                          <a:latin typeface="Calibri"/>
+                        </a:defRPr>
+                      </a:pPr>
+                      <a:r>
+                        <a:t>Photo + Brief + Style</a:t>
+                      </a:r>
+                    </a:p>
+                  </a:txBody>
+                  <a:tcPr>
+                    <a:solidFill>
+                      <a:srgbClr val="121224"/>
+                    </a:solidFill>
+                  </a:tcPr>
+                </a:tc>
+                <a:tc>
+                  <a:txBody>
+                    <a:bodyPr/>
+                    <a:lstStyle/>
+                    <a:p>
+                      <a:pPr>
+                        <a:defRPr sz="1100">
+                          <a:solidFill>
+                            <a:srgbClr val="D1D5DB"/>
+                          </a:solidFill>
+                          <a:latin typeface="Calibri"/>
+                        </a:defRPr>
+                      </a:pPr>
+                      <a:r>
+                        <a:t>Stylize → Hero image (4K) + Veo video (4K) + voice + music → Editor → Final ad</a:t>
+                      </a:r>
+                    </a:p>
+                  </a:txBody>
+                  <a:tcPr>
+                    <a:solidFill>
+                      <a:srgbClr val="121224"/>
+                    </a:solidFill>
+                  </a:tcPr>
+                </a:tc>
+              </a:tr>
+              <a:tr h="384048">
+                <a:tc>
+                  <a:txBody>
+                    <a:bodyPr/>
+                    <a:lstStyle/>
+                    <a:p>
+                      <a:pPr>
+                        <a:defRPr sz="1100">
+                          <a:solidFill>
+                            <a:srgbClr val="D1D5DB"/>
+                          </a:solidFill>
+                          <a:latin typeface="Calibri"/>
+                        </a:defRPr>
+                      </a:pPr>
+                      <a:r>
+                        <a:t>Cinema Shot — 3 Cuts</a:t>
+                      </a:r>
+                    </a:p>
+                  </a:txBody>
+                  <a:tcPr>
+                    <a:solidFill>
+                      <a:srgbClr val="121224"/>
+                    </a:solidFill>
+                  </a:tcPr>
+                </a:tc>
+                <a:tc>
+                  <a:txBody>
+                    <a:bodyPr/>
+                    <a:lstStyle/>
+                    <a:p>
+                      <a:pPr>
+                        <a:defRPr sz="1100">
+                          <a:solidFill>
+                            <a:srgbClr val="D1D5DB"/>
+                          </a:solidFill>
+                          <a:latin typeface="Calibri"/>
+                        </a:defRPr>
+                      </a:pPr>
+                      <a:r>
+                        <a:t>Character + Scene</a:t>
+                      </a:r>
+                    </a:p>
+                  </a:txBody>
+                  <a:tcPr>
+                    <a:solidFill>
+                      <a:srgbClr val="121224"/>
+                    </a:solidFill>
+                  </a:tcPr>
+                </a:tc>
+                <a:tc>
+                  <a:txBody>
+                    <a:bodyPr/>
+                    <a:lstStyle/>
+                    <a:p>
+                      <a:pPr>
+                        <a:defRPr sz="1100">
+                          <a:solidFill>
+                            <a:srgbClr val="D1D5DB"/>
+                          </a:solidFill>
+                          <a:latin typeface="Calibri"/>
+                        </a:defRPr>
+                      </a:pPr>
+                      <a:r>
+                        <a:t>Char ref → 3 framings (wide/medium/close) → 3 Veo clips + Lyria score → Cinema cut</a:t>
+                      </a:r>
+                    </a:p>
+                  </a:txBody>
+                  <a:tcPr>
+                    <a:solidFill>
+                      <a:srgbClr val="121224"/>
+                    </a:solidFill>
+                  </a:tcPr>
+                </a:tc>
+              </a:tr>
+              <a:tr h="384048">
+                <a:tc>
+                  <a:txBody>
+                    <a:bodyPr/>
+                    <a:lstStyle/>
+                    <a:p>
+                      <a:pPr>
+                        <a:defRPr sz="1100">
+                          <a:solidFill>
+                            <a:srgbClr val="D1D5DB"/>
+                          </a:solidFill>
+                          <a:latin typeface="Calibri"/>
+                        </a:defRPr>
+                      </a:pPr>
+                      <a:r>
+                        <a:t>Virtual Try-On</a:t>
+                      </a:r>
+                    </a:p>
+                  </a:txBody>
+                  <a:tcPr>
+                    <a:solidFill>
+                      <a:srgbClr val="121224"/>
+                    </a:solidFill>
+                  </a:tcPr>
+                </a:tc>
+                <a:tc>
+                  <a:txBody>
+                    <a:bodyPr/>
+                    <a:lstStyle/>
+                    <a:p>
+                      <a:pPr>
+                        <a:defRPr sz="1100">
+                          <a:solidFill>
+                            <a:srgbClr val="D1D5DB"/>
+                          </a:solidFill>
+                          <a:latin typeface="Calibri"/>
+                        </a:defRPr>
+                      </a:pPr>
+                      <a:r>
+                        <a:t>Person + Garment + BG + Motion</a:t>
+                      </a:r>
+                    </a:p>
+                  </a:txBody>
+                  <a:tcPr>
+                    <a:solidFill>
+                      <a:srgbClr val="121224"/>
+                    </a:solidFill>
+                  </a:tcPr>
+                </a:tc>
+                <a:tc>
+                  <a:txBody>
+                    <a:bodyPr/>
+                    <a:lstStyle/>
+                    <a:p>
+                      <a:pPr>
+                        <a:defRPr sz="1100">
+                          <a:solidFill>
+                            <a:srgbClr val="D1D5DB"/>
+                          </a:solidFill>
+                          <a:latin typeface="Calibri"/>
+                        </a:defRPr>
+                      </a:pPr>
+                      <a:r>
+                        <a:t>VTO → Background swap → Animate → Music → Fashion reel</a:t>
+                      </a:r>
+                    </a:p>
+                  </a:txBody>
+                  <a:tcPr>
+                    <a:solidFill>
+                      <a:srgbClr val="121224"/>
+                    </a:solidFill>
+                  </a:tcPr>
+                </a:tc>
+              </a:tr>
+            </a:tbl>
+          </a:graphicData>
+        </a:graphic>
+      </p:graphicFrame>
       <p:pic>
         <p:nvPicPr>
-          <p:cNvPr id="6" name="Picture 5" descr="04-saved-canvas.png"/>
+          <p:cNvPr id="5" name="Picture 4" descr="03-saved-canvas.png"/>
           <p:cNvPicPr>
             <a:picLocks noChangeAspect="1"/>
           </p:cNvPicPr>
@@ -7607,8 +8038,8 @@
         </p:blipFill>
         <p:spPr>
           <a:xfrm>
-            <a:off x="6400800" y="1188720"/>
-            <a:ext cx="5303520" cy="3409406"/>
+            <a:off x="731520" y="4114800"/>
+            <a:ext cx="10515600" cy="6760029"/>
           </a:xfrm>
           <a:prstGeom prst="rect">
             <a:avLst/>
@@ -7672,7 +8103,7 @@
               </a:defRPr>
             </a:pPr>
             <a:r>
-              <a:t>Asset Library</a:t>
+              <a:t>Saved Canvas — Workflow Library</a:t>
             </a:r>
           </a:p>
         </p:txBody>
@@ -7685,7 +8116,94 @@
         </p:nvSpPr>
         <p:spPr>
           <a:xfrm>
-            <a:off x="731520" y="1097280"/>
+            <a:off x="731520" y="1188720"/>
+            <a:ext cx="5029200" cy="2286000"/>
+          </a:xfrm>
+          <a:prstGeom prst="rect">
+            <a:avLst/>
+          </a:prstGeom>
+          <a:noFill/>
+        </p:spPr>
+        <p:txBody>
+          <a:bodyPr wrap="square">
+            <a:spAutoFit/>
+          </a:bodyPr>
+          <a:lstStyle/>
+          <a:p>
+            <a:pPr>
+              <a:spcAft>
+                <a:spcPts val="800"/>
+              </a:spcAft>
+              <a:defRPr sz="1500">
+                <a:solidFill>
+                  <a:srgbClr val="FFFFFF"/>
+                </a:solidFill>
+                <a:latin typeface="Calibri"/>
+              </a:defRPr>
+            </a:pPr>
+            <a:r>
+              <a:t>Mine — Your private and shared workflows</a:t>
+            </a:r>
+          </a:p>
+          <a:p>
+            <a:pPr>
+              <a:spcAft>
+                <a:spcPts val="800"/>
+              </a:spcAft>
+              <a:defRPr sz="1500">
+                <a:solidFill>
+                  <a:srgbClr val="FFFFFF"/>
+                </a:solidFill>
+                <a:latin typeface="Calibri"/>
+              </a:defRPr>
+            </a:pPr>
+            <a:r>
+              <a:t>Team — Workflows shared by teammates</a:t>
+            </a:r>
+          </a:p>
+          <a:p>
+            <a:pPr>
+              <a:spcAft>
+                <a:spcPts val="800"/>
+              </a:spcAft>
+              <a:defRPr sz="1500">
+                <a:solidFill>
+                  <a:srgbClr val="FFFFFF"/>
+                </a:solidFill>
+                <a:latin typeface="Calibri"/>
+              </a:defRPr>
+            </a:pPr>
+            <a:r>
+              <a:t>Public — Community workflows</a:t>
+            </a:r>
+          </a:p>
+          <a:p>
+            <a:pPr>
+              <a:spcAft>
+                <a:spcPts val="800"/>
+              </a:spcAft>
+              <a:defRPr sz="1500">
+                <a:solidFill>
+                  <a:srgbClr val="FFFFFF"/>
+                </a:solidFill>
+                <a:latin typeface="Calibri"/>
+              </a:defRPr>
+            </a:pPr>
+            <a:r>
+              <a:t>Templates — Pre-built starting points</a:t>
+            </a:r>
+          </a:p>
+        </p:txBody>
+      </p:sp>
+      <p:sp>
+        <p:nvSpPr>
+          <p:cNvPr id="4" name="TextBox 3"/>
+          <p:cNvSpPr txBox="1"/>
+          <p:nvPr/>
+        </p:nvSpPr>
+        <p:spPr>
+          <a:xfrm>
+            <a:off x="731520" y="3657600"/>
             <a:ext cx="5029200" cy="457200"/>
           </a:xfrm>
           <a:prstGeom prst="rect">
@@ -7700,29 +8218,29 @@
           <a:lstStyle/>
           <a:p>
             <a:pPr algn="l">
-              <a:defRPr sz="1600" b="0">
-                <a:solidFill>
-                  <a:srgbClr val="9CA3AF"/>
+              <a:defRPr sz="1800" b="1">
+                <a:solidFill>
+                  <a:srgbClr val="FBBF24"/>
                 </a:solidFill>
                 <a:latin typeface="Calibri"/>
               </a:defRPr>
             </a:pPr>
             <a:r>
-              <a:t>Every generated asset auto-saved with full context</a:t>
-            </a:r>
-          </a:p>
-        </p:txBody>
-      </p:sp>
-      <p:sp>
-        <p:nvSpPr>
-          <p:cNvPr id="4" name="TextBox 3"/>
+              <a:t>Edit Workflow:</a:t>
+            </a:r>
+          </a:p>
+        </p:txBody>
+      </p:sp>
+      <p:sp>
+        <p:nvSpPr>
+          <p:cNvPr id="5" name="TextBox 4"/>
           <p:cNvSpPr txBox="1"/>
           <p:nvPr/>
         </p:nvSpPr>
         <p:spPr>
           <a:xfrm>
-            <a:off x="731520" y="1828800"/>
-            <a:ext cx="5029200" cy="3200400"/>
+            <a:off x="731520" y="4206240"/>
+            <a:ext cx="5029200" cy="1828800"/>
           </a:xfrm>
           <a:prstGeom prst="rect">
             <a:avLst/>
@@ -7739,15 +8257,15 @@
               <a:spcAft>
                 <a:spcPts val="800"/>
               </a:spcAft>
-              <a:defRPr sz="1500">
-                <a:solidFill>
-                  <a:srgbClr val="FFFFFF"/>
+              <a:defRPr sz="1400">
+                <a:solidFill>
+                  <a:srgbClr val="9CA3AF"/>
                 </a:solidFill>
                 <a:latin typeface="Calibri"/>
               </a:defRPr>
             </a:pPr>
             <a:r>
-              <a:t>Filter by type: Images / Videos / Audio</a:t>
+              <a:t>Click ⚙ next to workflow → opens in NEW tab</a:t>
             </a:r>
           </a:p>
           <a:p>
@@ -7755,15 +8273,15 @@
               <a:spcAft>
                 <a:spcPts val="800"/>
               </a:spcAft>
-              <a:defRPr sz="1500">
-                <a:solidFill>
-                  <a:srgbClr val="FFFFFF"/>
+              <a:defRPr sz="1400">
+                <a:solidFill>
+                  <a:srgbClr val="9CA3AF"/>
                 </a:solidFill>
                 <a:latin typeface="Calibri"/>
               </a:defRPr>
             </a:pPr>
             <a:r>
-              <a:t>Search by prompt text</a:t>
+              <a:t>Or click workflow name → preview → Open in New Tab</a:t>
             </a:r>
           </a:p>
           <a:p>
@@ -7771,70 +8289,22 @@
               <a:spcAft>
                 <a:spcPts val="800"/>
               </a:spcAft>
-              <a:defRPr sz="1500">
-                <a:solidFill>
-                  <a:srgbClr val="FFFFFF"/>
+              <a:defRPr sz="1400">
+                <a:solidFill>
+                  <a:srgbClr val="9CA3AF"/>
                 </a:solidFill>
                 <a:latin typeface="Calibri"/>
               </a:defRPr>
             </a:pPr>
             <a:r>
-              <a:t>Grid or list view toggle</a:t>
-            </a:r>
-          </a:p>
-          <a:p>
-            <a:pPr>
-              <a:spcAft>
-                <a:spcPts val="800"/>
-              </a:spcAft>
-              <a:defRPr sz="1500">
-                <a:solidFill>
-                  <a:srgbClr val="FFFFFF"/>
-                </a:solidFill>
-                <a:latin typeface="Calibri"/>
-              </a:defRPr>
-            </a:pPr>
-            <a:r>
-              <a:t>Download any asset directly</a:t>
-            </a:r>
-          </a:p>
-          <a:p>
-            <a:pPr>
-              <a:spcAft>
-                <a:spcPts val="800"/>
-              </a:spcAft>
-              <a:defRPr sz="1500">
-                <a:solidFill>
-                  <a:srgbClr val="FFFFFF"/>
-                </a:solidFill>
-                <a:latin typeface="Calibri"/>
-              </a:defRPr>
-            </a:pPr>
-            <a:r>
-              <a:t>Expandable prompt display</a:t>
-            </a:r>
-          </a:p>
-          <a:p>
-            <a:pPr>
-              <a:spcAft>
-                <a:spcPts val="800"/>
-              </a:spcAft>
-              <a:defRPr sz="1500">
-                <a:solidFill>
-                  <a:srgbClr val="FFFFFF"/>
-                </a:solidFill>
-                <a:latin typeface="Calibri"/>
-              </a:defRPr>
-            </a:pPr>
-            <a:r>
-              <a:t>Model badge + relative timestamps</a:t>
+              <a:t>Original work in current tab is preserved</a:t>
             </a:r>
           </a:p>
         </p:txBody>
       </p:sp>
       <p:pic>
         <p:nvPicPr>
-          <p:cNvPr id="5" name="Picture 4" descr="05-asset-library.png"/>
+          <p:cNvPr id="6" name="Picture 5" descr="03-saved-canvas.png"/>
           <p:cNvPicPr>
             <a:picLocks noChangeAspect="1"/>
           </p:cNvPicPr>
@@ -7913,566 +8383,21 @@
               </a:defRPr>
             </a:pPr>
             <a:r>
-              <a:t>Supported AI Models</a:t>
-            </a:r>
-          </a:p>
-        </p:txBody>
-      </p:sp>
-      <p:graphicFrame>
-        <p:nvGraphicFramePr>
-          <p:cNvPr id="3" name="Table 2"/>
-          <p:cNvGraphicFramePr>
-            <a:graphicFrameLocks noGrp="1"/>
-          </p:cNvGraphicFramePr>
-          <p:nvPr/>
-        </p:nvGraphicFramePr>
-        <p:xfrm>
-          <a:off x="731520" y="1188720"/>
-          <a:ext cx="10515600" cy="2880360"/>
-        </p:xfrm>
-        <a:graphic>
-          <a:graphicData uri="http://schemas.openxmlformats.org/drawingml/2006/table">
-            <a:tbl>
-              <a:tblPr firstRow="1" bandRow="1">
-                <a:tableStyleId>{5C22544A-7EE6-4342-B048-85BDC9FD1C3A}</a:tableStyleId>
-              </a:tblPr>
-              <a:tblGrid>
-                <a:gridCol w="3505200"/>
-                <a:gridCol w="3505200"/>
-                <a:gridCol w="3505200"/>
-              </a:tblGrid>
-              <a:tr h="411480">
-                <a:tc>
-                  <a:txBody>
-                    <a:bodyPr/>
-                    <a:lstStyle/>
-                    <a:p>
-                      <a:pPr>
-                        <a:defRPr sz="1200" b="1">
-                          <a:solidFill>
-                            <a:srgbClr val="FFFFFF"/>
-                          </a:solidFill>
-                          <a:latin typeface="Calibri"/>
-                        </a:defRPr>
-                      </a:pPr>
-                      <a:r>
-                        <a:t>Capability</a:t>
-                      </a:r>
-                    </a:p>
-                  </a:txBody>
-                  <a:tcPr>
-                    <a:solidFill>
-                      <a:srgbClr val="1F1F3A"/>
-                    </a:solidFill>
-                  </a:tcPr>
-                </a:tc>
-                <a:tc>
-                  <a:txBody>
-                    <a:bodyPr/>
-                    <a:lstStyle/>
-                    <a:p>
-                      <a:pPr>
-                        <a:defRPr sz="1200" b="1">
-                          <a:solidFill>
-                            <a:srgbClr val="FFFFFF"/>
-                          </a:solidFill>
-                          <a:latin typeface="Calibri"/>
-                        </a:defRPr>
-                      </a:pPr>
-                      <a:r>
-                        <a:t>Models</a:t>
-                      </a:r>
-                    </a:p>
-                  </a:txBody>
-                  <a:tcPr>
-                    <a:solidFill>
-                      <a:srgbClr val="1F1F3A"/>
-                    </a:solidFill>
-                  </a:tcPr>
-                </a:tc>
-                <a:tc>
-                  <a:txBody>
-                    <a:bodyPr/>
-                    <a:lstStyle/>
-                    <a:p>
-                      <a:pPr>
-                        <a:defRPr sz="1200" b="1">
-                          <a:solidFill>
-                            <a:srgbClr val="FFFFFF"/>
-                          </a:solidFill>
-                          <a:latin typeface="Calibri"/>
-                        </a:defRPr>
-                      </a:pPr>
-                      <a:r>
-                        <a:t>Default</a:t>
-                      </a:r>
-                    </a:p>
-                  </a:txBody>
-                  <a:tcPr>
-                    <a:solidFill>
-                      <a:srgbClr val="1F1F3A"/>
-                    </a:solidFill>
-                  </a:tcPr>
-                </a:tc>
-              </a:tr>
-              <a:tr h="411480">
-                <a:tc>
-                  <a:txBody>
-                    <a:bodyPr/>
-                    <a:lstStyle/>
-                    <a:p>
-                      <a:pPr>
-                        <a:defRPr sz="1200">
-                          <a:solidFill>
-                            <a:srgbClr val="D1D5DB"/>
-                          </a:solidFill>
-                          <a:latin typeface="Calibri"/>
-                        </a:defRPr>
-                      </a:pPr>
-                      <a:r>
-                        <a:t>Text</a:t>
-                      </a:r>
-                    </a:p>
-                  </a:txBody>
-                  <a:tcPr>
-                    <a:solidFill>
-                      <a:srgbClr val="121224"/>
-                    </a:solidFill>
-                  </a:tcPr>
-                </a:tc>
-                <a:tc>
-                  <a:txBody>
-                    <a:bodyPr/>
-                    <a:lstStyle/>
-                    <a:p>
-                      <a:pPr>
-                        <a:defRPr sz="1200">
-                          <a:solidFill>
-                            <a:srgbClr val="D1D5DB"/>
-                          </a:solidFill>
-                          <a:latin typeface="Calibri"/>
-                        </a:defRPr>
-                      </a:pPr>
-                      <a:r>
-                        <a:t>gemini-3.1-pro-preview, gemini-3.1-flash-lite-preview</a:t>
-                      </a:r>
-                    </a:p>
-                  </a:txBody>
-                  <a:tcPr>
-                    <a:solidFill>
-                      <a:srgbClr val="121224"/>
-                    </a:solidFill>
-                  </a:tcPr>
-                </a:tc>
-                <a:tc>
-                  <a:txBody>
-                    <a:bodyPr/>
-                    <a:lstStyle/>
-                    <a:p>
-                      <a:pPr>
-                        <a:defRPr sz="1200">
-                          <a:solidFill>
-                            <a:srgbClr val="D1D5DB"/>
-                          </a:solidFill>
-                          <a:latin typeface="Calibri"/>
-                        </a:defRPr>
-                      </a:pPr>
-                      <a:r>
-                        <a:t>flash-lite</a:t>
-                      </a:r>
-                    </a:p>
-                  </a:txBody>
-                  <a:tcPr>
-                    <a:solidFill>
-                      <a:srgbClr val="121224"/>
-                    </a:solidFill>
-                  </a:tcPr>
-                </a:tc>
-              </a:tr>
-              <a:tr h="411480">
-                <a:tc>
-                  <a:txBody>
-                    <a:bodyPr/>
-                    <a:lstStyle/>
-                    <a:p>
-                      <a:pPr>
-                        <a:defRPr sz="1200">
-                          <a:solidFill>
-                            <a:srgbClr val="D1D5DB"/>
-                          </a:solidFill>
-                          <a:latin typeface="Calibri"/>
-                        </a:defRPr>
-                      </a:pPr>
-                      <a:r>
-                        <a:t>Image</a:t>
-                      </a:r>
-                    </a:p>
-                  </a:txBody>
-                  <a:tcPr>
-                    <a:solidFill>
-                      <a:srgbClr val="121224"/>
-                    </a:solidFill>
-                  </a:tcPr>
-                </a:tc>
-                <a:tc>
-                  <a:txBody>
-                    <a:bodyPr/>
-                    <a:lstStyle/>
-                    <a:p>
-                      <a:pPr>
-                        <a:defRPr sz="1200">
-                          <a:solidFill>
-                            <a:srgbClr val="D1D5DB"/>
-                          </a:solidFill>
-                          <a:latin typeface="Calibri"/>
-                        </a:defRPr>
-                      </a:pPr>
-                      <a:r>
-                        <a:t>gemini-3.1-flash-image-preview, gemini-2.5-flash-image</a:t>
-                      </a:r>
-                    </a:p>
-                  </a:txBody>
-                  <a:tcPr>
-                    <a:solidFill>
-                      <a:srgbClr val="121224"/>
-                    </a:solidFill>
-                  </a:tcPr>
-                </a:tc>
-                <a:tc>
-                  <a:txBody>
-                    <a:bodyPr/>
-                    <a:lstStyle/>
-                    <a:p>
-                      <a:pPr>
-                        <a:defRPr sz="1200">
-                          <a:solidFill>
-                            <a:srgbClr val="D1D5DB"/>
-                          </a:solidFill>
-                          <a:latin typeface="Calibri"/>
-                        </a:defRPr>
-                      </a:pPr>
-                      <a:r>
-                        <a:t>flash-image</a:t>
-                      </a:r>
-                    </a:p>
-                  </a:txBody>
-                  <a:tcPr>
-                    <a:solidFill>
-                      <a:srgbClr val="121224"/>
-                    </a:solidFill>
-                  </a:tcPr>
-                </a:tc>
-              </a:tr>
-              <a:tr h="411480">
-                <a:tc>
-                  <a:txBody>
-                    <a:bodyPr/>
-                    <a:lstStyle/>
-                    <a:p>
-                      <a:pPr>
-                        <a:defRPr sz="1200">
-                          <a:solidFill>
-                            <a:srgbClr val="D1D5DB"/>
-                          </a:solidFill>
-                          <a:latin typeface="Calibri"/>
-                        </a:defRPr>
-                      </a:pPr>
-                      <a:r>
-                        <a:t>Video</a:t>
-                      </a:r>
-                    </a:p>
-                  </a:txBody>
-                  <a:tcPr>
-                    <a:solidFill>
-                      <a:srgbClr val="121224"/>
-                    </a:solidFill>
-                  </a:tcPr>
-                </a:tc>
-                <a:tc>
-                  <a:txBody>
-                    <a:bodyPr/>
-                    <a:lstStyle/>
-                    <a:p>
-                      <a:pPr>
-                        <a:defRPr sz="1200">
-                          <a:solidFill>
-                            <a:srgbClr val="D1D5DB"/>
-                          </a:solidFill>
-                          <a:latin typeface="Calibri"/>
-                        </a:defRPr>
-                      </a:pPr>
-                      <a:r>
-                        <a:t>veo-3.1-generate-001, fast-generate-001, lite-generate-001</a:t>
-                      </a:r>
-                    </a:p>
-                  </a:txBody>
-                  <a:tcPr>
-                    <a:solidFill>
-                      <a:srgbClr val="121224"/>
-                    </a:solidFill>
-                  </a:tcPr>
-                </a:tc>
-                <a:tc>
-                  <a:txBody>
-                    <a:bodyPr/>
-                    <a:lstStyle/>
-                    <a:p>
-                      <a:pPr>
-                        <a:defRPr sz="1200">
-                          <a:solidFill>
-                            <a:srgbClr val="D1D5DB"/>
-                          </a:solidFill>
-                          <a:latin typeface="Calibri"/>
-                        </a:defRPr>
-                      </a:pPr>
-                      <a:r>
-                        <a:t>lite</a:t>
-                      </a:r>
-                    </a:p>
-                  </a:txBody>
-                  <a:tcPr>
-                    <a:solidFill>
-                      <a:srgbClr val="121224"/>
-                    </a:solidFill>
-                  </a:tcPr>
-                </a:tc>
-              </a:tr>
-              <a:tr h="411480">
-                <a:tc>
-                  <a:txBody>
-                    <a:bodyPr/>
-                    <a:lstStyle/>
-                    <a:p>
-                      <a:pPr>
-                        <a:defRPr sz="1200">
-                          <a:solidFill>
-                            <a:srgbClr val="D1D5DB"/>
-                          </a:solidFill>
-                          <a:latin typeface="Calibri"/>
-                        </a:defRPr>
-                      </a:pPr>
-                      <a:r>
-                        <a:t>Music</a:t>
-                      </a:r>
-                    </a:p>
-                  </a:txBody>
-                  <a:tcPr>
-                    <a:solidFill>
-                      <a:srgbClr val="121224"/>
-                    </a:solidFill>
-                  </a:tcPr>
-                </a:tc>
-                <a:tc>
-                  <a:txBody>
-                    <a:bodyPr/>
-                    <a:lstStyle/>
-                    <a:p>
-                      <a:pPr>
-                        <a:defRPr sz="1200">
-                          <a:solidFill>
-                            <a:srgbClr val="D1D5DB"/>
-                          </a:solidFill>
-                          <a:latin typeface="Calibri"/>
-                        </a:defRPr>
-                      </a:pPr>
-                      <a:r>
-                        <a:t>lyria-3-pro-preview (full songs), lyria-3-clip-preview (30s)</a:t>
-                      </a:r>
-                    </a:p>
-                  </a:txBody>
-                  <a:tcPr>
-                    <a:solidFill>
-                      <a:srgbClr val="121224"/>
-                    </a:solidFill>
-                  </a:tcPr>
-                </a:tc>
-                <a:tc>
-                  <a:txBody>
-                    <a:bodyPr/>
-                    <a:lstStyle/>
-                    <a:p>
-                      <a:pPr>
-                        <a:defRPr sz="1200">
-                          <a:solidFill>
-                            <a:srgbClr val="D1D5DB"/>
-                          </a:solidFill>
-                          <a:latin typeface="Calibri"/>
-                        </a:defRPr>
-                      </a:pPr>
-                      <a:r>
-                        <a:t>clip</a:t>
-                      </a:r>
-                    </a:p>
-                  </a:txBody>
-                  <a:tcPr>
-                    <a:solidFill>
-                      <a:srgbClr val="121224"/>
-                    </a:solidFill>
-                  </a:tcPr>
-                </a:tc>
-              </a:tr>
-              <a:tr h="411480">
-                <a:tc>
-                  <a:txBody>
-                    <a:bodyPr/>
-                    <a:lstStyle/>
-                    <a:p>
-                      <a:pPr>
-                        <a:defRPr sz="1200">
-                          <a:solidFill>
-                            <a:srgbClr val="D1D5DB"/>
-                          </a:solidFill>
-                          <a:latin typeface="Calibri"/>
-                        </a:defRPr>
-                      </a:pPr>
-                      <a:r>
-                        <a:t>TTS</a:t>
-                      </a:r>
-                    </a:p>
-                  </a:txBody>
-                  <a:tcPr>
-                    <a:solidFill>
-                      <a:srgbClr val="121224"/>
-                    </a:solidFill>
-                  </a:tcPr>
-                </a:tc>
-                <a:tc>
-                  <a:txBody>
-                    <a:bodyPr/>
-                    <a:lstStyle/>
-                    <a:p>
-                      <a:pPr>
-                        <a:defRPr sz="1200">
-                          <a:solidFill>
-                            <a:srgbClr val="D1D5DB"/>
-                          </a:solidFill>
-                          <a:latin typeface="Calibri"/>
-                        </a:defRPr>
-                      </a:pPr>
-                      <a:r>
-                        <a:t>gemini-3.1-flash-tts-preview (23 languages, 7 voices)</a:t>
-                      </a:r>
-                    </a:p>
-                  </a:txBody>
-                  <a:tcPr>
-                    <a:solidFill>
-                      <a:srgbClr val="121224"/>
-                    </a:solidFill>
-                  </a:tcPr>
-                </a:tc>
-                <a:tc>
-                  <a:txBody>
-                    <a:bodyPr/>
-                    <a:lstStyle/>
-                    <a:p>
-                      <a:pPr>
-                        <a:defRPr sz="1200">
-                          <a:solidFill>
-                            <a:srgbClr val="D1D5DB"/>
-                          </a:solidFill>
-                          <a:latin typeface="Calibri"/>
-                        </a:defRPr>
-                      </a:pPr>
-                      <a:r>
-                        <a:t>flash-tts</a:t>
-                      </a:r>
-                    </a:p>
-                  </a:txBody>
-                  <a:tcPr>
-                    <a:solidFill>
-                      <a:srgbClr val="121224"/>
-                    </a:solidFill>
-                  </a:tcPr>
-                </a:tc>
-              </a:tr>
-              <a:tr h="411480">
-                <a:tc>
-                  <a:txBody>
-                    <a:bodyPr/>
-                    <a:lstStyle/>
-                    <a:p>
-                      <a:pPr>
-                        <a:defRPr sz="1200">
-                          <a:solidFill>
-                            <a:srgbClr val="D1D5DB"/>
-                          </a:solidFill>
-                          <a:latin typeface="Calibri"/>
-                        </a:defRPr>
-                      </a:pPr>
-                      <a:r>
-                        <a:t>Upscale</a:t>
-                      </a:r>
-                    </a:p>
-                  </a:txBody>
-                  <a:tcPr>
-                    <a:solidFill>
-                      <a:srgbClr val="121224"/>
-                    </a:solidFill>
-                  </a:tcPr>
-                </a:tc>
-                <a:tc>
-                  <a:txBody>
-                    <a:bodyPr/>
-                    <a:lstStyle/>
-                    <a:p>
-                      <a:pPr>
-                        <a:defRPr sz="1200">
-                          <a:solidFill>
-                            <a:srgbClr val="D1D5DB"/>
-                          </a:solidFill>
-                          <a:latin typeface="Calibri"/>
-                        </a:defRPr>
-                      </a:pPr>
-                      <a:r>
-                        <a:t>imagen-4.0-upscale-preview, veo-3.1-generate-001 (4K video)</a:t>
-                      </a:r>
-                    </a:p>
-                  </a:txBody>
-                  <a:tcPr>
-                    <a:solidFill>
-                      <a:srgbClr val="121224"/>
-                    </a:solidFill>
-                  </a:tcPr>
-                </a:tc>
-                <a:tc>
-                  <a:txBody>
-                    <a:bodyPr/>
-                    <a:lstStyle/>
-                    <a:p>
-                      <a:pPr>
-                        <a:defRPr sz="1200">
-                          <a:solidFill>
-                            <a:srgbClr val="D1D5DB"/>
-                          </a:solidFill>
-                          <a:latin typeface="Calibri"/>
-                        </a:defRPr>
-                      </a:pPr>
-                      <a:r>
-                        <a:t>—</a:t>
-                      </a:r>
-                    </a:p>
-                  </a:txBody>
-                  <a:tcPr>
-                    <a:solidFill>
-                      <a:srgbClr val="121224"/>
-                    </a:solidFill>
-                  </a:tcPr>
-                </a:tc>
-              </a:tr>
-            </a:tbl>
-          </a:graphicData>
-        </a:graphic>
-      </p:graphicFrame>
-      <p:sp>
-        <p:nvSpPr>
-          <p:cNvPr id="4" name="TextBox 3"/>
+              <a:t>Asset Library</a:t>
+            </a:r>
+          </a:p>
+        </p:txBody>
+      </p:sp>
+      <p:sp>
+        <p:nvSpPr>
+          <p:cNvPr id="3" name="TextBox 2"/>
           <p:cNvSpPr txBox="1"/>
           <p:nvPr/>
         </p:nvSpPr>
         <p:spPr>
           <a:xfrm>
-            <a:off x="731520" y="5029200"/>
-            <a:ext cx="10058400" cy="457200"/>
+            <a:off x="731520" y="1097280"/>
+            <a:ext cx="5029200" cy="457200"/>
           </a:xfrm>
           <a:prstGeom prst="rect">
             <a:avLst/>
@@ -8485,8 +8410,8 @@
           </a:bodyPr>
           <a:lstStyle/>
           <a:p>
-            <a:pPr algn="ctr">
-              <a:defRPr sz="1400" b="0">
+            <a:pPr algn="l">
+              <a:defRPr sz="1600" b="0">
                 <a:solidFill>
                   <a:srgbClr val="9CA3AF"/>
                 </a:solidFill>
@@ -8494,11 +8419,154 @@
               </a:defRPr>
             </a:pPr>
             <a:r>
-              <a:t>All defaults set to lite/flash variants for speed and cost efficiency</a:t>
-            </a:r>
-          </a:p>
-        </p:txBody>
-      </p:sp>
+              <a:t>Every asset auto-saved with full metadata</a:t>
+            </a:r>
+          </a:p>
+        </p:txBody>
+      </p:sp>
+      <p:sp>
+        <p:nvSpPr>
+          <p:cNvPr id="4" name="TextBox 3"/>
+          <p:cNvSpPr txBox="1"/>
+          <p:nvPr/>
+        </p:nvSpPr>
+        <p:spPr>
+          <a:xfrm>
+            <a:off x="731520" y="1828800"/>
+            <a:ext cx="5029200" cy="3657600"/>
+          </a:xfrm>
+          <a:prstGeom prst="rect">
+            <a:avLst/>
+          </a:prstGeom>
+          <a:noFill/>
+        </p:spPr>
+        <p:txBody>
+          <a:bodyPr wrap="square">
+            <a:spAutoFit/>
+          </a:bodyPr>
+          <a:lstStyle/>
+          <a:p>
+            <a:pPr>
+              <a:spcAft>
+                <a:spcPts val="800"/>
+              </a:spcAft>
+              <a:defRPr sz="1500">
+                <a:solidFill>
+                  <a:srgbClr val="FFFFFF"/>
+                </a:solidFill>
+                <a:latin typeface="Calibri"/>
+              </a:defRPr>
+            </a:pPr>
+            <a:r>
+              <a:t>Filter: All / Images / Videos / Audio</a:t>
+            </a:r>
+          </a:p>
+          <a:p>
+            <a:pPr>
+              <a:spcAft>
+                <a:spcPts val="800"/>
+              </a:spcAft>
+              <a:defRPr sz="1500">
+                <a:solidFill>
+                  <a:srgbClr val="FFFFFF"/>
+                </a:solidFill>
+                <a:latin typeface="Calibri"/>
+              </a:defRPr>
+            </a:pPr>
+            <a:r>
+              <a:t>Search by prompt text</a:t>
+            </a:r>
+          </a:p>
+          <a:p>
+            <a:pPr>
+              <a:spcAft>
+                <a:spcPts val="800"/>
+              </a:spcAft>
+              <a:defRPr sz="1500">
+                <a:solidFill>
+                  <a:srgbClr val="FFFFFF"/>
+                </a:solidFill>
+                <a:latin typeface="Calibri"/>
+              </a:defRPr>
+            </a:pPr>
+            <a:r>
+              <a:t>Grid or list view toggle</a:t>
+            </a:r>
+          </a:p>
+          <a:p>
+            <a:pPr>
+              <a:spcAft>
+                <a:spcPts val="800"/>
+              </a:spcAft>
+              <a:defRPr sz="1500">
+                <a:solidFill>
+                  <a:srgbClr val="FFFFFF"/>
+                </a:solidFill>
+                <a:latin typeface="Calibri"/>
+              </a:defRPr>
+            </a:pPr>
+            <a:r>
+              <a:t>Expandable prompt display</a:t>
+            </a:r>
+          </a:p>
+          <a:p>
+            <a:pPr>
+              <a:spcAft>
+                <a:spcPts val="800"/>
+              </a:spcAft>
+              <a:defRPr sz="1500">
+                <a:solidFill>
+                  <a:srgbClr val="FFFFFF"/>
+                </a:solidFill>
+                <a:latin typeface="Calibri"/>
+              </a:defRPr>
+            </a:pPr>
+            <a:r>
+              <a:t>Model badges + relative timestamps</a:t>
+            </a:r>
+          </a:p>
+          <a:p>
+            <a:pPr>
+              <a:spcAft>
+                <a:spcPts val="800"/>
+              </a:spcAft>
+              <a:defRPr sz="1500">
+                <a:solidFill>
+                  <a:srgbClr val="FFFFFF"/>
+                </a:solidFill>
+                <a:latin typeface="Calibri"/>
+              </a:defRPr>
+            </a:pPr>
+            <a:r>
+              <a:t>Direct download for any asset</a:t>
+            </a:r>
+          </a:p>
+        </p:txBody>
+      </p:sp>
+      <p:pic>
+        <p:nvPicPr>
+          <p:cNvPr id="5" name="Picture 4" descr="04-asset-library.png"/>
+          <p:cNvPicPr>
+            <a:picLocks noChangeAspect="1"/>
+          </p:cNvPicPr>
+          <p:nvPr/>
+        </p:nvPicPr>
+        <p:blipFill>
+          <a:blip r:embed="rId2"/>
+          <a:stretch>
+            <a:fillRect/>
+          </a:stretch>
+        </p:blipFill>
+        <p:spPr>
+          <a:xfrm>
+            <a:off x="6400800" y="1188720"/>
+            <a:ext cx="5303520" cy="3409406"/>
+          </a:xfrm>
+          <a:prstGeom prst="rect">
+            <a:avLst/>
+          </a:prstGeom>
+        </p:spPr>
+      </p:pic>
     </p:spTree>
   </p:cSld>
   <p:clrMapOvr>
